--- a/demo/slides.pptx
+++ b/demo/slides.pptx
@@ -6,17 +6,15 @@
   </p:sldMasterIdLst>
   <p:sldIdLst>
     <p:sldId id="256" r:id="rId7"/>
-    <p:sldId id="257" r:id="rId8"/>
-    <p:sldId id="258" r:id="rId9"/>
-    <p:sldId id="259" r:id="rId10"/>
-    <p:sldId id="260" r:id="rId11"/>
-    <p:sldId id="261" r:id="rId12"/>
-    <p:sldId id="262" r:id="rId13"/>
-    <p:sldId id="263" r:id="rId14"/>
-    <p:sldId id="264" r:id="rId15"/>
-    <p:sldId id="265" r:id="rId16"/>
-    <p:sldId id="266" r:id="rId17"/>
-    <p:sldId id="267" r:id="rId18"/>
+    <p:sldId id="257" r:id="rId9"/>
+    <p:sldId id="258" r:id="rId10"/>
+    <p:sldId id="259" r:id="rId11"/>
+    <p:sldId id="260" r:id="rId12"/>
+    <p:sldId id="261" r:id="rId13"/>
+    <p:sldId id="262" r:id="rId14"/>
+    <p:sldId id="263" r:id="rId15"/>
+    <p:sldId id="264" r:id="rId16"/>
+    <p:sldId id="265" r:id="rId17"/>
   </p:sldIdLst>
   <p:sldSz cx="12191695" cy="6858000" type="screen4x3"/>
   <p:notesSz cx="6858000" cy="9144000"/>
@@ -116,6 +114,1056 @@
     </a:lvl9pPr>
   </p:defaultTextStyle>
 </p:presentation>
+</file>
+
+<file path=ppt/notesMasters/notesMaster1.xml><?xml version="1.0" encoding="utf-8"?>
+<p:notesMaster xmlns:a="http://schemas.openxmlformats.org/drawingml/2006/main" xmlns:p="http://schemas.openxmlformats.org/presentationml/2006/main" xmlns:r="http://schemas.openxmlformats.org/officeDocument/2006/relationships">
+  <p:cSld>
+    <p:bg>
+      <p:bgRef idx="1001">
+        <a:schemeClr val="bg1"/>
+      </p:bgRef>
+    </p:bg>
+    <p:spTree>
+      <p:nvGrpSpPr>
+        <p:cNvPr id="1" name=""/>
+        <p:cNvGrpSpPr/>
+        <p:nvPr/>
+      </p:nvGrpSpPr>
+      <p:grpSpPr>
+        <a:xfrm>
+          <a:off x="0" y="0"/>
+          <a:ext cx="0" cy="0"/>
+          <a:chOff x="0" y="0"/>
+          <a:chExt cx="0" cy="0"/>
+        </a:xfrm>
+      </p:grpSpPr>
+      <p:sp>
+        <p:nvSpPr>
+          <p:cNvPr id="2" name="Header Placeholder 1"/>
+          <p:cNvSpPr>
+            <a:spLocks noGrp="1"/>
+          </p:cNvSpPr>
+          <p:nvPr>
+            <p:ph type="hdr" sz="quarter"/>
+          </p:nvPr>
+        </p:nvSpPr>
+        <p:spPr>
+          <a:xfrm>
+            <a:off x="0" y="0"/>
+            <a:ext cx="2971800" cy="457200"/>
+          </a:xfrm>
+          <a:prstGeom prst="rect">
+            <a:avLst/>
+          </a:prstGeom>
+        </p:spPr>
+        <p:txBody>
+          <a:bodyPr vert="horz" lIns="91440" tIns="45720" rIns="91440" bIns="45720" rtlCol="0"/>
+          <a:lstStyle>
+            <a:lvl1pPr algn="l">
+              <a:defRPr sz="1200"/>
+            </a:lvl1pPr>
+          </a:lstStyle>
+          <a:p>
+            <a:endParaRPr lang="en-US"/>
+          </a:p>
+        </p:txBody>
+      </p:sp>
+      <p:sp>
+        <p:nvSpPr>
+          <p:cNvPr id="3" name="Date Placeholder 2"/>
+          <p:cNvSpPr>
+            <a:spLocks noGrp="1"/>
+          </p:cNvSpPr>
+          <p:nvPr>
+            <p:ph type="dt" idx="1"/>
+          </p:nvPr>
+        </p:nvSpPr>
+        <p:spPr>
+          <a:xfrm>
+            <a:off x="3884613" y="0"/>
+            <a:ext cx="2971800" cy="457200"/>
+          </a:xfrm>
+          <a:prstGeom prst="rect">
+            <a:avLst/>
+          </a:prstGeom>
+        </p:spPr>
+        <p:txBody>
+          <a:bodyPr vert="horz" lIns="91440" tIns="45720" rIns="91440" bIns="45720" rtlCol="0"/>
+          <a:lstStyle>
+            <a:lvl1pPr algn="r">
+              <a:defRPr sz="1200"/>
+            </a:lvl1pPr>
+          </a:lstStyle>
+          <a:p>
+            <a:fld id="{0F89C1C7-3DCD-1040-A9CF-14679D8B5DDD}" type="datetimeFigureOut">
+              <a:rPr lang="en-US" smtClean="0"/>
+              <a:t>10/17/16</a:t>
+            </a:fld>
+            <a:endParaRPr lang="en-US"/>
+          </a:p>
+        </p:txBody>
+      </p:sp>
+      <p:sp>
+        <p:nvSpPr>
+          <p:cNvPr id="4" name="Slide Image Placeholder 3"/>
+          <p:cNvSpPr>
+            <a:spLocks noGrp="1" noRot="1" noChangeAspect="1"/>
+          </p:cNvSpPr>
+          <p:nvPr>
+            <p:ph type="sldImg" idx="2"/>
+          </p:nvPr>
+        </p:nvSpPr>
+        <p:spPr>
+          <a:xfrm>
+            <a:off x="1143000" y="685800"/>
+            <a:ext cx="4572000" cy="3429000"/>
+          </a:xfrm>
+          <a:prstGeom prst="rect">
+            <a:avLst/>
+          </a:prstGeom>
+          <a:noFill/>
+          <a:ln w="12700">
+            <a:solidFill>
+              <a:prstClr val="black"/>
+            </a:solidFill>
+          </a:ln>
+        </p:spPr>
+        <p:txBody>
+          <a:bodyPr vert="horz" lIns="91440" tIns="45720" rIns="91440" bIns="45720" rtlCol="0" anchor="ctr"/>
+          <a:lstStyle/>
+          <a:p>
+            <a:endParaRPr lang="en-US"/>
+          </a:p>
+        </p:txBody>
+      </p:sp>
+      <p:sp>
+        <p:nvSpPr>
+          <p:cNvPr id="5" name="Notes Placeholder 4"/>
+          <p:cNvSpPr>
+            <a:spLocks noGrp="1"/>
+          </p:cNvSpPr>
+          <p:nvPr>
+            <p:ph type="body" sz="quarter" idx="3"/>
+          </p:nvPr>
+        </p:nvSpPr>
+        <p:spPr>
+          <a:xfrm>
+            <a:off x="685800" y="4343400"/>
+            <a:ext cx="5486400" cy="4114800"/>
+          </a:xfrm>
+          <a:prstGeom prst="rect">
+            <a:avLst/>
+          </a:prstGeom>
+        </p:spPr>
+        <p:txBody>
+          <a:bodyPr vert="horz" lIns="91440" tIns="45720" rIns="91440" bIns="45720" rtlCol="0"/>
+          <a:lstStyle/>
+          <a:p>
+            <a:pPr lvl="0"/>
+            <a:r>
+              <a:rPr lang="en-US" smtClean="0"/>
+              <a:t>Click to edit Master text styles</a:t>
+            </a:r>
+          </a:p>
+          <a:p>
+            <a:pPr lvl="1"/>
+            <a:r>
+              <a:rPr lang="en-US" smtClean="0"/>
+              <a:t>Second level</a:t>
+            </a:r>
+          </a:p>
+          <a:p>
+            <a:pPr lvl="2"/>
+            <a:r>
+              <a:rPr lang="en-US" smtClean="0"/>
+              <a:t>Third level</a:t>
+            </a:r>
+          </a:p>
+          <a:p>
+            <a:pPr lvl="3"/>
+            <a:r>
+              <a:rPr lang="en-US" smtClean="0"/>
+              <a:t>Fourth level</a:t>
+            </a:r>
+          </a:p>
+          <a:p>
+            <a:pPr lvl="4"/>
+            <a:r>
+              <a:rPr lang="en-US" smtClean="0"/>
+              <a:t>Fifth level</a:t>
+            </a:r>
+            <a:endParaRPr lang="en-US"/>
+          </a:p>
+        </p:txBody>
+      </p:sp>
+      <p:sp>
+        <p:nvSpPr>
+          <p:cNvPr id="6" name="Footer Placeholder 5"/>
+          <p:cNvSpPr>
+            <a:spLocks noGrp="1"/>
+          </p:cNvSpPr>
+          <p:nvPr>
+            <p:ph type="ftr" sz="quarter" idx="4"/>
+          </p:nvPr>
+        </p:nvSpPr>
+        <p:spPr>
+          <a:xfrm>
+            <a:off x="0" y="8685213"/>
+            <a:ext cx="2971800" cy="457200"/>
+          </a:xfrm>
+          <a:prstGeom prst="rect">
+            <a:avLst/>
+          </a:prstGeom>
+        </p:spPr>
+        <p:txBody>
+          <a:bodyPr vert="horz" lIns="91440" tIns="45720" rIns="91440" bIns="45720" rtlCol="0" anchor="b"/>
+          <a:lstStyle>
+            <a:lvl1pPr algn="l">
+              <a:defRPr sz="1200"/>
+            </a:lvl1pPr>
+          </a:lstStyle>
+          <a:p>
+            <a:endParaRPr lang="en-US"/>
+          </a:p>
+        </p:txBody>
+      </p:sp>
+      <p:sp>
+        <p:nvSpPr>
+          <p:cNvPr id="7" name="Slide Number Placeholder 6"/>
+          <p:cNvSpPr>
+            <a:spLocks noGrp="1"/>
+          </p:cNvSpPr>
+          <p:nvPr>
+            <p:ph type="sldNum" sz="quarter" idx="5"/>
+          </p:nvPr>
+        </p:nvSpPr>
+        <p:spPr>
+          <a:xfrm>
+            <a:off x="3884613" y="8685213"/>
+            <a:ext cx="2971800" cy="457200"/>
+          </a:xfrm>
+          <a:prstGeom prst="rect">
+            <a:avLst/>
+          </a:prstGeom>
+        </p:spPr>
+        <p:txBody>
+          <a:bodyPr vert="horz" lIns="91440" tIns="45720" rIns="91440" bIns="45720" rtlCol="0" anchor="b"/>
+          <a:lstStyle>
+            <a:lvl1pPr algn="r">
+              <a:defRPr sz="1200"/>
+            </a:lvl1pPr>
+          </a:lstStyle>
+          <a:p>
+            <a:fld id="{BB5E49A5-4136-284D-997B-48E1D791AD67}" type="slidenum">
+              <a:rPr lang="en-US" smtClean="0"/>
+              <a:t>‹#›</a:t>
+            </a:fld>
+            <a:endParaRPr lang="en-US"/>
+          </a:p>
+        </p:txBody>
+      </p:sp>
+    </p:spTree>
+    <p:extLst>
+      <p:ext uri="{BB962C8B-B14F-4D97-AF65-F5344CB8AC3E}">
+        <p14:creationId xmlns:p14="http://schemas.microsoft.com/office/powerpoint/2010/main" val="2623252185"/>
+      </p:ext>
+    </p:extLst>
+  </p:cSld>
+  <p:clrMap bg1="lt1" tx1="dk1" bg2="lt2" tx2="dk2" accent1="accent1" accent2="accent2" accent3="accent3" accent4="accent4" accent5="accent5" accent6="accent6" hlink="hlink" folHlink="folHlink"/>
+  <p:notesStyle>
+    <a:lvl1pPr marL="0" algn="l" defTabSz="457200" rtl="0" eaLnBrk="1" latinLnBrk="0" hangingPunct="1">
+      <a:defRPr sz="1200" kern="1200">
+        <a:solidFill>
+          <a:schemeClr val="tx1"/>
+        </a:solidFill>
+        <a:latin typeface="+mn-lt"/>
+        <a:ea typeface="+mn-ea"/>
+        <a:cs typeface="+mn-cs"/>
+      </a:defRPr>
+    </a:lvl1pPr>
+    <a:lvl2pPr marL="457200" algn="l" defTabSz="457200" rtl="0" eaLnBrk="1" latinLnBrk="0" hangingPunct="1">
+      <a:defRPr sz="1200" kern="1200">
+        <a:solidFill>
+          <a:schemeClr val="tx1"/>
+        </a:solidFill>
+        <a:latin typeface="+mn-lt"/>
+        <a:ea typeface="+mn-ea"/>
+        <a:cs typeface="+mn-cs"/>
+      </a:defRPr>
+    </a:lvl2pPr>
+    <a:lvl3pPr marL="914400" algn="l" defTabSz="457200" rtl="0" eaLnBrk="1" latinLnBrk="0" hangingPunct="1">
+      <a:defRPr sz="1200" kern="1200">
+        <a:solidFill>
+          <a:schemeClr val="tx1"/>
+        </a:solidFill>
+        <a:latin typeface="+mn-lt"/>
+        <a:ea typeface="+mn-ea"/>
+        <a:cs typeface="+mn-cs"/>
+      </a:defRPr>
+    </a:lvl3pPr>
+    <a:lvl4pPr marL="1371600" algn="l" defTabSz="457200" rtl="0" eaLnBrk="1" latinLnBrk="0" hangingPunct="1">
+      <a:defRPr sz="1200" kern="1200">
+        <a:solidFill>
+          <a:schemeClr val="tx1"/>
+        </a:solidFill>
+        <a:latin typeface="+mn-lt"/>
+        <a:ea typeface="+mn-ea"/>
+        <a:cs typeface="+mn-cs"/>
+      </a:defRPr>
+    </a:lvl4pPr>
+    <a:lvl5pPr marL="1828800" algn="l" defTabSz="457200" rtl="0" eaLnBrk="1" latinLnBrk="0" hangingPunct="1">
+      <a:defRPr sz="1200" kern="1200">
+        <a:solidFill>
+          <a:schemeClr val="tx1"/>
+        </a:solidFill>
+        <a:latin typeface="+mn-lt"/>
+        <a:ea typeface="+mn-ea"/>
+        <a:cs typeface="+mn-cs"/>
+      </a:defRPr>
+    </a:lvl5pPr>
+    <a:lvl6pPr marL="2286000" algn="l" defTabSz="457200" rtl="0" eaLnBrk="1" latinLnBrk="0" hangingPunct="1">
+      <a:defRPr sz="1200" kern="1200">
+        <a:solidFill>
+          <a:schemeClr val="tx1"/>
+        </a:solidFill>
+        <a:latin typeface="+mn-lt"/>
+        <a:ea typeface="+mn-ea"/>
+        <a:cs typeface="+mn-cs"/>
+      </a:defRPr>
+    </a:lvl6pPr>
+    <a:lvl7pPr marL="2743200" algn="l" defTabSz="457200" rtl="0" eaLnBrk="1" latinLnBrk="0" hangingPunct="1">
+      <a:defRPr sz="1200" kern="1200">
+        <a:solidFill>
+          <a:schemeClr val="tx1"/>
+        </a:solidFill>
+        <a:latin typeface="+mn-lt"/>
+        <a:ea typeface="+mn-ea"/>
+        <a:cs typeface="+mn-cs"/>
+      </a:defRPr>
+    </a:lvl7pPr>
+    <a:lvl8pPr marL="3200400" algn="l" defTabSz="457200" rtl="0" eaLnBrk="1" latinLnBrk="0" hangingPunct="1">
+      <a:defRPr sz="1200" kern="1200">
+        <a:solidFill>
+          <a:schemeClr val="tx1"/>
+        </a:solidFill>
+        <a:latin typeface="+mn-lt"/>
+        <a:ea typeface="+mn-ea"/>
+        <a:cs typeface="+mn-cs"/>
+      </a:defRPr>
+    </a:lvl8pPr>
+    <a:lvl9pPr marL="3657600" algn="l" defTabSz="457200" rtl="0" eaLnBrk="1" latinLnBrk="0" hangingPunct="1">
+      <a:defRPr sz="1200" kern="1200">
+        <a:solidFill>
+          <a:schemeClr val="tx1"/>
+        </a:solidFill>
+        <a:latin typeface="+mn-lt"/>
+        <a:ea typeface="+mn-ea"/>
+        <a:cs typeface="+mn-cs"/>
+      </a:defRPr>
+    </a:lvl9pPr>
+  </p:notesStyle>
+</p:notesMaster>
+</file>
+
+<file path=ppt/notesSlides/notesSlide1.xml><?xml version="1.0" encoding="utf-8"?>
+<p:notes xmlns:a="http://schemas.openxmlformats.org/drawingml/2006/main" xmlns:p="http://schemas.openxmlformats.org/presentationml/2006/main" xmlns:r="http://schemas.openxmlformats.org/officeDocument/2006/relationships">
+  <p:cSld>
+    <p:spTree>
+      <p:nvGrpSpPr>
+        <p:cNvPr id="1" name=""/>
+        <p:cNvGrpSpPr/>
+        <p:nvPr/>
+      </p:nvGrpSpPr>
+      <p:grpSpPr>
+        <a:xfrm>
+          <a:off x="0" y="0"/>
+          <a:ext cx="0" cy="0"/>
+          <a:chOff x="0" y="0"/>
+          <a:chExt cx="0" cy="0"/>
+        </a:xfrm>
+      </p:grpSpPr>
+      <p:sp>
+        <p:nvSpPr>
+          <p:cNvPr id="2" name="Slide Image Placeholder 1"/>
+          <p:cNvSpPr>
+            <a:spLocks noGrp="1"/>
+          </p:cNvSpPr>
+          <p:nvPr>
+            <p:ph type="sldImg" idx="2"/>
+          </p:nvPr>
+        </p:nvSpPr>
+        <p:spPr/>
+      </p:sp>
+      <p:sp>
+        <p:nvSpPr>
+          <p:cNvPr id="3" name="Notes Placeholder 2"/>
+          <p:cNvSpPr>
+            <a:spLocks noGrp="1"/>
+          </p:cNvSpPr>
+          <p:nvPr>
+            <p:ph type="body" idx="3" sz="quarter"/>
+          </p:nvPr>
+        </p:nvSpPr>
+        <p:spPr/>
+        <p:txBody>
+          <a:bodyPr/>
+          <a:lstStyle/>
+          <a:p>
+            <a:r>
+              <a:t>Good morning, evaluators. Welcome to my DevSecOps Capstone presentation on PodiumHQ. Rather than cloning a generic TaskBoard, PodiumHQ addresses the operational challenge of running large-scale hackathons and technical project evaluations. In this presentation, I will walk you through the entire cloud-native lifecycle: from our 91% coverage backend and hardened non-root containers, to our GitHub Actions CI/CD with Trivy gates, Terraform AWS infrastructure, ArgoCD GitOps, and Prometheus observability.</a:t>
+            </a:r>
+          </a:p>
+        </p:txBody>
+      </p:sp>
+      <p:sp>
+        <p:nvSpPr>
+          <p:cNvPr id="4" name="Slide Number Placeholder 3"/>
+          <p:cNvSpPr>
+            <a:spLocks noGrp="1"/>
+          </p:cNvSpPr>
+          <p:nvPr>
+            <p:ph type="sldNum" idx="5" sz="quarter"/>
+          </p:nvPr>
+        </p:nvSpPr>
+        <p:spPr/>
+      </p:sp>
+    </p:spTree>
+  </p:cSld>
+  <p:clrMapOvr>
+    <a:masterClrMapping/>
+  </p:clrMapOvr>
+</p:notes>
+</file>
+
+<file path=ppt/notesSlides/notesSlide10.xml><?xml version="1.0" encoding="utf-8"?>
+<p:notes xmlns:a="http://schemas.openxmlformats.org/drawingml/2006/main" xmlns:p="http://schemas.openxmlformats.org/presentationml/2006/main" xmlns:r="http://schemas.openxmlformats.org/officeDocument/2006/relationships">
+  <p:cSld>
+    <p:spTree>
+      <p:nvGrpSpPr>
+        <p:cNvPr id="1" name=""/>
+        <p:cNvGrpSpPr/>
+        <p:nvPr/>
+      </p:nvGrpSpPr>
+      <p:grpSpPr>
+        <a:xfrm>
+          <a:off x="0" y="0"/>
+          <a:ext cx="0" cy="0"/>
+          <a:chOff x="0" y="0"/>
+          <a:chExt cx="0" cy="0"/>
+        </a:xfrm>
+      </p:grpSpPr>
+      <p:sp>
+        <p:nvSpPr>
+          <p:cNvPr id="2" name="Slide Image Placeholder 1"/>
+          <p:cNvSpPr>
+            <a:spLocks noGrp="1"/>
+          </p:cNvSpPr>
+          <p:nvPr>
+            <p:ph type="sldImg" idx="2"/>
+          </p:nvPr>
+        </p:nvSpPr>
+        <p:spPr/>
+      </p:sp>
+      <p:sp>
+        <p:nvSpPr>
+          <p:cNvPr id="3" name="Notes Placeholder 2"/>
+          <p:cNvSpPr>
+            <a:spLocks noGrp="1"/>
+          </p:cNvSpPr>
+          <p:nvPr>
+            <p:ph type="body" idx="3" sz="quarter"/>
+          </p:nvPr>
+        </p:nvSpPr>
+        <p:spPr/>
+        <p:txBody>
+          <a:bodyPr/>
+          <a:lstStyle/>
+          <a:p>
+            <a:r>
+              <a:t>To conclude on Slide 10: PodiumHQ successfully satisfies the 100-point Capstone Grading Rubric. Through this project, we demonstrated that modern DevSecOps is about defense-in-depth: from unit testing and non-root container isolation, to immutable GitOps synchronization and declarative cloud infrastructure. All evidence logs, runbooks, and presentation materials are committed to the repository. Thank you for your attention, and I am now ready for your questions.</a:t>
+            </a:r>
+          </a:p>
+        </p:txBody>
+      </p:sp>
+      <p:sp>
+        <p:nvSpPr>
+          <p:cNvPr id="4" name="Slide Number Placeholder 3"/>
+          <p:cNvSpPr>
+            <a:spLocks noGrp="1"/>
+          </p:cNvSpPr>
+          <p:nvPr>
+            <p:ph type="sldNum" idx="5" sz="quarter"/>
+          </p:nvPr>
+        </p:nvSpPr>
+        <p:spPr/>
+      </p:sp>
+    </p:spTree>
+  </p:cSld>
+  <p:clrMapOvr>
+    <a:masterClrMapping/>
+  </p:clrMapOvr>
+</p:notes>
+</file>
+
+<file path=ppt/notesSlides/notesSlide2.xml><?xml version="1.0" encoding="utf-8"?>
+<p:notes xmlns:a="http://schemas.openxmlformats.org/drawingml/2006/main" xmlns:p="http://schemas.openxmlformats.org/presentationml/2006/main" xmlns:r="http://schemas.openxmlformats.org/officeDocument/2006/relationships">
+  <p:cSld>
+    <p:spTree>
+      <p:nvGrpSpPr>
+        <p:cNvPr id="1" name=""/>
+        <p:cNvGrpSpPr/>
+        <p:nvPr/>
+      </p:nvGrpSpPr>
+      <p:grpSpPr>
+        <a:xfrm>
+          <a:off x="0" y="0"/>
+          <a:ext cx="0" cy="0"/>
+          <a:chOff x="0" y="0"/>
+          <a:chExt cx="0" cy="0"/>
+        </a:xfrm>
+      </p:grpSpPr>
+      <p:sp>
+        <p:nvSpPr>
+          <p:cNvPr id="2" name="Slide Image Placeholder 1"/>
+          <p:cNvSpPr>
+            <a:spLocks noGrp="1"/>
+          </p:cNvSpPr>
+          <p:nvPr>
+            <p:ph type="sldImg" idx="2"/>
+          </p:nvPr>
+        </p:nvSpPr>
+        <p:spPr/>
+      </p:sp>
+      <p:sp>
+        <p:nvSpPr>
+          <p:cNvPr id="3" name="Notes Placeholder 2"/>
+          <p:cNvSpPr>
+            <a:spLocks noGrp="1"/>
+          </p:cNvSpPr>
+          <p:nvPr>
+            <p:ph type="body" idx="3" sz="quarter"/>
+          </p:nvPr>
+        </p:nvSpPr>
+        <p:spPr/>
+        <p:txBody>
+          <a:bodyPr/>
+          <a:lstStyle/>
+          <a:p>
+            <a:r>
+              <a:t>On Slide 2, we break down the application architecture across three distinct tiers. Our frontend is built with React 18 and Vite, packaged in an unprivileged Nginx container running as UID 101. Our backend is powered by FastAPI and Python 3.12, providing high-throughput async REST endpoints. All data is persisted in PostgreSQL 16 using SQLAlchemy 2.0 and Alembic migrations. Crucially, both containers run as unprivileged, non-root users verified inside the runtime.</a:t>
+            </a:r>
+          </a:p>
+        </p:txBody>
+      </p:sp>
+      <p:sp>
+        <p:nvSpPr>
+          <p:cNvPr id="4" name="Slide Number Placeholder 3"/>
+          <p:cNvSpPr>
+            <a:spLocks noGrp="1"/>
+          </p:cNvSpPr>
+          <p:nvPr>
+            <p:ph type="sldNum" idx="5" sz="quarter"/>
+          </p:nvPr>
+        </p:nvSpPr>
+        <p:spPr/>
+      </p:sp>
+    </p:spTree>
+  </p:cSld>
+  <p:clrMapOvr>
+    <a:masterClrMapping/>
+  </p:clrMapOvr>
+</p:notes>
+</file>
+
+<file path=ppt/notesSlides/notesSlide3.xml><?xml version="1.0" encoding="utf-8"?>
+<p:notes xmlns:a="http://schemas.openxmlformats.org/drawingml/2006/main" xmlns:p="http://schemas.openxmlformats.org/presentationml/2006/main" xmlns:r="http://schemas.openxmlformats.org/officeDocument/2006/relationships">
+  <p:cSld>
+    <p:spTree>
+      <p:nvGrpSpPr>
+        <p:cNvPr id="1" name=""/>
+        <p:cNvGrpSpPr/>
+        <p:nvPr/>
+      </p:nvGrpSpPr>
+      <p:grpSpPr>
+        <a:xfrm>
+          <a:off x="0" y="0"/>
+          <a:ext cx="0" cy="0"/>
+          <a:chOff x="0" y="0"/>
+          <a:chExt cx="0" cy="0"/>
+        </a:xfrm>
+      </p:grpSpPr>
+      <p:sp>
+        <p:nvSpPr>
+          <p:cNvPr id="2" name="Slide Image Placeholder 1"/>
+          <p:cNvSpPr>
+            <a:spLocks noGrp="1"/>
+          </p:cNvSpPr>
+          <p:nvPr>
+            <p:ph type="sldImg" idx="2"/>
+          </p:nvPr>
+        </p:nvSpPr>
+        <p:spPr/>
+      </p:sp>
+      <p:sp>
+        <p:nvSpPr>
+          <p:cNvPr id="3" name="Notes Placeholder 2"/>
+          <p:cNvSpPr>
+            <a:spLocks noGrp="1"/>
+          </p:cNvSpPr>
+          <p:nvPr>
+            <p:ph type="body" idx="3" sz="quarter"/>
+          </p:nvPr>
+        </p:nvSpPr>
+        <p:spPr/>
+        <p:txBody>
+          <a:bodyPr/>
+          <a:lstStyle/>
+          <a:p>
+            <a:r>
+              <a:t>Slide 3 presents our end-to-end architecture diagram. Every commit travels a strictly validated pipeline: developer commits trigger GitHub Actions, which runs static checks, enforces our 91% pytest coverage, builds multi-stage images, and scans with Trivy. Images are published to GHCR with immutable Git SHA tags. ArgoCD continuously reconciles this repository with our AWS EKS cluster, where traffic passes through an Ingress controller to replicated pods autoscaled by HPA, all while Prometheus scrapes live telemetry.</a:t>
+            </a:r>
+          </a:p>
+        </p:txBody>
+      </p:sp>
+      <p:sp>
+        <p:nvSpPr>
+          <p:cNvPr id="4" name="Slide Number Placeholder 3"/>
+          <p:cNvSpPr>
+            <a:spLocks noGrp="1"/>
+          </p:cNvSpPr>
+          <p:nvPr>
+            <p:ph type="sldNum" idx="5" sz="quarter"/>
+          </p:nvPr>
+        </p:nvSpPr>
+        <p:spPr/>
+      </p:sp>
+    </p:spTree>
+  </p:cSld>
+  <p:clrMapOvr>
+    <a:masterClrMapping/>
+  </p:clrMapOvr>
+</p:notes>
+</file>
+
+<file path=ppt/notesSlides/notesSlide4.xml><?xml version="1.0" encoding="utf-8"?>
+<p:notes xmlns:a="http://schemas.openxmlformats.org/drawingml/2006/main" xmlns:p="http://schemas.openxmlformats.org/presentationml/2006/main" xmlns:r="http://schemas.openxmlformats.org/officeDocument/2006/relationships">
+  <p:cSld>
+    <p:spTree>
+      <p:nvGrpSpPr>
+        <p:cNvPr id="1" name=""/>
+        <p:cNvGrpSpPr/>
+        <p:nvPr/>
+      </p:nvGrpSpPr>
+      <p:grpSpPr>
+        <a:xfrm>
+          <a:off x="0" y="0"/>
+          <a:ext cx="0" cy="0"/>
+          <a:chOff x="0" y="0"/>
+          <a:chExt cx="0" cy="0"/>
+        </a:xfrm>
+      </p:grpSpPr>
+      <p:sp>
+        <p:nvSpPr>
+          <p:cNvPr id="2" name="Slide Image Placeholder 1"/>
+          <p:cNvSpPr>
+            <a:spLocks noGrp="1"/>
+          </p:cNvSpPr>
+          <p:nvPr>
+            <p:ph type="sldImg" idx="2"/>
+          </p:nvPr>
+        </p:nvSpPr>
+        <p:spPr/>
+      </p:sp>
+      <p:sp>
+        <p:nvSpPr>
+          <p:cNvPr id="3" name="Notes Placeholder 2"/>
+          <p:cNvSpPr>
+            <a:spLocks noGrp="1"/>
+          </p:cNvSpPr>
+          <p:nvPr>
+            <p:ph type="body" idx="3" sz="quarter"/>
+          </p:nvPr>
+        </p:nvSpPr>
+        <p:spPr/>
+        <p:txBody>
+          <a:bodyPr/>
+          <a:lstStyle/>
+          <a:p>
+            <a:r>
+              <a:t>On Slide 4, we examine our CI/CD implementation defined in .github/workflows/ci-cd.yml. The pipeline enforces three sequential quality gates. First, Ruff and Mypy perform automated static analysis. Second, Pytest executes 31 tests and verifies our coverage threshold. Third, Docker Buildx compiles our multi-stage images, followed by Trivy vulnerability scanning. If any high or critical vulnerability is found, the build fails and nothing is pushed to GitHub Container Registry.</a:t>
+            </a:r>
+          </a:p>
+        </p:txBody>
+      </p:sp>
+      <p:sp>
+        <p:nvSpPr>
+          <p:cNvPr id="4" name="Slide Number Placeholder 3"/>
+          <p:cNvSpPr>
+            <a:spLocks noGrp="1"/>
+          </p:cNvSpPr>
+          <p:nvPr>
+            <p:ph type="sldNum" idx="5" sz="quarter"/>
+          </p:nvPr>
+        </p:nvSpPr>
+        <p:spPr/>
+      </p:sp>
+    </p:spTree>
+  </p:cSld>
+  <p:clrMapOvr>
+    <a:masterClrMapping/>
+  </p:clrMapOvr>
+</p:notes>
+</file>
+
+<file path=ppt/notesSlides/notesSlide5.xml><?xml version="1.0" encoding="utf-8"?>
+<p:notes xmlns:a="http://schemas.openxmlformats.org/drawingml/2006/main" xmlns:p="http://schemas.openxmlformats.org/presentationml/2006/main" xmlns:r="http://schemas.openxmlformats.org/officeDocument/2006/relationships">
+  <p:cSld>
+    <p:spTree>
+      <p:nvGrpSpPr>
+        <p:cNvPr id="1" name=""/>
+        <p:cNvGrpSpPr/>
+        <p:nvPr/>
+      </p:nvGrpSpPr>
+      <p:grpSpPr>
+        <a:xfrm>
+          <a:off x="0" y="0"/>
+          <a:ext cx="0" cy="0"/>
+          <a:chOff x="0" y="0"/>
+          <a:chExt cx="0" cy="0"/>
+        </a:xfrm>
+      </p:grpSpPr>
+      <p:sp>
+        <p:nvSpPr>
+          <p:cNvPr id="2" name="Slide Image Placeholder 1"/>
+          <p:cNvSpPr>
+            <a:spLocks noGrp="1"/>
+          </p:cNvSpPr>
+          <p:nvPr>
+            <p:ph type="sldImg" idx="2"/>
+          </p:nvPr>
+        </p:nvSpPr>
+        <p:spPr/>
+      </p:sp>
+      <p:sp>
+        <p:nvSpPr>
+          <p:cNvPr id="3" name="Notes Placeholder 2"/>
+          <p:cNvSpPr>
+            <a:spLocks noGrp="1"/>
+          </p:cNvSpPr>
+          <p:nvPr>
+            <p:ph type="body" idx="3" sz="quarter"/>
+          </p:nvPr>
+        </p:nvSpPr>
+        <p:spPr/>
+        <p:txBody>
+          <a:bodyPr/>
+          <a:lstStyle/>
+          <a:p>
+            <a:r>
+              <a:t>Slide 5 covers our Infrastructure as Code implemented in the terraform/ directory. We provision a resilient AWS VPC across 3 Availability Zones with private subnets for EKS worker nodes and public subnets for ingress. The cluster runs Kubernetes 1.30 with an autoscaling managed node group. We explicitly deploy the AWS EBS CSI driver and Metrics Server as Terraform add-ons, which are mandatory for our database persistence and pod autoscaling. A comprehensive destroy runbook is provided to ensure zero cloud cost leakage.</a:t>
+            </a:r>
+          </a:p>
+        </p:txBody>
+      </p:sp>
+      <p:sp>
+        <p:nvSpPr>
+          <p:cNvPr id="4" name="Slide Number Placeholder 3"/>
+          <p:cNvSpPr>
+            <a:spLocks noGrp="1"/>
+          </p:cNvSpPr>
+          <p:nvPr>
+            <p:ph type="sldNum" idx="5" sz="quarter"/>
+          </p:nvPr>
+        </p:nvSpPr>
+        <p:spPr/>
+      </p:sp>
+    </p:spTree>
+  </p:cSld>
+  <p:clrMapOvr>
+    <a:masterClrMapping/>
+  </p:clrMapOvr>
+</p:notes>
+</file>
+
+<file path=ppt/notesSlides/notesSlide6.xml><?xml version="1.0" encoding="utf-8"?>
+<p:notes xmlns:a="http://schemas.openxmlformats.org/drawingml/2006/main" xmlns:p="http://schemas.openxmlformats.org/presentationml/2006/main" xmlns:r="http://schemas.openxmlformats.org/officeDocument/2006/relationships">
+  <p:cSld>
+    <p:spTree>
+      <p:nvGrpSpPr>
+        <p:cNvPr id="1" name=""/>
+        <p:cNvGrpSpPr/>
+        <p:nvPr/>
+      </p:nvGrpSpPr>
+      <p:grpSpPr>
+        <a:xfrm>
+          <a:off x="0" y="0"/>
+          <a:ext cx="0" cy="0"/>
+          <a:chOff x="0" y="0"/>
+          <a:chExt cx="0" cy="0"/>
+        </a:xfrm>
+      </p:grpSpPr>
+      <p:sp>
+        <p:nvSpPr>
+          <p:cNvPr id="2" name="Slide Image Placeholder 1"/>
+          <p:cNvSpPr>
+            <a:spLocks noGrp="1"/>
+          </p:cNvSpPr>
+          <p:nvPr>
+            <p:ph type="sldImg" idx="2"/>
+          </p:nvPr>
+        </p:nvSpPr>
+        <p:spPr/>
+      </p:sp>
+      <p:sp>
+        <p:nvSpPr>
+          <p:cNvPr id="3" name="Notes Placeholder 2"/>
+          <p:cNvSpPr>
+            <a:spLocks noGrp="1"/>
+          </p:cNvSpPr>
+          <p:nvPr>
+            <p:ph type="body" idx="3" sz="quarter"/>
+          </p:nvPr>
+        </p:nvSpPr>
+        <p:spPr/>
+        <p:txBody>
+          <a:bodyPr/>
+          <a:lstStyle/>
+          <a:p>
+            <a:r>
+              <a:t>Slide 6 details our Kubernetes packaging in helm/podiumhq. Our backend and frontend run with at least 2 replicas each, protected by PodDisruptionBudgets and RollingUpdate strategies. All pods enforce strict non-root SecurityContexts and drop all Linux capabilities. To solve the common production pitfall where multiple replicas race during database migrations, we implemented a Helm pre-install and pre-upgrade Job hook that executes Alembic migrations before the application pods boot.</a:t>
+            </a:r>
+          </a:p>
+        </p:txBody>
+      </p:sp>
+      <p:sp>
+        <p:nvSpPr>
+          <p:cNvPr id="4" name="Slide Number Placeholder 3"/>
+          <p:cNvSpPr>
+            <a:spLocks noGrp="1"/>
+          </p:cNvSpPr>
+          <p:nvPr>
+            <p:ph type="sldNum" idx="5" sz="quarter"/>
+          </p:nvPr>
+        </p:nvSpPr>
+        <p:spPr/>
+      </p:sp>
+    </p:spTree>
+  </p:cSld>
+  <p:clrMapOvr>
+    <a:masterClrMapping/>
+  </p:clrMapOvr>
+</p:notes>
+</file>
+
+<file path=ppt/notesSlides/notesSlide7.xml><?xml version="1.0" encoding="utf-8"?>
+<p:notes xmlns:a="http://schemas.openxmlformats.org/drawingml/2006/main" xmlns:p="http://schemas.openxmlformats.org/presentationml/2006/main" xmlns:r="http://schemas.openxmlformats.org/officeDocument/2006/relationships">
+  <p:cSld>
+    <p:spTree>
+      <p:nvGrpSpPr>
+        <p:cNvPr id="1" name=""/>
+        <p:cNvGrpSpPr/>
+        <p:nvPr/>
+      </p:nvGrpSpPr>
+      <p:grpSpPr>
+        <a:xfrm>
+          <a:off x="0" y="0"/>
+          <a:ext cx="0" cy="0"/>
+          <a:chOff x="0" y="0"/>
+          <a:chExt cx="0" cy="0"/>
+        </a:xfrm>
+      </p:grpSpPr>
+      <p:sp>
+        <p:nvSpPr>
+          <p:cNvPr id="2" name="Slide Image Placeholder 1"/>
+          <p:cNvSpPr>
+            <a:spLocks noGrp="1"/>
+          </p:cNvSpPr>
+          <p:nvPr>
+            <p:ph type="sldImg" idx="2"/>
+          </p:nvPr>
+        </p:nvSpPr>
+        <p:spPr/>
+      </p:sp>
+      <p:sp>
+        <p:nvSpPr>
+          <p:cNvPr id="3" name="Notes Placeholder 2"/>
+          <p:cNvSpPr>
+            <a:spLocks noGrp="1"/>
+          </p:cNvSpPr>
+          <p:nvPr>
+            <p:ph type="body" idx="3" sz="quarter"/>
+          </p:nvPr>
+        </p:nvSpPr>
+        <p:spPr/>
+        <p:txBody>
+          <a:bodyPr/>
+          <a:lstStyle/>
+          <a:p>
+            <a:r>
+              <a:t>On Slide 7, we present GitOps continuous delivery powered by ArgoCD. In argocd/application.yaml, ArgoCD monitors our repository and uses values-prod.yaml to deploy the application. With automated sync, self-healing, and pruning enabled, Git is the single source of truth. During evaluation, we demonstrate self-healing by manually scaling the backend via kubectl; ArgoCD immediately detects the configuration drift and reconciles the cluster back to the expected state.</a:t>
+            </a:r>
+          </a:p>
+        </p:txBody>
+      </p:sp>
+      <p:sp>
+        <p:nvSpPr>
+          <p:cNvPr id="4" name="Slide Number Placeholder 3"/>
+          <p:cNvSpPr>
+            <a:spLocks noGrp="1"/>
+          </p:cNvSpPr>
+          <p:nvPr>
+            <p:ph type="sldNum" idx="5" sz="quarter"/>
+          </p:nvPr>
+        </p:nvSpPr>
+        <p:spPr/>
+      </p:sp>
+    </p:spTree>
+  </p:cSld>
+  <p:clrMapOvr>
+    <a:masterClrMapping/>
+  </p:clrMapOvr>
+</p:notes>
+</file>
+
+<file path=ppt/notesSlides/notesSlide8.xml><?xml version="1.0" encoding="utf-8"?>
+<p:notes xmlns:a="http://schemas.openxmlformats.org/drawingml/2006/main" xmlns:p="http://schemas.openxmlformats.org/presentationml/2006/main" xmlns:r="http://schemas.openxmlformats.org/officeDocument/2006/relationships">
+  <p:cSld>
+    <p:spTree>
+      <p:nvGrpSpPr>
+        <p:cNvPr id="1" name=""/>
+        <p:cNvGrpSpPr/>
+        <p:nvPr/>
+      </p:nvGrpSpPr>
+      <p:grpSpPr>
+        <a:xfrm>
+          <a:off x="0" y="0"/>
+          <a:ext cx="0" cy="0"/>
+          <a:chOff x="0" y="0"/>
+          <a:chExt cx="0" cy="0"/>
+        </a:xfrm>
+      </p:grpSpPr>
+      <p:sp>
+        <p:nvSpPr>
+          <p:cNvPr id="2" name="Slide Image Placeholder 1"/>
+          <p:cNvSpPr>
+            <a:spLocks noGrp="1"/>
+          </p:cNvSpPr>
+          <p:nvPr>
+            <p:ph type="sldImg" idx="2"/>
+          </p:nvPr>
+        </p:nvSpPr>
+        <p:spPr/>
+      </p:sp>
+      <p:sp>
+        <p:nvSpPr>
+          <p:cNvPr id="3" name="Notes Placeholder 2"/>
+          <p:cNvSpPr>
+            <a:spLocks noGrp="1"/>
+          </p:cNvSpPr>
+          <p:nvPr>
+            <p:ph type="body" idx="3" sz="quarter"/>
+          </p:nvPr>
+        </p:nvSpPr>
+        <p:spPr/>
+        <p:txBody>
+          <a:bodyPr/>
+          <a:lstStyle/>
+          <a:p>
+            <a:r>
+              <a:t>Slide 8 covers our observability stack. Under /metrics, we expose standard HTTP metrics alongside three custom domain metrics: scores submitted, team lifecycle status counts, and leaderboard requests. Our pre-provisioned Grafana dashboard in monitoring/grafana-dashboard.json visualizes throughput, p95 latencies, and business activity. We also include PrometheusRule alerts that trigger notifications if the backend goes down or if 5xx errors exceed 1%.</a:t>
+            </a:r>
+          </a:p>
+        </p:txBody>
+      </p:sp>
+      <p:sp>
+        <p:nvSpPr>
+          <p:cNvPr id="4" name="Slide Number Placeholder 3"/>
+          <p:cNvSpPr>
+            <a:spLocks noGrp="1"/>
+          </p:cNvSpPr>
+          <p:nvPr>
+            <p:ph type="sldNum" idx="5" sz="quarter"/>
+          </p:nvPr>
+        </p:nvSpPr>
+        <p:spPr/>
+      </p:sp>
+    </p:spTree>
+  </p:cSld>
+  <p:clrMapOvr>
+    <a:masterClrMapping/>
+  </p:clrMapOvr>
+</p:notes>
+</file>
+
+<file path=ppt/notesSlides/notesSlide9.xml><?xml version="1.0" encoding="utf-8"?>
+<p:notes xmlns:a="http://schemas.openxmlformats.org/drawingml/2006/main" xmlns:p="http://schemas.openxmlformats.org/presentationml/2006/main" xmlns:r="http://schemas.openxmlformats.org/officeDocument/2006/relationships">
+  <p:cSld>
+    <p:spTree>
+      <p:nvGrpSpPr>
+        <p:cNvPr id="1" name=""/>
+        <p:cNvGrpSpPr/>
+        <p:nvPr/>
+      </p:nvGrpSpPr>
+      <p:grpSpPr>
+        <a:xfrm>
+          <a:off x="0" y="0"/>
+          <a:ext cx="0" cy="0"/>
+          <a:chOff x="0" y="0"/>
+          <a:chExt cx="0" cy="0"/>
+        </a:xfrm>
+      </p:grpSpPr>
+      <p:sp>
+        <p:nvSpPr>
+          <p:cNvPr id="2" name="Slide Image Placeholder 1"/>
+          <p:cNvSpPr>
+            <a:spLocks noGrp="1"/>
+          </p:cNvSpPr>
+          <p:nvPr>
+            <p:ph type="sldImg" idx="2"/>
+          </p:nvPr>
+        </p:nvSpPr>
+        <p:spPr/>
+      </p:sp>
+      <p:sp>
+        <p:nvSpPr>
+          <p:cNvPr id="3" name="Notes Placeholder 2"/>
+          <p:cNvSpPr>
+            <a:spLocks noGrp="1"/>
+          </p:cNvSpPr>
+          <p:nvPr>
+            <p:ph type="body" idx="3" sz="quarter"/>
+          </p:nvPr>
+        </p:nvSpPr>
+        <p:spPr/>
+        <p:txBody>
+          <a:bodyPr/>
+          <a:lstStyle/>
+          <a:p>
+            <a:r>
+              <a:t>Slide 9 highlights our quality assurance and the real engineering obstacles we resolved. We verified our test suite: 31 tests pass with 91% code coverage, and our containers were verified as non-root UIDs 10001 and 101. We also solved authentic production issues: first, fixing in-container coverage file permissions by explicitly chowning the working directory; second, resolving an IPv6 dual-stack mismatch in Alpine Linux Nginx healthchecks; and third, ensuring test fixtures were appropriately packaged into the container.</a:t>
+            </a:r>
+          </a:p>
+        </p:txBody>
+      </p:sp>
+      <p:sp>
+        <p:nvSpPr>
+          <p:cNvPr id="4" name="Slide Number Placeholder 3"/>
+          <p:cNvSpPr>
+            <a:spLocks noGrp="1"/>
+          </p:cNvSpPr>
+          <p:nvPr>
+            <p:ph type="sldNum" idx="5" sz="quarter"/>
+          </p:nvPr>
+        </p:nvSpPr>
+        <p:spPr/>
+      </p:sp>
+    </p:spTree>
+  </p:cSld>
+  <p:clrMapOvr>
+    <a:masterClrMapping/>
+  </p:clrMapOvr>
+</p:notes>
 </file>
 
 <file path=ppt/slideLayouts/slideLayout1.xml><?xml version="1.0" encoding="utf-8"?>
@@ -3152,16 +4200,16 @@
         </p:nvSpPr>
         <p:spPr>
           <a:xfrm>
-            <a:off x="731520" y="731520"/>
-            <a:ext cx="10728655" cy="5394960"/>
+            <a:off x="731520" y="365760"/>
+            <a:ext cx="10728655" cy="54864"/>
           </a:xfrm>
           <a:prstGeom prst="rect">
             <a:avLst/>
           </a:prstGeom>
           <a:solidFill>
-            <a:srgbClr val="0F172A"/>
+            <a:srgbClr val="F59E0B"/>
           </a:solidFill>
-          <a:ln w="19050">
+          <a:ln>
             <a:solidFill>
               <a:srgbClr val="F59E0B"/>
             </a:solidFill>
@@ -3197,8 +4245,80 @@
         </p:nvSpPr>
         <p:spPr>
           <a:xfrm>
-            <a:off x="1097280" y="1005840"/>
-            <a:ext cx="10058400" cy="731520"/>
+            <a:off x="731520" y="502920"/>
+            <a:ext cx="5486400" cy="320040"/>
+          </a:xfrm>
+          <a:prstGeom prst="rect">
+            <a:avLst/>
+          </a:prstGeom>
+          <a:noFill/>
+        </p:spPr>
+        <p:txBody>
+          <a:bodyPr wrap="none">
+            <a:spAutoFit/>
+          </a:bodyPr>
+          <a:lstStyle/>
+          <a:p>
+            <a:pPr>
+              <a:defRPr sz="1000" b="1">
+                <a:solidFill>
+                  <a:srgbClr val="F59E0B"/>
+                </a:solidFill>
+                <a:latin typeface="Arial"/>
+              </a:defRPr>
+            </a:pPr>
+            <a:r>
+              <a:t>MODULE CHECKPOINT • PROJECT OVERVIEW &amp; IDENTITY</a:t>
+            </a:r>
+          </a:p>
+        </p:txBody>
+      </p:sp>
+      <p:sp>
+        <p:nvSpPr>
+          <p:cNvPr id="5" name="TextBox 4"/>
+          <p:cNvSpPr txBox="1"/>
+          <p:nvPr/>
+        </p:nvSpPr>
+        <p:spPr>
+          <a:xfrm>
+            <a:off x="8686800" y="502920"/>
+            <a:ext cx="2743200" cy="320040"/>
+          </a:xfrm>
+          <a:prstGeom prst="rect">
+            <a:avLst/>
+          </a:prstGeom>
+          <a:noFill/>
+        </p:spPr>
+        <p:txBody>
+          <a:bodyPr wrap="none">
+            <a:spAutoFit/>
+          </a:bodyPr>
+          <a:lstStyle/>
+          <a:p>
+            <a:pPr algn="r">
+              <a:defRPr sz="1000" b="1">
+                <a:solidFill>
+                  <a:srgbClr val="94A3B8"/>
+                </a:solidFill>
+                <a:latin typeface="Arial"/>
+              </a:defRPr>
+            </a:pPr>
+            <a:r>
+              <a:t>SLIDE 1 OF 10</a:t>
+            </a:r>
+          </a:p>
+        </p:txBody>
+      </p:sp>
+      <p:sp>
+        <p:nvSpPr>
+          <p:cNvPr id="6" name="TextBox 5"/>
+          <p:cNvSpPr txBox="1"/>
+          <p:nvPr/>
+        </p:nvSpPr>
+        <p:spPr>
+          <a:xfrm>
+            <a:off x="731520" y="777240"/>
+            <a:ext cx="10728655" cy="594360"/>
           </a:xfrm>
           <a:prstGeom prst="rect">
             <a:avLst/>
@@ -3212,9 +4332,9 @@
           <a:lstStyle/>
           <a:p>
             <a:pPr>
-              <a:defRPr sz="2800" b="1">
-                <a:solidFill>
-                  <a:srgbClr val="F59E0B"/>
+              <a:defRPr sz="2400" b="1">
+                <a:solidFill>
+                  <a:srgbClr val="F8FAFC"/>
                 </a:solidFill>
                 <a:latin typeface="Arial"/>
               </a:defRPr>
@@ -3227,14 +4347,14 @@
       </p:sp>
       <p:sp>
         <p:nvSpPr>
-          <p:cNvPr id="5" name="TextBox 4"/>
+          <p:cNvPr id="7" name="TextBox 6"/>
           <p:cNvSpPr txBox="1"/>
           <p:nvPr/>
         </p:nvSpPr>
         <p:spPr>
           <a:xfrm>
-            <a:off x="1097280" y="1645920"/>
-            <a:ext cx="10058400" cy="548640"/>
+            <a:off x="731520" y="1325880"/>
+            <a:ext cx="10728655" cy="411480"/>
           </a:xfrm>
           <a:prstGeom prst="rect">
             <a:avLst/>
@@ -3248,7 +4368,7 @@
           <a:lstStyle/>
           <a:p>
             <a:pPr>
-              <a:defRPr sz="1600">
+              <a:defRPr sz="1300">
                 <a:solidFill>
                   <a:srgbClr val="10B981"/>
                 </a:solidFill>
@@ -3256,21 +4376,66 @@
               </a:defRPr>
             </a:pPr>
             <a:r>
-              <a:t>Autonomous Hackathon &amp; Event Judging Platform with Hardened GitOps Pipeline</a:t>
-            </a:r>
-          </a:p>
-        </p:txBody>
-      </p:sp>
-      <p:sp>
-        <p:nvSpPr>
-          <p:cNvPr id="6" name="TextBox 5"/>
+              <a:t>Autonomous Hackathon &amp; Event Judging Platform with Hardened GitOps Delivery</a:t>
+            </a:r>
+          </a:p>
+        </p:txBody>
+      </p:sp>
+      <p:sp>
+        <p:nvSpPr>
+          <p:cNvPr id="8" name="Rounded Rectangle 7"/>
+          <p:cNvSpPr/>
+          <p:nvPr/>
+        </p:nvSpPr>
+        <p:spPr>
+          <a:xfrm>
+            <a:off x="731520" y="1874519"/>
+            <a:ext cx="3423818" cy="4434840"/>
+          </a:xfrm>
+          <a:prstGeom prst="roundRect">
+            <a:avLst/>
+          </a:prstGeom>
+          <a:solidFill>
+            <a:srgbClr val="0F172A"/>
+          </a:solidFill>
+          <a:ln w="12700">
+            <a:solidFill>
+              <a:srgbClr val="1E293B"/>
+            </a:solidFill>
+          </a:ln>
+        </p:spPr>
+        <p:style>
+          <a:lnRef idx="1">
+            <a:schemeClr val="accent1"/>
+          </a:lnRef>
+          <a:fillRef idx="3">
+            <a:schemeClr val="accent1"/>
+          </a:fillRef>
+          <a:effectRef idx="2">
+            <a:schemeClr val="accent1"/>
+          </a:effectRef>
+          <a:fontRef idx="minor">
+            <a:schemeClr val="lt1"/>
+          </a:fontRef>
+        </p:style>
+        <p:txBody>
+          <a:bodyPr rtlCol="0" anchor="ctr"/>
+          <a:lstStyle/>
+          <a:p>
+            <a:pPr algn="ctr"/>
+          </a:p>
+        </p:txBody>
+      </p:sp>
+      <p:sp>
+        <p:nvSpPr>
+          <p:cNvPr id="9" name="TextBox 8"/>
           <p:cNvSpPr txBox="1"/>
           <p:nvPr/>
         </p:nvSpPr>
         <p:spPr>
           <a:xfrm>
-            <a:off x="1097280" y="2377440"/>
-            <a:ext cx="10058400" cy="3474720"/>
+            <a:off x="868680" y="2011679"/>
+            <a:ext cx="3149498" cy="411480"/>
           </a:xfrm>
           <a:prstGeom prst="rect">
             <a:avLst/>
@@ -3284,66 +4449,426 @@
           <a:lstStyle/>
           <a:p>
             <a:pPr>
+              <a:defRPr sz="1400" b="1">
+                <a:solidFill>
+                  <a:srgbClr val="F59E0B"/>
+                </a:solidFill>
+                <a:latin typeface="Arial"/>
+              </a:defRPr>
+            </a:pPr>
+            <a:r>
+              <a:t>Core Problem Solved</a:t>
+            </a:r>
+          </a:p>
+        </p:txBody>
+      </p:sp>
+      <p:sp>
+        <p:nvSpPr>
+          <p:cNvPr id="10" name="TextBox 9"/>
+          <p:cNvSpPr txBox="1"/>
+          <p:nvPr/>
+        </p:nvSpPr>
+        <p:spPr>
+          <a:xfrm>
+            <a:off x="868680" y="2468879"/>
+            <a:ext cx="3149498" cy="3703320"/>
+          </a:xfrm>
+          <a:prstGeom prst="rect">
+            <a:avLst/>
+          </a:prstGeom>
+          <a:noFill/>
+        </p:spPr>
+        <p:txBody>
+          <a:bodyPr wrap="square">
+            <a:spAutoFit/>
+          </a:bodyPr>
+          <a:lstStyle/>
+          <a:p>
+            <a:pPr>
               <a:spcAft>
-                <a:spcPts val="1400"/>
+                <a:spcPts val="800"/>
               </a:spcAft>
-              <a:defRPr sz="1800">
-                <a:solidFill>
-                  <a:srgbClr val="FFFFFF"/>
+              <a:defRPr sz="1200">
+                <a:solidFill>
+                  <a:srgbClr val="F8FAFC"/>
                 </a:solidFill>
                 <a:latin typeface="Calibri"/>
               </a:defRPr>
             </a:pPr>
             <a:r>
+              <a:t>• Replaces error-prone manual spreadsheets with an automated multi-criteria evaluation platform.</a:t>
+            </a:r>
+          </a:p>
+          <a:p>
+            <a:pPr>
+              <a:spcAft>
+                <a:spcPts val="800"/>
+              </a:spcAft>
+              <a:defRPr sz="1200">
+                <a:solidFill>
+                  <a:srgbClr val="F8FAFC"/>
+                </a:solidFill>
+                <a:latin typeface="Calibri"/>
+              </a:defRPr>
+            </a:pPr>
+            <a:r>
+              <a:t>• Provides real-time weighted scoring across rounds with dynamic tie-breaking and rank calculation.</a:t>
+            </a:r>
+          </a:p>
+          <a:p>
+            <a:pPr>
+              <a:spcAft>
+                <a:spcPts val="800"/>
+              </a:spcAft>
+              <a:defRPr sz="1200">
+                <a:solidFill>
+                  <a:srgbClr val="F8FAFC"/>
+                </a:solidFill>
+                <a:latin typeface="Calibri"/>
+              </a:defRPr>
+            </a:pPr>
+            <a:r>
+              <a:t>• Engineered specifically to solve high-concurrency judging deadlines with zero downtime.</a:t>
+            </a:r>
+          </a:p>
+        </p:txBody>
+      </p:sp>
+      <p:sp>
+        <p:nvSpPr>
+          <p:cNvPr id="11" name="Rounded Rectangle 10"/>
+          <p:cNvSpPr/>
+          <p:nvPr/>
+        </p:nvSpPr>
+        <p:spPr>
+          <a:xfrm>
+            <a:off x="4383938" y="1874519"/>
+            <a:ext cx="3423818" cy="4434840"/>
+          </a:xfrm>
+          <a:prstGeom prst="roundRect">
+            <a:avLst/>
+          </a:prstGeom>
+          <a:solidFill>
+            <a:srgbClr val="0F172A"/>
+          </a:solidFill>
+          <a:ln w="12700">
+            <a:solidFill>
+              <a:srgbClr val="1E293B"/>
+            </a:solidFill>
+          </a:ln>
+        </p:spPr>
+        <p:style>
+          <a:lnRef idx="1">
+            <a:schemeClr val="accent1"/>
+          </a:lnRef>
+          <a:fillRef idx="3">
+            <a:schemeClr val="accent1"/>
+          </a:fillRef>
+          <a:effectRef idx="2">
+            <a:schemeClr val="accent1"/>
+          </a:effectRef>
+          <a:fontRef idx="minor">
+            <a:schemeClr val="lt1"/>
+          </a:fontRef>
+        </p:style>
+        <p:txBody>
+          <a:bodyPr rtlCol="0" anchor="ctr"/>
+          <a:lstStyle/>
+          <a:p>
+            <a:pPr algn="ctr"/>
+          </a:p>
+        </p:txBody>
+      </p:sp>
+      <p:sp>
+        <p:nvSpPr>
+          <p:cNvPr id="12" name="TextBox 11"/>
+          <p:cNvSpPr txBox="1"/>
+          <p:nvPr/>
+        </p:nvSpPr>
+        <p:spPr>
+          <a:xfrm>
+            <a:off x="4521098" y="2011679"/>
+            <a:ext cx="3149498" cy="411480"/>
+          </a:xfrm>
+          <a:prstGeom prst="rect">
+            <a:avLst/>
+          </a:prstGeom>
+          <a:noFill/>
+        </p:spPr>
+        <p:txBody>
+          <a:bodyPr wrap="square">
+            <a:spAutoFit/>
+          </a:bodyPr>
+          <a:lstStyle/>
+          <a:p>
+            <a:pPr>
+              <a:defRPr sz="1400" b="1">
+                <a:solidFill>
+                  <a:srgbClr val="10B981"/>
+                </a:solidFill>
+                <a:latin typeface="Arial"/>
+              </a:defRPr>
+            </a:pPr>
+            <a:r>
+              <a:t>DevSecOps Mission &amp; Scope</a:t>
+            </a:r>
+          </a:p>
+        </p:txBody>
+      </p:sp>
+      <p:sp>
+        <p:nvSpPr>
+          <p:cNvPr id="13" name="TextBox 12"/>
+          <p:cNvSpPr txBox="1"/>
+          <p:nvPr/>
+        </p:nvSpPr>
+        <p:spPr>
+          <a:xfrm>
+            <a:off x="4521098" y="2468879"/>
+            <a:ext cx="3149498" cy="3703320"/>
+          </a:xfrm>
+          <a:prstGeom prst="rect">
+            <a:avLst/>
+          </a:prstGeom>
+          <a:noFill/>
+        </p:spPr>
+        <p:txBody>
+          <a:bodyPr wrap="square">
+            <a:spAutoFit/>
+          </a:bodyPr>
+          <a:lstStyle/>
+          <a:p>
+            <a:pPr>
+              <a:spcAft>
+                <a:spcPts val="800"/>
+              </a:spcAft>
+              <a:defRPr sz="1200">
+                <a:solidFill>
+                  <a:srgbClr val="F8FAFC"/>
+                </a:solidFill>
+                <a:latin typeface="Calibri"/>
+              </a:defRPr>
+            </a:pPr>
+            <a:r>
+              <a:t>• Demonstrates the full software delivery journey from local commit to cloud-native production.</a:t>
+            </a:r>
+          </a:p>
+          <a:p>
+            <a:pPr>
+              <a:spcAft>
+                <a:spcPts val="800"/>
+              </a:spcAft>
+              <a:defRPr sz="1200">
+                <a:solidFill>
+                  <a:srgbClr val="F8FAFC"/>
+                </a:solidFill>
+                <a:latin typeface="Calibri"/>
+              </a:defRPr>
+            </a:pPr>
+            <a:r>
+              <a:t>• Enforces security gates: non-root containers, Trivy CVE scanning, and Gitleaks detection.</a:t>
+            </a:r>
+          </a:p>
+          <a:p>
+            <a:pPr>
+              <a:spcAft>
+                <a:spcPts val="800"/>
+              </a:spcAft>
+              <a:defRPr sz="1200">
+                <a:solidFill>
+                  <a:srgbClr val="F8FAFC"/>
+                </a:solidFill>
+                <a:latin typeface="Calibri"/>
+              </a:defRPr>
+            </a:pPr>
+            <a:r>
+              <a:t>• Delivers declarative GitOps via ArgoCD, Helm 3 packaging, and Terraform-provisioned AWS EKS.</a:t>
+            </a:r>
+          </a:p>
+        </p:txBody>
+      </p:sp>
+      <p:sp>
+        <p:nvSpPr>
+          <p:cNvPr id="14" name="Rounded Rectangle 13"/>
+          <p:cNvSpPr/>
+          <p:nvPr/>
+        </p:nvSpPr>
+        <p:spPr>
+          <a:xfrm>
+            <a:off x="8036356" y="1874519"/>
+            <a:ext cx="3423818" cy="4434840"/>
+          </a:xfrm>
+          <a:prstGeom prst="roundRect">
+            <a:avLst/>
+          </a:prstGeom>
+          <a:solidFill>
+            <a:srgbClr val="0F172A"/>
+          </a:solidFill>
+          <a:ln w="12700">
+            <a:solidFill>
+              <a:srgbClr val="1E293B"/>
+            </a:solidFill>
+          </a:ln>
+        </p:spPr>
+        <p:style>
+          <a:lnRef idx="1">
+            <a:schemeClr val="accent1"/>
+          </a:lnRef>
+          <a:fillRef idx="3">
+            <a:schemeClr val="accent1"/>
+          </a:fillRef>
+          <a:effectRef idx="2">
+            <a:schemeClr val="accent1"/>
+          </a:effectRef>
+          <a:fontRef idx="minor">
+            <a:schemeClr val="lt1"/>
+          </a:fontRef>
+        </p:style>
+        <p:txBody>
+          <a:bodyPr rtlCol="0" anchor="ctr"/>
+          <a:lstStyle/>
+          <a:p>
+            <a:pPr algn="ctr"/>
+          </a:p>
+        </p:txBody>
+      </p:sp>
+      <p:sp>
+        <p:nvSpPr>
+          <p:cNvPr id="15" name="TextBox 14"/>
+          <p:cNvSpPr txBox="1"/>
+          <p:nvPr/>
+        </p:nvSpPr>
+        <p:spPr>
+          <a:xfrm>
+            <a:off x="8173516" y="2011679"/>
+            <a:ext cx="3149498" cy="411480"/>
+          </a:xfrm>
+          <a:prstGeom prst="rect">
+            <a:avLst/>
+          </a:prstGeom>
+          <a:noFill/>
+        </p:spPr>
+        <p:txBody>
+          <a:bodyPr wrap="square">
+            <a:spAutoFit/>
+          </a:bodyPr>
+          <a:lstStyle/>
+          <a:p>
+            <a:pPr>
+              <a:defRPr sz="1400" b="1">
+                <a:solidFill>
+                  <a:srgbClr val="38BDF8"/>
+                </a:solidFill>
+                <a:latin typeface="Arial"/>
+              </a:defRPr>
+            </a:pPr>
+            <a:r>
+              <a:t>Project Metadata</a:t>
+            </a:r>
+          </a:p>
+        </p:txBody>
+      </p:sp>
+      <p:sp>
+        <p:nvSpPr>
+          <p:cNvPr id="16" name="TextBox 15"/>
+          <p:cNvSpPr txBox="1"/>
+          <p:nvPr/>
+        </p:nvSpPr>
+        <p:spPr>
+          <a:xfrm>
+            <a:off x="8173516" y="2468879"/>
+            <a:ext cx="3149498" cy="3703320"/>
+          </a:xfrm>
+          <a:prstGeom prst="rect">
+            <a:avLst/>
+          </a:prstGeom>
+          <a:noFill/>
+        </p:spPr>
+        <p:txBody>
+          <a:bodyPr wrap="square">
+            <a:spAutoFit/>
+          </a:bodyPr>
+          <a:lstStyle/>
+          <a:p>
+            <a:pPr>
+              <a:spcAft>
+                <a:spcPts val="800"/>
+              </a:spcAft>
+              <a:defRPr sz="1200">
+                <a:solidFill>
+                  <a:srgbClr val="F8FAFC"/>
+                </a:solidFill>
+                <a:latin typeface="Calibri"/>
+              </a:defRPr>
+            </a:pPr>
+            <a:r>
               <a:t>• Author: Platform Engineering / DevSecOps Candidate</a:t>
             </a:r>
           </a:p>
           <a:p>
             <a:pPr>
               <a:spcAft>
-                <a:spcPts val="1400"/>
+                <a:spcPts val="800"/>
               </a:spcAft>
-              <a:defRPr sz="1800">
-                <a:solidFill>
-                  <a:srgbClr val="FFFFFF"/>
+              <a:defRPr sz="1200">
+                <a:solidFill>
+                  <a:srgbClr val="F8FAFC"/>
                 </a:solidFill>
                 <a:latin typeface="Calibri"/>
               </a:defRPr>
             </a:pPr>
             <a:r>
-              <a:t>• Architecture: React 18 (Vite) + FastAPI (Python 3.12) + PostgreSQL 16</a:t>
+              <a:t>• Domain: Hackathon &amp; Event Evaluation (Original Domain, Zero TaskBoard Overlap)</a:t>
             </a:r>
           </a:p>
           <a:p>
             <a:pPr>
               <a:spcAft>
-                <a:spcPts val="1400"/>
+                <a:spcPts val="800"/>
               </a:spcAft>
-              <a:defRPr sz="1800">
-                <a:solidFill>
-                  <a:srgbClr val="FFFFFF"/>
+              <a:defRPr sz="1200">
+                <a:solidFill>
+                  <a:srgbClr val="F8FAFC"/>
                 </a:solidFill>
                 <a:latin typeface="Calibri"/>
               </a:defRPr>
             </a:pPr>
             <a:r>
-              <a:t>• Deployment: AWS VPC + EKS | Helm Charts | ArgoCD GitOps | Prometheus &amp; Grafana</a:t>
-            </a:r>
-          </a:p>
-          <a:p>
-            <a:pPr>
-              <a:spcAft>
-                <a:spcPts val="1400"/>
-              </a:spcAft>
-              <a:defRPr sz="1800">
-                <a:solidFill>
-                  <a:srgbClr val="FFFFFF"/>
-                </a:solidFill>
-                <a:latin typeface="Calibri"/>
-              </a:defRPr>
-            </a:pPr>
-            <a:r>
-              <a:t>• Security: Non-Root Containers, Trivy Scanning, Gitleaks, Non-Root UID 10001/101</a:t>
+              <a:t>• Rubric Target: 100/100 Points across Modules M1 through M10</a:t>
+            </a:r>
+          </a:p>
+        </p:txBody>
+      </p:sp>
+      <p:sp>
+        <p:nvSpPr>
+          <p:cNvPr id="17" name="TextBox 16"/>
+          <p:cNvSpPr txBox="1"/>
+          <p:nvPr/>
+        </p:nvSpPr>
+        <p:spPr>
+          <a:xfrm>
+            <a:off x="731520" y="6446520"/>
+            <a:ext cx="10728655" cy="274320"/>
+          </a:xfrm>
+          <a:prstGeom prst="rect">
+            <a:avLst/>
+          </a:prstGeom>
+          <a:noFill/>
+        </p:spPr>
+        <p:txBody>
+          <a:bodyPr wrap="none">
+            <a:spAutoFit/>
+          </a:bodyPr>
+          <a:lstStyle/>
+          <a:p>
+            <a:pPr>
+              <a:defRPr sz="900">
+                <a:solidFill>
+                  <a:srgbClr val="94A3B8"/>
+                </a:solidFill>
+                <a:latin typeface="Arial"/>
+              </a:defRPr>
+            </a:pPr>
+            <a:r>
+              <a:t>PodiumHQ DevSecOps Capstone • GitOps, Automated Verification &amp; Observability</a:t>
             </a:r>
           </a:p>
         </p:txBody>
@@ -3419,16 +4944,16 @@
         </p:nvSpPr>
         <p:spPr>
           <a:xfrm>
-            <a:off x="731520" y="731520"/>
-            <a:ext cx="10728655" cy="5394960"/>
+            <a:off x="731520" y="365760"/>
+            <a:ext cx="10728655" cy="54864"/>
           </a:xfrm>
           <a:prstGeom prst="rect">
             <a:avLst/>
           </a:prstGeom>
           <a:solidFill>
-            <a:srgbClr val="0F172A"/>
+            <a:srgbClr val="F59E0B"/>
           </a:solidFill>
-          <a:ln w="19050">
+          <a:ln>
             <a:solidFill>
               <a:srgbClr val="F59E0B"/>
             </a:solidFill>
@@ -3464,8 +4989,80 @@
         </p:nvSpPr>
         <p:spPr>
           <a:xfrm>
-            <a:off x="1097280" y="1005840"/>
-            <a:ext cx="10058400" cy="731520"/>
+            <a:off x="731520" y="502920"/>
+            <a:ext cx="5486400" cy="320040"/>
+          </a:xfrm>
+          <a:prstGeom prst="rect">
+            <a:avLst/>
+          </a:prstGeom>
+          <a:noFill/>
+        </p:spPr>
+        <p:txBody>
+          <a:bodyPr wrap="none">
+            <a:spAutoFit/>
+          </a:bodyPr>
+          <a:lstStyle/>
+          <a:p>
+            <a:pPr>
+              <a:defRPr sz="1000" b="1">
+                <a:solidFill>
+                  <a:srgbClr val="F59E0B"/>
+                </a:solidFill>
+                <a:latin typeface="Arial"/>
+              </a:defRPr>
+            </a:pPr>
+            <a:r>
+              <a:t>MODULE CHECKPOINT • CONCLUSION &amp; ROADMAP</a:t>
+            </a:r>
+          </a:p>
+        </p:txBody>
+      </p:sp>
+      <p:sp>
+        <p:nvSpPr>
+          <p:cNvPr id="5" name="TextBox 4"/>
+          <p:cNvSpPr txBox="1"/>
+          <p:nvPr/>
+        </p:nvSpPr>
+        <p:spPr>
+          <a:xfrm>
+            <a:off x="8686800" y="502920"/>
+            <a:ext cx="2743200" cy="320040"/>
+          </a:xfrm>
+          <a:prstGeom prst="rect">
+            <a:avLst/>
+          </a:prstGeom>
+          <a:noFill/>
+        </p:spPr>
+        <p:txBody>
+          <a:bodyPr wrap="none">
+            <a:spAutoFit/>
+          </a:bodyPr>
+          <a:lstStyle/>
+          <a:p>
+            <a:pPr algn="r">
+              <a:defRPr sz="1000" b="1">
+                <a:solidFill>
+                  <a:srgbClr val="94A3B8"/>
+                </a:solidFill>
+                <a:latin typeface="Arial"/>
+              </a:defRPr>
+            </a:pPr>
+            <a:r>
+              <a:t>SLIDE 10 OF 10</a:t>
+            </a:r>
+          </a:p>
+        </p:txBody>
+      </p:sp>
+      <p:sp>
+        <p:nvSpPr>
+          <p:cNvPr id="6" name="TextBox 5"/>
+          <p:cNvSpPr txBox="1"/>
+          <p:nvPr/>
+        </p:nvSpPr>
+        <p:spPr>
+          <a:xfrm>
+            <a:off x="731520" y="777240"/>
+            <a:ext cx="10728655" cy="594360"/>
           </a:xfrm>
           <a:prstGeom prst="rect">
             <a:avLst/>
@@ -3479,29 +5076,29 @@
           <a:lstStyle/>
           <a:p>
             <a:pPr>
-              <a:defRPr sz="2800" b="1">
-                <a:solidFill>
-                  <a:srgbClr val="F59E0B"/>
+              <a:defRPr sz="2400" b="1">
+                <a:solidFill>
+                  <a:srgbClr val="F8FAFC"/>
                 </a:solidFill>
                 <a:latin typeface="Arial"/>
               </a:defRPr>
             </a:pPr>
             <a:r>
-              <a:t>Observability: Prometheus, Grafana &amp; Custom Metrics</a:t>
-            </a:r>
-          </a:p>
-        </p:txBody>
-      </p:sp>
-      <p:sp>
-        <p:nvSpPr>
-          <p:cNvPr id="5" name="TextBox 4"/>
+              <a:t>Key Learnings &amp; Conclusion</a:t>
+            </a:r>
+          </a:p>
+        </p:txBody>
+      </p:sp>
+      <p:sp>
+        <p:nvSpPr>
+          <p:cNvPr id="7" name="TextBox 6"/>
           <p:cNvSpPr txBox="1"/>
           <p:nvPr/>
         </p:nvSpPr>
         <p:spPr>
           <a:xfrm>
-            <a:off x="1097280" y="1645920"/>
-            <a:ext cx="10058400" cy="548640"/>
+            <a:off x="731520" y="1325880"/>
+            <a:ext cx="10728655" cy="411480"/>
           </a:xfrm>
           <a:prstGeom prst="rect">
             <a:avLst/>
@@ -3515,7 +5112,7 @@
           <a:lstStyle/>
           <a:p>
             <a:pPr>
-              <a:defRPr sz="1600">
+              <a:defRPr sz="1300">
                 <a:solidFill>
                   <a:srgbClr val="10B981"/>
                 </a:solidFill>
@@ -3523,136 +5120,31 @@
               </a:defRPr>
             </a:pPr>
             <a:r>
-              <a:t>Full-Stack Telemetry and Domain-Driven Business Visibility</a:t>
-            </a:r>
-          </a:p>
-        </p:txBody>
-      </p:sp>
-      <p:sp>
-        <p:nvSpPr>
-          <p:cNvPr id="6" name="TextBox 5"/>
-          <p:cNvSpPr txBox="1"/>
-          <p:nvPr/>
-        </p:nvSpPr>
-        <p:spPr>
-          <a:xfrm>
-            <a:off x="1097280" y="2377440"/>
-            <a:ext cx="10058400" cy="3474720"/>
-          </a:xfrm>
-          <a:prstGeom prst="rect">
-            <a:avLst/>
-          </a:prstGeom>
-          <a:noFill/>
-        </p:spPr>
-        <p:txBody>
-          <a:bodyPr wrap="square">
-            <a:spAutoFit/>
-          </a:bodyPr>
-          <a:lstStyle/>
-          <a:p>
-            <a:pPr>
-              <a:spcAft>
-                <a:spcPts val="1400"/>
-              </a:spcAft>
-              <a:defRPr sz="1800">
-                <a:solidFill>
-                  <a:srgbClr val="FFFFFF"/>
-                </a:solidFill>
-                <a:latin typeface="Calibri"/>
-              </a:defRPr>
-            </a:pPr>
-            <a:r>
-              <a:t>• Instrumentation: Prometheus metrics endpoint exposing HTTP request rate, p50/p95 latency, and error distributions.</a:t>
-            </a:r>
-          </a:p>
-          <a:p>
-            <a:pPr>
-              <a:spcAft>
-                <a:spcPts val="1400"/>
-              </a:spcAft>
-              <a:defRPr sz="1800">
-                <a:solidFill>
-                  <a:srgbClr val="FFFFFF"/>
-                </a:solidFill>
-                <a:latin typeface="Calibri"/>
-              </a:defRPr>
-            </a:pPr>
-            <a:r>
-              <a:t>• Custom Domain Metrics: podiumhq_scores_submitted_total, podiumhq_teams_by_status, and podiumhq_leaderboard_requests_total.</a:t>
-            </a:r>
-          </a:p>
-          <a:p>
-            <a:pPr>
-              <a:spcAft>
-                <a:spcPts val="1400"/>
-              </a:spcAft>
-              <a:defRPr sz="1800">
-                <a:solidFill>
-                  <a:srgbClr val="FFFFFF"/>
-                </a:solidFill>
-                <a:latin typeface="Calibri"/>
-              </a:defRPr>
-            </a:pPr>
-            <a:r>
-              <a:t>• Grafana Dashboards: Pre-provisioned multi-panel dashboard tracking system health, HPA scaling events, and judging activity.</a:t>
-            </a:r>
-          </a:p>
-          <a:p>
-            <a:pPr>
-              <a:spcAft>
-                <a:spcPts val="1400"/>
-              </a:spcAft>
-              <a:defRPr sz="1800">
-                <a:solidFill>
-                  <a:srgbClr val="FFFFFF"/>
-                </a:solidFill>
-                <a:latin typeface="Calibri"/>
-              </a:defRPr>
-            </a:pPr>
-            <a:r>
-              <a:t>• Alerting Rules: PrometheusRules for High Error Rate (&gt;1%), High Latency (&gt;500ms), and Backend Target Down.</a:t>
-            </a:r>
-          </a:p>
-        </p:txBody>
-      </p:sp>
-    </p:spTree>
-  </p:cSld>
-  <p:clrMapOvr>
-    <a:masterClrMapping/>
-  </p:clrMapOvr>
-</p:sld>
-</file>
-
-<file path=ppt/slides/slide11.xml><?xml version="1.0" encoding="utf-8"?>
-<p:sld xmlns:a="http://schemas.openxmlformats.org/drawingml/2006/main" xmlns:p="http://schemas.openxmlformats.org/presentationml/2006/main" xmlns:r="http://schemas.openxmlformats.org/officeDocument/2006/relationships">
-  <p:cSld>
-    <p:spTree>
-      <p:nvGrpSpPr>
-        <p:cNvPr id="1" name=""/>
-        <p:cNvGrpSpPr/>
-        <p:nvPr/>
-      </p:nvGrpSpPr>
-      <p:grpSpPr/>
-      <p:sp>
-        <p:nvSpPr>
-          <p:cNvPr id="2" name="Rectangle 1"/>
+              <a:t>100-Point Rubric Fulfillment, Production Takeaways, and Future Roadmap</a:t>
+            </a:r>
+          </a:p>
+        </p:txBody>
+      </p:sp>
+      <p:sp>
+        <p:nvSpPr>
+          <p:cNvPr id="8" name="Rounded Rectangle 7"/>
           <p:cNvSpPr/>
           <p:nvPr/>
         </p:nvSpPr>
         <p:spPr>
           <a:xfrm>
-            <a:off x="0" y="0"/>
-            <a:ext cx="12191695" cy="6858000"/>
-          </a:xfrm>
-          <a:prstGeom prst="rect">
+            <a:off x="731520" y="1874519"/>
+            <a:ext cx="3423818" cy="4434840"/>
+          </a:xfrm>
+          <a:prstGeom prst="roundRect">
             <a:avLst/>
           </a:prstGeom>
           <a:solidFill>
-            <a:srgbClr val="080C14"/>
+            <a:srgbClr val="0F172A"/>
           </a:solidFill>
-          <a:ln>
+          <a:ln w="12700">
             <a:solidFill>
-              <a:srgbClr val="080C14"/>
+              <a:srgbClr val="1E293B"/>
             </a:solidFill>
           </a:ln>
         </p:spPr>
@@ -3680,24 +5172,131 @@
       </p:sp>
       <p:sp>
         <p:nvSpPr>
-          <p:cNvPr id="3" name="Rectangle 2"/>
+          <p:cNvPr id="9" name="TextBox 8"/>
+          <p:cNvSpPr txBox="1"/>
+          <p:nvPr/>
+        </p:nvSpPr>
+        <p:spPr>
+          <a:xfrm>
+            <a:off x="868680" y="2011679"/>
+            <a:ext cx="3149498" cy="411480"/>
+          </a:xfrm>
+          <a:prstGeom prst="rect">
+            <a:avLst/>
+          </a:prstGeom>
+          <a:noFill/>
+        </p:spPr>
+        <p:txBody>
+          <a:bodyPr wrap="square">
+            <a:spAutoFit/>
+          </a:bodyPr>
+          <a:lstStyle/>
+          <a:p>
+            <a:pPr>
+              <a:defRPr sz="1400" b="1">
+                <a:solidFill>
+                  <a:srgbClr val="10B981"/>
+                </a:solidFill>
+                <a:latin typeface="Arial"/>
+              </a:defRPr>
+            </a:pPr>
+            <a:r>
+              <a:t>Rubric Self-Audit (RUBRIC_CHECK.md)</a:t>
+            </a:r>
+          </a:p>
+        </p:txBody>
+      </p:sp>
+      <p:sp>
+        <p:nvSpPr>
+          <p:cNvPr id="10" name="TextBox 9"/>
+          <p:cNvSpPr txBox="1"/>
+          <p:nvPr/>
+        </p:nvSpPr>
+        <p:spPr>
+          <a:xfrm>
+            <a:off x="868680" y="2468879"/>
+            <a:ext cx="3149498" cy="3703320"/>
+          </a:xfrm>
+          <a:prstGeom prst="rect">
+            <a:avLst/>
+          </a:prstGeom>
+          <a:noFill/>
+        </p:spPr>
+        <p:txBody>
+          <a:bodyPr wrap="square">
+            <a:spAutoFit/>
+          </a:bodyPr>
+          <a:lstStyle/>
+          <a:p>
+            <a:pPr>
+              <a:spcAft>
+                <a:spcPts val="800"/>
+              </a:spcAft>
+              <a:defRPr sz="1200">
+                <a:solidFill>
+                  <a:srgbClr val="F8FAFC"/>
+                </a:solidFill>
+                <a:latin typeface="Calibri"/>
+              </a:defRPr>
+            </a:pPr>
+            <a:r>
+              <a:t>• 100% compliance across all 10 modules (M1 Application to M10 Presentation).</a:t>
+            </a:r>
+          </a:p>
+          <a:p>
+            <a:pPr>
+              <a:spcAft>
+                <a:spcPts val="800"/>
+              </a:spcAft>
+              <a:defRPr sz="1200">
+                <a:solidFill>
+                  <a:srgbClr val="F8FAFC"/>
+                </a:solidFill>
+                <a:latin typeface="Calibri"/>
+              </a:defRPr>
+            </a:pPr>
+            <a:r>
+              <a:t>• Locally runnable components (Docker Compose, Pytest 91%, Non-Root, Probes) are 100% verified green.</a:t>
+            </a:r>
+          </a:p>
+          <a:p>
+            <a:pPr>
+              <a:spcAft>
+                <a:spcPts val="800"/>
+              </a:spcAft>
+              <a:defRPr sz="1200">
+                <a:solidFill>
+                  <a:srgbClr val="F8FAFC"/>
+                </a:solidFill>
+                <a:latin typeface="Calibri"/>
+              </a:defRPr>
+            </a:pPr>
+            <a:r>
+              <a:t>• Cloud-only components (AWS EKS apply, live ArgoCD) are fully written, validated, and documented.</a:t>
+            </a:r>
+          </a:p>
+        </p:txBody>
+      </p:sp>
+      <p:sp>
+        <p:nvSpPr>
+          <p:cNvPr id="11" name="Rounded Rectangle 10"/>
           <p:cNvSpPr/>
           <p:nvPr/>
         </p:nvSpPr>
         <p:spPr>
           <a:xfrm>
-            <a:off x="731520" y="731520"/>
-            <a:ext cx="10728655" cy="5394960"/>
-          </a:xfrm>
-          <a:prstGeom prst="rect">
+            <a:off x="4383938" y="1874519"/>
+            <a:ext cx="3423818" cy="4434840"/>
+          </a:xfrm>
+          <a:prstGeom prst="roundRect">
             <a:avLst/>
           </a:prstGeom>
           <a:solidFill>
             <a:srgbClr val="0F172A"/>
           </a:solidFill>
-          <a:ln w="19050">
+          <a:ln w="12700">
             <a:solidFill>
-              <a:srgbClr val="F59E0B"/>
+              <a:srgbClr val="1E293B"/>
             </a:solidFill>
           </a:ln>
         </p:spPr>
@@ -3725,14 +5324,14 @@
       </p:sp>
       <p:sp>
         <p:nvSpPr>
-          <p:cNvPr id="4" name="TextBox 3"/>
+          <p:cNvPr id="12" name="TextBox 11"/>
           <p:cNvSpPr txBox="1"/>
           <p:nvPr/>
         </p:nvSpPr>
         <p:spPr>
           <a:xfrm>
-            <a:off x="1097280" y="1005840"/>
-            <a:ext cx="10058400" cy="731520"/>
+            <a:off x="4521098" y="2011679"/>
+            <a:ext cx="3149498" cy="411480"/>
           </a:xfrm>
           <a:prstGeom prst="rect">
             <a:avLst/>
@@ -3746,29 +5345,29 @@
           <a:lstStyle/>
           <a:p>
             <a:pPr>
-              <a:defRPr sz="2800" b="1">
-                <a:solidFill>
-                  <a:srgbClr val="F59E0B"/>
+              <a:defRPr sz="1400" b="1">
+                <a:solidFill>
+                  <a:srgbClr val="38BDF8"/>
                 </a:solidFill>
                 <a:latin typeface="Arial"/>
               </a:defRPr>
             </a:pPr>
             <a:r>
-              <a:t>Troubleshooting Lab &amp; Runbook</a:t>
-            </a:r>
-          </a:p>
-        </p:txBody>
-      </p:sp>
-      <p:sp>
-        <p:nvSpPr>
-          <p:cNvPr id="5" name="TextBox 4"/>
+              <a:t>Key Engineering Lessons</a:t>
+            </a:r>
+          </a:p>
+        </p:txBody>
+      </p:sp>
+      <p:sp>
+        <p:nvSpPr>
+          <p:cNvPr id="13" name="TextBox 12"/>
           <p:cNvSpPr txBox="1"/>
           <p:nvPr/>
         </p:nvSpPr>
         <p:spPr>
           <a:xfrm>
-            <a:off x="1097280" y="1645920"/>
-            <a:ext cx="10058400" cy="548640"/>
+            <a:off x="4521098" y="2468879"/>
+            <a:ext cx="3149498" cy="3703320"/>
           </a:xfrm>
           <a:prstGeom prst="rect">
             <a:avLst/>
@@ -3782,144 +5381,74 @@
           <a:lstStyle/>
           <a:p>
             <a:pPr>
-              <a:defRPr sz="1600">
-                <a:solidFill>
-                  <a:srgbClr val="10B981"/>
-                </a:solidFill>
-                <a:latin typeface="Arial"/>
-              </a:defRPr>
-            </a:pPr>
-            <a:r>
-              <a:t>Four Real-World Kubernetes Failure Scenarios and Resolution Runbooks</a:t>
-            </a:r>
-          </a:p>
-        </p:txBody>
-      </p:sp>
-      <p:sp>
-        <p:nvSpPr>
-          <p:cNvPr id="6" name="TextBox 5"/>
-          <p:cNvSpPr txBox="1"/>
-          <p:nvPr/>
-        </p:nvSpPr>
-        <p:spPr>
-          <a:xfrm>
-            <a:off x="1097280" y="2377440"/>
-            <a:ext cx="10058400" cy="3474720"/>
-          </a:xfrm>
-          <a:prstGeom prst="rect">
-            <a:avLst/>
-          </a:prstGeom>
-          <a:noFill/>
-        </p:spPr>
-        <p:txBody>
-          <a:bodyPr wrap="square">
-            <a:spAutoFit/>
-          </a:bodyPr>
-          <a:lstStyle/>
-          <a:p>
-            <a:pPr>
               <a:spcAft>
-                <a:spcPts val="1400"/>
+                <a:spcPts val="800"/>
               </a:spcAft>
-              <a:defRPr sz="1800">
-                <a:solidFill>
-                  <a:srgbClr val="FFFFFF"/>
+              <a:defRPr sz="1200">
+                <a:solidFill>
+                  <a:srgbClr val="F8FAFC"/>
                 </a:solidFill>
                 <a:latin typeface="Calibri"/>
               </a:defRPr>
             </a:pPr>
             <a:r>
-              <a:t>• Scenario 1 - Broken Image: CrashLoopBackOff due to nonexistent tag; diagnosed via kubectl describe and fixed in values.yaml.</a:t>
+              <a:t>• Pre-upgrade Helm hooks are essential to avoid database schema race conditions across replicated pods.</a:t>
             </a:r>
           </a:p>
           <a:p>
             <a:pPr>
               <a:spcAft>
-                <a:spcPts val="1400"/>
+                <a:spcPts val="800"/>
               </a:spcAft>
-              <a:defRPr sz="1800">
-                <a:solidFill>
-                  <a:srgbClr val="FFFFFF"/>
+              <a:defRPr sz="1200">
+                <a:solidFill>
+                  <a:srgbClr val="F8FAFC"/>
                 </a:solidFill>
                 <a:latin typeface="Calibri"/>
               </a:defRPr>
             </a:pPr>
             <a:r>
-              <a:t>• Scenario 2 - Service Selector Mismatch: 502 Bad Gateway; diagnosed via endpoints inspection and selector alignment.</a:t>
+              <a:t>• Dual-stack IPv4/IPv6 awareness is critical when containerizing unprivileged Nginx on modern Alpine Linux.</a:t>
             </a:r>
           </a:p>
           <a:p>
             <a:pPr>
               <a:spcAft>
-                <a:spcPts val="1400"/>
+                <a:spcPts val="800"/>
               </a:spcAft>
-              <a:defRPr sz="1800">
-                <a:solidFill>
-                  <a:srgbClr val="FFFFFF"/>
+              <a:defRPr sz="1200">
+                <a:solidFill>
+                  <a:srgbClr val="F8FAFC"/>
                 </a:solidFill>
                 <a:latin typeface="Calibri"/>
               </a:defRPr>
             </a:pPr>
             <a:r>
-              <a:t>• Scenario 3 - Readiness Probe Failure: Pod unready; diagnosed via probe logs and HTTP endpoint path fix.</a:t>
-            </a:r>
-          </a:p>
-          <a:p>
-            <a:pPr>
-              <a:spcAft>
-                <a:spcPts val="1400"/>
-              </a:spcAft>
-              <a:defRPr sz="1800">
-                <a:solidFill>
-                  <a:srgbClr val="FFFFFF"/>
-                </a:solidFill>
-                <a:latin typeface="Calibri"/>
-              </a:defRPr>
-            </a:pPr>
-            <a:r>
-              <a:t>• Scenario 4 - Missing Secret: Pod blocked from initialization; diagnosed via describe pod events and secret provisioning.</a:t>
-            </a:r>
-          </a:p>
-        </p:txBody>
-      </p:sp>
-    </p:spTree>
-  </p:cSld>
-  <p:clrMapOvr>
-    <a:masterClrMapping/>
-  </p:clrMapOvr>
-</p:sld>
-</file>
-
-<file path=ppt/slides/slide12.xml><?xml version="1.0" encoding="utf-8"?>
-<p:sld xmlns:a="http://schemas.openxmlformats.org/drawingml/2006/main" xmlns:p="http://schemas.openxmlformats.org/presentationml/2006/main" xmlns:r="http://schemas.openxmlformats.org/officeDocument/2006/relationships">
-  <p:cSld>
-    <p:spTree>
-      <p:nvGrpSpPr>
-        <p:cNvPr id="1" name=""/>
-        <p:cNvGrpSpPr/>
-        <p:nvPr/>
-      </p:nvGrpSpPr>
-      <p:grpSpPr/>
-      <p:sp>
-        <p:nvSpPr>
-          <p:cNvPr id="2" name="Rectangle 1"/>
+              <a:t>• Immutable image tagging by Git commit SHA ensures reliable GitOps rollback without caching ambiguities.</a:t>
+            </a:r>
+          </a:p>
+        </p:txBody>
+      </p:sp>
+      <p:sp>
+        <p:nvSpPr>
+          <p:cNvPr id="14" name="Rounded Rectangle 13"/>
           <p:cNvSpPr/>
           <p:nvPr/>
         </p:nvSpPr>
         <p:spPr>
           <a:xfrm>
-            <a:off x="0" y="0"/>
-            <a:ext cx="12191695" cy="6858000"/>
-          </a:xfrm>
-          <a:prstGeom prst="rect">
+            <a:off x="8036356" y="1874519"/>
+            <a:ext cx="3423818" cy="4434840"/>
+          </a:xfrm>
+          <a:prstGeom prst="roundRect">
             <a:avLst/>
           </a:prstGeom>
           <a:solidFill>
-            <a:srgbClr val="080C14"/>
+            <a:srgbClr val="0F172A"/>
           </a:solidFill>
-          <a:ln>
+          <a:ln w="12700">
             <a:solidFill>
-              <a:srgbClr val="080C14"/>
+              <a:srgbClr val="1E293B"/>
             </a:solidFill>
           </a:ln>
         </p:spPr>
@@ -3947,59 +5476,14 @@
       </p:sp>
       <p:sp>
         <p:nvSpPr>
-          <p:cNvPr id="3" name="Rectangle 2"/>
-          <p:cNvSpPr/>
-          <p:nvPr/>
-        </p:nvSpPr>
-        <p:spPr>
-          <a:xfrm>
-            <a:off x="731520" y="731520"/>
-            <a:ext cx="10728655" cy="5394960"/>
-          </a:xfrm>
-          <a:prstGeom prst="rect">
-            <a:avLst/>
-          </a:prstGeom>
-          <a:solidFill>
-            <a:srgbClr val="0F172A"/>
-          </a:solidFill>
-          <a:ln w="19050">
-            <a:solidFill>
-              <a:srgbClr val="F59E0B"/>
-            </a:solidFill>
-          </a:ln>
-        </p:spPr>
-        <p:style>
-          <a:lnRef idx="1">
-            <a:schemeClr val="accent1"/>
-          </a:lnRef>
-          <a:fillRef idx="3">
-            <a:schemeClr val="accent1"/>
-          </a:fillRef>
-          <a:effectRef idx="2">
-            <a:schemeClr val="accent1"/>
-          </a:effectRef>
-          <a:fontRef idx="minor">
-            <a:schemeClr val="lt1"/>
-          </a:fontRef>
-        </p:style>
-        <p:txBody>
-          <a:bodyPr rtlCol="0" anchor="ctr"/>
-          <a:lstStyle/>
-          <a:p>
-            <a:pPr algn="ctr"/>
-          </a:p>
-        </p:txBody>
-      </p:sp>
-      <p:sp>
-        <p:nvSpPr>
-          <p:cNvPr id="4" name="TextBox 3"/>
+          <p:cNvPr id="15" name="TextBox 14"/>
           <p:cNvSpPr txBox="1"/>
           <p:nvPr/>
         </p:nvSpPr>
         <p:spPr>
           <a:xfrm>
-            <a:off x="1097280" y="1005840"/>
-            <a:ext cx="10058400" cy="731520"/>
+            <a:off x="8173516" y="2011679"/>
+            <a:ext cx="3149498" cy="411480"/>
           </a:xfrm>
           <a:prstGeom prst="rect">
             <a:avLst/>
@@ -4013,7 +5497,7 @@
           <a:lstStyle/>
           <a:p>
             <a:pPr>
-              <a:defRPr sz="2800" b="1">
+              <a:defRPr sz="1400" b="1">
                 <a:solidFill>
                   <a:srgbClr val="F59E0B"/>
                 </a:solidFill>
@@ -4021,21 +5505,21 @@
               </a:defRPr>
             </a:pPr>
             <a:r>
-              <a:t>Project Summary &amp; Submission Audit</a:t>
-            </a:r>
-          </a:p>
-        </p:txBody>
-      </p:sp>
-      <p:sp>
-        <p:nvSpPr>
-          <p:cNvPr id="5" name="TextBox 4"/>
+              <a:t>Future Production Enhancements</a:t>
+            </a:r>
+          </a:p>
+        </p:txBody>
+      </p:sp>
+      <p:sp>
+        <p:nvSpPr>
+          <p:cNvPr id="16" name="TextBox 15"/>
           <p:cNvSpPr txBox="1"/>
           <p:nvPr/>
         </p:nvSpPr>
         <p:spPr>
           <a:xfrm>
-            <a:off x="1097280" y="1645920"/>
-            <a:ext cx="10058400" cy="548640"/>
+            <a:off x="8173516" y="2468879"/>
+            <a:ext cx="3149498" cy="3703320"/>
           </a:xfrm>
           <a:prstGeom prst="rect">
             <a:avLst/>
@@ -4049,29 +5533,64 @@
           <a:lstStyle/>
           <a:p>
             <a:pPr>
-              <a:defRPr sz="1600">
-                <a:solidFill>
-                  <a:srgbClr val="10B981"/>
-                </a:solidFill>
-                <a:latin typeface="Arial"/>
-              </a:defRPr>
-            </a:pPr>
-            <a:r>
-              <a:t>100-Point Grading Rubric Compliance and Demonstration Readiness</a:t>
-            </a:r>
-          </a:p>
-        </p:txBody>
-      </p:sp>
-      <p:sp>
-        <p:nvSpPr>
-          <p:cNvPr id="6" name="TextBox 5"/>
+              <a:spcAft>
+                <a:spcPts val="800"/>
+              </a:spcAft>
+              <a:defRPr sz="1200">
+                <a:solidFill>
+                  <a:srgbClr val="F8FAFC"/>
+                </a:solidFill>
+                <a:latin typeface="Calibri"/>
+              </a:defRPr>
+            </a:pPr>
+            <a:r>
+              <a:t>• Transition in-cluster PostgreSQL to Amazon Aurora Multi-AZ with automated automated failover.</a:t>
+            </a:r>
+          </a:p>
+          <a:p>
+            <a:pPr>
+              <a:spcAft>
+                <a:spcPts val="800"/>
+              </a:spcAft>
+              <a:defRPr sz="1200">
+                <a:solidFill>
+                  <a:srgbClr val="F8FAFC"/>
+                </a:solidFill>
+                <a:latin typeface="Calibri"/>
+              </a:defRPr>
+            </a:pPr>
+            <a:r>
+              <a:t>• Implement OpenTelemetry distributed tracing with AWS X-Ray for end-to-end request tracing.</a:t>
+            </a:r>
+          </a:p>
+          <a:p>
+            <a:pPr>
+              <a:spcAft>
+                <a:spcPts val="800"/>
+              </a:spcAft>
+              <a:defRPr sz="1200">
+                <a:solidFill>
+                  <a:srgbClr val="F8FAFC"/>
+                </a:solidFill>
+                <a:latin typeface="Calibri"/>
+              </a:defRPr>
+            </a:pPr>
+            <a:r>
+              <a:t>• Deploy Istio Service Mesh with mTLS and fine-grained authorization policies across microservices.</a:t>
+            </a:r>
+          </a:p>
+        </p:txBody>
+      </p:sp>
+      <p:sp>
+        <p:nvSpPr>
+          <p:cNvPr id="17" name="TextBox 16"/>
           <p:cNvSpPr txBox="1"/>
           <p:nvPr/>
         </p:nvSpPr>
         <p:spPr>
           <a:xfrm>
-            <a:off x="1097280" y="2377440"/>
-            <a:ext cx="10058400" cy="3474720"/>
+            <a:off x="731520" y="6446520"/>
+            <a:ext cx="10728655" cy="274320"/>
           </a:xfrm>
           <a:prstGeom prst="rect">
             <a:avLst/>
@@ -4079,72 +5598,21 @@
           <a:noFill/>
         </p:spPr>
         <p:txBody>
-          <a:bodyPr wrap="square">
+          <a:bodyPr wrap="none">
             <a:spAutoFit/>
           </a:bodyPr>
           <a:lstStyle/>
           <a:p>
             <a:pPr>
-              <a:spcAft>
-                <a:spcPts val="1400"/>
-              </a:spcAft>
-              <a:defRPr sz="1800">
-                <a:solidFill>
-                  <a:srgbClr val="FFFFFF"/>
-                </a:solidFill>
-                <a:latin typeface="Calibri"/>
-              </a:defRPr>
-            </a:pPr>
-            <a:r>
-              <a:t>• Rubric Check: Complete honest self-audit in docs/RUBRIC_CHECK.md covering Modules M1 through M10.</a:t>
-            </a:r>
-          </a:p>
-          <a:p>
-            <a:pPr>
-              <a:spcAft>
-                <a:spcPts val="1400"/>
-              </a:spcAft>
-              <a:defRPr sz="1800">
-                <a:solidFill>
-                  <a:srgbClr val="FFFFFF"/>
-                </a:solidFill>
-                <a:latin typeface="Calibri"/>
-              </a:defRPr>
-            </a:pPr>
-            <a:r>
-              <a:t>• Local Verification: 100% green Docker stack (PostgreSQL, Backend, Frontend) with verified non-root UIDs.</a:t>
-            </a:r>
-          </a:p>
-          <a:p>
-            <a:pPr>
-              <a:spcAft>
-                <a:spcPts val="1400"/>
-              </a:spcAft>
-              <a:defRPr sz="1800">
-                <a:solidFill>
-                  <a:srgbClr val="FFFFFF"/>
-                </a:solidFill>
-                <a:latin typeface="Calibri"/>
-              </a:defRPr>
-            </a:pPr>
-            <a:r>
-              <a:t>• Reproducible Tooling: Single-command workflows via Makefile, complete video recording script in docs/VIDEO_SCRIPT.md.</a:t>
-            </a:r>
-          </a:p>
-          <a:p>
-            <a:pPr>
-              <a:spcAft>
-                <a:spcPts val="1400"/>
-              </a:spcAft>
-              <a:defRPr sz="1800">
-                <a:solidFill>
-                  <a:srgbClr val="FFFFFF"/>
-                </a:solidFill>
-                <a:latin typeface="Calibri"/>
-              </a:defRPr>
-            </a:pPr>
-            <a:r>
-              <a:t>• Clean Git History: Atomic, conventional commits with zero committed secrets.</a:t>
+              <a:defRPr sz="900">
+                <a:solidFill>
+                  <a:srgbClr val="94A3B8"/>
+                </a:solidFill>
+                <a:latin typeface="Arial"/>
+              </a:defRPr>
+            </a:pPr>
+            <a:r>
+              <a:t>PodiumHQ DevSecOps Capstone • GitOps, Automated Verification &amp; Observability</a:t>
             </a:r>
           </a:p>
         </p:txBody>
@@ -4220,16 +5688,16 @@
         </p:nvSpPr>
         <p:spPr>
           <a:xfrm>
-            <a:off x="731520" y="731520"/>
-            <a:ext cx="10728655" cy="5394960"/>
+            <a:off x="731520" y="365760"/>
+            <a:ext cx="10728655" cy="54864"/>
           </a:xfrm>
           <a:prstGeom prst="rect">
             <a:avLst/>
           </a:prstGeom>
           <a:solidFill>
-            <a:srgbClr val="0F172A"/>
+            <a:srgbClr val="F59E0B"/>
           </a:solidFill>
-          <a:ln w="19050">
+          <a:ln>
             <a:solidFill>
               <a:srgbClr val="F59E0B"/>
             </a:solidFill>
@@ -4265,8 +5733,80 @@
         </p:nvSpPr>
         <p:spPr>
           <a:xfrm>
-            <a:off x="1097280" y="1005840"/>
-            <a:ext cx="10058400" cy="731520"/>
+            <a:off x="731520" y="502920"/>
+            <a:ext cx="5486400" cy="320040"/>
+          </a:xfrm>
+          <a:prstGeom prst="rect">
+            <a:avLst/>
+          </a:prstGeom>
+          <a:noFill/>
+        </p:spPr>
+        <p:txBody>
+          <a:bodyPr wrap="none">
+            <a:spAutoFit/>
+          </a:bodyPr>
+          <a:lstStyle/>
+          <a:p>
+            <a:pPr>
+              <a:defRPr sz="1000" b="1">
+                <a:solidFill>
+                  <a:srgbClr val="F59E0B"/>
+                </a:solidFill>
+                <a:latin typeface="Arial"/>
+              </a:defRPr>
+            </a:pPr>
+            <a:r>
+              <a:t>MODULE CHECKPOINT • TECH STACK SPECIFICATION</a:t>
+            </a:r>
+          </a:p>
+        </p:txBody>
+      </p:sp>
+      <p:sp>
+        <p:nvSpPr>
+          <p:cNvPr id="5" name="TextBox 4"/>
+          <p:cNvSpPr txBox="1"/>
+          <p:nvPr/>
+        </p:nvSpPr>
+        <p:spPr>
+          <a:xfrm>
+            <a:off x="8686800" y="502920"/>
+            <a:ext cx="2743200" cy="320040"/>
+          </a:xfrm>
+          <a:prstGeom prst="rect">
+            <a:avLst/>
+          </a:prstGeom>
+          <a:noFill/>
+        </p:spPr>
+        <p:txBody>
+          <a:bodyPr wrap="none">
+            <a:spAutoFit/>
+          </a:bodyPr>
+          <a:lstStyle/>
+          <a:p>
+            <a:pPr algn="r">
+              <a:defRPr sz="1000" b="1">
+                <a:solidFill>
+                  <a:srgbClr val="94A3B8"/>
+                </a:solidFill>
+                <a:latin typeface="Arial"/>
+              </a:defRPr>
+            </a:pPr>
+            <a:r>
+              <a:t>SLIDE 2 OF 10</a:t>
+            </a:r>
+          </a:p>
+        </p:txBody>
+      </p:sp>
+      <p:sp>
+        <p:nvSpPr>
+          <p:cNvPr id="6" name="TextBox 5"/>
+          <p:cNvSpPr txBox="1"/>
+          <p:nvPr/>
+        </p:nvSpPr>
+        <p:spPr>
+          <a:xfrm>
+            <a:off x="731520" y="777240"/>
+            <a:ext cx="10728655" cy="594360"/>
           </a:xfrm>
           <a:prstGeom prst="rect">
             <a:avLst/>
@@ -4280,29 +5820,29 @@
           <a:lstStyle/>
           <a:p>
             <a:pPr>
-              <a:defRPr sz="2800" b="1">
-                <a:solidFill>
-                  <a:srgbClr val="F59E0B"/>
+              <a:defRPr sz="2400" b="1">
+                <a:solidFill>
+                  <a:srgbClr val="F8FAFC"/>
                 </a:solidFill>
                 <a:latin typeface="Arial"/>
               </a:defRPr>
             </a:pPr>
             <a:r>
-              <a:t>Problem Statement &amp; Domain Selection</a:t>
-            </a:r>
-          </a:p>
-        </p:txBody>
-      </p:sp>
-      <p:sp>
-        <p:nvSpPr>
-          <p:cNvPr id="5" name="TextBox 4"/>
+              <a:t>Application &amp; Technology Stack</a:t>
+            </a:r>
+          </a:p>
+        </p:txBody>
+      </p:sp>
+      <p:sp>
+        <p:nvSpPr>
+          <p:cNvPr id="7" name="TextBox 6"/>
           <p:cNvSpPr txBox="1"/>
           <p:nvPr/>
         </p:nvSpPr>
         <p:spPr>
           <a:xfrm>
-            <a:off x="1097280" y="1645920"/>
-            <a:ext cx="10058400" cy="548640"/>
+            <a:off x="731520" y="1325880"/>
+            <a:ext cx="10728655" cy="411480"/>
           </a:xfrm>
           <a:prstGeom prst="rect">
             <a:avLst/>
@@ -4316,7 +5856,7 @@
           <a:lstStyle/>
           <a:p>
             <a:pPr>
-              <a:defRPr sz="1600">
+              <a:defRPr sz="1300">
                 <a:solidFill>
                   <a:srgbClr val="10B981"/>
                 </a:solidFill>
@@ -4324,21 +5864,66 @@
               </a:defRPr>
             </a:pPr>
             <a:r>
-              <a:t>Moving Beyond Generic CRUD / TaskBoards to Multi-Criteria Event Evaluation</a:t>
-            </a:r>
-          </a:p>
-        </p:txBody>
-      </p:sp>
-      <p:sp>
-        <p:nvSpPr>
-          <p:cNvPr id="6" name="TextBox 5"/>
+              <a:t>High-Performance Modern Web Architecture with Relational Integrity</a:t>
+            </a:r>
+          </a:p>
+        </p:txBody>
+      </p:sp>
+      <p:sp>
+        <p:nvSpPr>
+          <p:cNvPr id="8" name="Rounded Rectangle 7"/>
+          <p:cNvSpPr/>
+          <p:nvPr/>
+        </p:nvSpPr>
+        <p:spPr>
+          <a:xfrm>
+            <a:off x="731520" y="1874519"/>
+            <a:ext cx="3423818" cy="4434840"/>
+          </a:xfrm>
+          <a:prstGeom prst="roundRect">
+            <a:avLst/>
+          </a:prstGeom>
+          <a:solidFill>
+            <a:srgbClr val="0F172A"/>
+          </a:solidFill>
+          <a:ln w="12700">
+            <a:solidFill>
+              <a:srgbClr val="1E293B"/>
+            </a:solidFill>
+          </a:ln>
+        </p:spPr>
+        <p:style>
+          <a:lnRef idx="1">
+            <a:schemeClr val="accent1"/>
+          </a:lnRef>
+          <a:fillRef idx="3">
+            <a:schemeClr val="accent1"/>
+          </a:fillRef>
+          <a:effectRef idx="2">
+            <a:schemeClr val="accent1"/>
+          </a:effectRef>
+          <a:fontRef idx="minor">
+            <a:schemeClr val="lt1"/>
+          </a:fontRef>
+        </p:style>
+        <p:txBody>
+          <a:bodyPr rtlCol="0" anchor="ctr"/>
+          <a:lstStyle/>
+          <a:p>
+            <a:pPr algn="ctr"/>
+          </a:p>
+        </p:txBody>
+      </p:sp>
+      <p:sp>
+        <p:nvSpPr>
+          <p:cNvPr id="9" name="TextBox 8"/>
           <p:cNvSpPr txBox="1"/>
           <p:nvPr/>
         </p:nvSpPr>
         <p:spPr>
           <a:xfrm>
-            <a:off x="1097280" y="2377440"/>
-            <a:ext cx="10058400" cy="3474720"/>
+            <a:off x="868680" y="2011679"/>
+            <a:ext cx="3149498" cy="411480"/>
           </a:xfrm>
           <a:prstGeom prst="rect">
             <a:avLst/>
@@ -4352,66 +5937,474 @@
           <a:lstStyle/>
           <a:p>
             <a:pPr>
+              <a:defRPr sz="1400" b="1">
+                <a:solidFill>
+                  <a:srgbClr val="38BDF8"/>
+                </a:solidFill>
+                <a:latin typeface="Arial"/>
+              </a:defRPr>
+            </a:pPr>
+            <a:r>
+              <a:t>Frontend Tier (React 18 SPA)</a:t>
+            </a:r>
+          </a:p>
+        </p:txBody>
+      </p:sp>
+      <p:sp>
+        <p:nvSpPr>
+          <p:cNvPr id="10" name="TextBox 9"/>
+          <p:cNvSpPr txBox="1"/>
+          <p:nvPr/>
+        </p:nvSpPr>
+        <p:spPr>
+          <a:xfrm>
+            <a:off x="868680" y="2468879"/>
+            <a:ext cx="3149498" cy="3703320"/>
+          </a:xfrm>
+          <a:prstGeom prst="rect">
+            <a:avLst/>
+          </a:prstGeom>
+          <a:noFill/>
+        </p:spPr>
+        <p:txBody>
+          <a:bodyPr wrap="square">
+            <a:spAutoFit/>
+          </a:bodyPr>
+          <a:lstStyle/>
+          <a:p>
+            <a:pPr>
               <a:spcAft>
-                <a:spcPts val="1400"/>
+                <a:spcPts val="800"/>
               </a:spcAft>
-              <a:defRPr sz="1800">
-                <a:solidFill>
-                  <a:srgbClr val="FFFFFF"/>
+              <a:defRPr sz="1200">
+                <a:solidFill>
+                  <a:srgbClr val="F8FAFC"/>
                 </a:solidFill>
                 <a:latin typeface="Calibri"/>
               </a:defRPr>
             </a:pPr>
             <a:r>
-              <a:t>• Domain Originality: Hackathon evaluation platform where judges score teams across rounds against weighted criteria.</a:t>
+              <a:t>• React 18 + Vite with Tailwind CSS styling in an Obsidian &amp; Solar Gold palette.</a:t>
             </a:r>
           </a:p>
           <a:p>
             <a:pPr>
               <a:spcAft>
-                <a:spcPts val="1400"/>
+                <a:spcPts val="800"/>
               </a:spcAft>
-              <a:defRPr sz="1800">
-                <a:solidFill>
-                  <a:srgbClr val="FFFFFF"/>
+              <a:defRPr sz="1200">
+                <a:solidFill>
+                  <a:srgbClr val="F8FAFC"/>
                 </a:solidFill>
                 <a:latin typeface="Calibri"/>
               </a:defRPr>
             </a:pPr>
             <a:r>
-              <a:t>• Real-Time Business Logic: Live rank calculation, multi-criterion weighted aggregation, round lock enforcement.</a:t>
+              <a:t>• Live leaderboard with instantaneous client-side ranking and category filtering.</a:t>
             </a:r>
           </a:p>
           <a:p>
             <a:pPr>
               <a:spcAft>
-                <a:spcPts val="1400"/>
+                <a:spcPts val="800"/>
               </a:spcAft>
-              <a:defRPr sz="1800">
-                <a:solidFill>
-                  <a:srgbClr val="FFFFFF"/>
+              <a:defRPr sz="1200">
+                <a:solidFill>
+                  <a:srgbClr val="F8FAFC"/>
                 </a:solidFill>
                 <a:latin typeface="Calibri"/>
               </a:defRPr>
             </a:pPr>
             <a:r>
-              <a:t>• Anti-Plagiarism Architecture: Custom schema (Events, Rounds, Criteria, Teams, Judges, Scores) - zero TaskBoard overlap.</a:t>
+              <a:t>• Responsive judge scoring form with client-side bounds and schema validation.</a:t>
             </a:r>
           </a:p>
           <a:p>
             <a:pPr>
               <a:spcAft>
-                <a:spcPts val="1400"/>
+                <a:spcPts val="800"/>
               </a:spcAft>
-              <a:defRPr sz="1800">
-                <a:solidFill>
-                  <a:srgbClr val="FFFFFF"/>
+              <a:defRPr sz="1200">
+                <a:solidFill>
+                  <a:srgbClr val="F8FAFC"/>
                 </a:solidFill>
                 <a:latin typeface="Calibri"/>
               </a:defRPr>
             </a:pPr>
             <a:r>
-              <a:t>• Production Rigor: Built to withstand high concurrency during judging deadlines with zero downtime.</a:t>
+              <a:t>• Runtime: Served via unprivileged Nginx (UID 101) with dynamic proxying to backend.</a:t>
+            </a:r>
+          </a:p>
+        </p:txBody>
+      </p:sp>
+      <p:sp>
+        <p:nvSpPr>
+          <p:cNvPr id="11" name="Rounded Rectangle 10"/>
+          <p:cNvSpPr/>
+          <p:nvPr/>
+        </p:nvSpPr>
+        <p:spPr>
+          <a:xfrm>
+            <a:off x="4383938" y="1874519"/>
+            <a:ext cx="3423818" cy="4434840"/>
+          </a:xfrm>
+          <a:prstGeom prst="roundRect">
+            <a:avLst/>
+          </a:prstGeom>
+          <a:solidFill>
+            <a:srgbClr val="0F172A"/>
+          </a:solidFill>
+          <a:ln w="12700">
+            <a:solidFill>
+              <a:srgbClr val="1E293B"/>
+            </a:solidFill>
+          </a:ln>
+        </p:spPr>
+        <p:style>
+          <a:lnRef idx="1">
+            <a:schemeClr val="accent1"/>
+          </a:lnRef>
+          <a:fillRef idx="3">
+            <a:schemeClr val="accent1"/>
+          </a:fillRef>
+          <a:effectRef idx="2">
+            <a:schemeClr val="accent1"/>
+          </a:effectRef>
+          <a:fontRef idx="minor">
+            <a:schemeClr val="lt1"/>
+          </a:fontRef>
+        </p:style>
+        <p:txBody>
+          <a:bodyPr rtlCol="0" anchor="ctr"/>
+          <a:lstStyle/>
+          <a:p>
+            <a:pPr algn="ctr"/>
+          </a:p>
+        </p:txBody>
+      </p:sp>
+      <p:sp>
+        <p:nvSpPr>
+          <p:cNvPr id="12" name="TextBox 11"/>
+          <p:cNvSpPr txBox="1"/>
+          <p:nvPr/>
+        </p:nvSpPr>
+        <p:spPr>
+          <a:xfrm>
+            <a:off x="4521098" y="2011679"/>
+            <a:ext cx="3149498" cy="411480"/>
+          </a:xfrm>
+          <a:prstGeom prst="rect">
+            <a:avLst/>
+          </a:prstGeom>
+          <a:noFill/>
+        </p:spPr>
+        <p:txBody>
+          <a:bodyPr wrap="square">
+            <a:spAutoFit/>
+          </a:bodyPr>
+          <a:lstStyle/>
+          <a:p>
+            <a:pPr>
+              <a:defRPr sz="1400" b="1">
+                <a:solidFill>
+                  <a:srgbClr val="10B981"/>
+                </a:solidFill>
+                <a:latin typeface="Arial"/>
+              </a:defRPr>
+            </a:pPr>
+            <a:r>
+              <a:t>Backend Tier (FastAPI Async API)</a:t>
+            </a:r>
+          </a:p>
+        </p:txBody>
+      </p:sp>
+      <p:sp>
+        <p:nvSpPr>
+          <p:cNvPr id="13" name="TextBox 12"/>
+          <p:cNvSpPr txBox="1"/>
+          <p:nvPr/>
+        </p:nvSpPr>
+        <p:spPr>
+          <a:xfrm>
+            <a:off x="4521098" y="2468879"/>
+            <a:ext cx="3149498" cy="3703320"/>
+          </a:xfrm>
+          <a:prstGeom prst="rect">
+            <a:avLst/>
+          </a:prstGeom>
+          <a:noFill/>
+        </p:spPr>
+        <p:txBody>
+          <a:bodyPr wrap="square">
+            <a:spAutoFit/>
+          </a:bodyPr>
+          <a:lstStyle/>
+          <a:p>
+            <a:pPr>
+              <a:spcAft>
+                <a:spcPts val="800"/>
+              </a:spcAft>
+              <a:defRPr sz="1200">
+                <a:solidFill>
+                  <a:srgbClr val="F8FAFC"/>
+                </a:solidFill>
+                <a:latin typeface="Calibri"/>
+              </a:defRPr>
+            </a:pPr>
+            <a:r>
+              <a:t>• Python 3.12 running asynchronous FastAPI ASGI server with Uvicorn.</a:t>
+            </a:r>
+          </a:p>
+          <a:p>
+            <a:pPr>
+              <a:spcAft>
+                <a:spcPts val="800"/>
+              </a:spcAft>
+              <a:defRPr sz="1200">
+                <a:solidFill>
+                  <a:srgbClr val="F8FAFC"/>
+                </a:solidFill>
+                <a:latin typeface="Calibri"/>
+              </a:defRPr>
+            </a:pPr>
+            <a:r>
+              <a:t>• 15+ RESTful endpoints under /api/events, /api/teams, /api/judges, /api/scores, and /api/leaderboard.</a:t>
+            </a:r>
+          </a:p>
+          <a:p>
+            <a:pPr>
+              <a:spcAft>
+                <a:spcPts val="800"/>
+              </a:spcAft>
+              <a:defRPr sz="1200">
+                <a:solidFill>
+                  <a:srgbClr val="F8FAFC"/>
+                </a:solidFill>
+                <a:latin typeface="Calibri"/>
+              </a:defRPr>
+            </a:pPr>
+            <a:r>
+              <a:t>• Operational probes: /health (liveness), /ready (database ping), and /metrics (Prometheus).</a:t>
+            </a:r>
+          </a:p>
+          <a:p>
+            <a:pPr>
+              <a:spcAft>
+                <a:spcPts val="800"/>
+              </a:spcAft>
+              <a:defRPr sz="1200">
+                <a:solidFill>
+                  <a:srgbClr val="F8FAFC"/>
+                </a:solidFill>
+                <a:latin typeface="Calibri"/>
+              </a:defRPr>
+            </a:pPr>
+            <a:r>
+              <a:t>• Runtime: Hardened Python container running strictly as non-root appuser (UID 10001).</a:t>
+            </a:r>
+          </a:p>
+        </p:txBody>
+      </p:sp>
+      <p:sp>
+        <p:nvSpPr>
+          <p:cNvPr id="14" name="Rounded Rectangle 13"/>
+          <p:cNvSpPr/>
+          <p:nvPr/>
+        </p:nvSpPr>
+        <p:spPr>
+          <a:xfrm>
+            <a:off x="8036356" y="1874519"/>
+            <a:ext cx="3423818" cy="4434840"/>
+          </a:xfrm>
+          <a:prstGeom prst="roundRect">
+            <a:avLst/>
+          </a:prstGeom>
+          <a:solidFill>
+            <a:srgbClr val="0F172A"/>
+          </a:solidFill>
+          <a:ln w="12700">
+            <a:solidFill>
+              <a:srgbClr val="1E293B"/>
+            </a:solidFill>
+          </a:ln>
+        </p:spPr>
+        <p:style>
+          <a:lnRef idx="1">
+            <a:schemeClr val="accent1"/>
+          </a:lnRef>
+          <a:fillRef idx="3">
+            <a:schemeClr val="accent1"/>
+          </a:fillRef>
+          <a:effectRef idx="2">
+            <a:schemeClr val="accent1"/>
+          </a:effectRef>
+          <a:fontRef idx="minor">
+            <a:schemeClr val="lt1"/>
+          </a:fontRef>
+        </p:style>
+        <p:txBody>
+          <a:bodyPr rtlCol="0" anchor="ctr"/>
+          <a:lstStyle/>
+          <a:p>
+            <a:pPr algn="ctr"/>
+          </a:p>
+        </p:txBody>
+      </p:sp>
+      <p:sp>
+        <p:nvSpPr>
+          <p:cNvPr id="15" name="TextBox 14"/>
+          <p:cNvSpPr txBox="1"/>
+          <p:nvPr/>
+        </p:nvSpPr>
+        <p:spPr>
+          <a:xfrm>
+            <a:off x="8173516" y="2011679"/>
+            <a:ext cx="3149498" cy="411480"/>
+          </a:xfrm>
+          <a:prstGeom prst="rect">
+            <a:avLst/>
+          </a:prstGeom>
+          <a:noFill/>
+        </p:spPr>
+        <p:txBody>
+          <a:bodyPr wrap="square">
+            <a:spAutoFit/>
+          </a:bodyPr>
+          <a:lstStyle/>
+          <a:p>
+            <a:pPr>
+              <a:defRPr sz="1400" b="1">
+                <a:solidFill>
+                  <a:srgbClr val="F59E0B"/>
+                </a:solidFill>
+                <a:latin typeface="Arial"/>
+              </a:defRPr>
+            </a:pPr>
+            <a:r>
+              <a:t>Data &amp; Persistence Tier (PostgreSQL 16)</a:t>
+            </a:r>
+          </a:p>
+        </p:txBody>
+      </p:sp>
+      <p:sp>
+        <p:nvSpPr>
+          <p:cNvPr id="16" name="TextBox 15"/>
+          <p:cNvSpPr txBox="1"/>
+          <p:nvPr/>
+        </p:nvSpPr>
+        <p:spPr>
+          <a:xfrm>
+            <a:off x="8173516" y="2468879"/>
+            <a:ext cx="3149498" cy="3703320"/>
+          </a:xfrm>
+          <a:prstGeom prst="rect">
+            <a:avLst/>
+          </a:prstGeom>
+          <a:noFill/>
+        </p:spPr>
+        <p:txBody>
+          <a:bodyPr wrap="square">
+            <a:spAutoFit/>
+          </a:bodyPr>
+          <a:lstStyle/>
+          <a:p>
+            <a:pPr>
+              <a:spcAft>
+                <a:spcPts val="800"/>
+              </a:spcAft>
+              <a:defRPr sz="1200">
+                <a:solidFill>
+                  <a:srgbClr val="F8FAFC"/>
+                </a:solidFill>
+                <a:latin typeface="Calibri"/>
+              </a:defRPr>
+            </a:pPr>
+            <a:r>
+              <a:t>• PostgreSQL 16 relational database with Psycopg 3 connection pooling.</a:t>
+            </a:r>
+          </a:p>
+          <a:p>
+            <a:pPr>
+              <a:spcAft>
+                <a:spcPts val="800"/>
+              </a:spcAft>
+              <a:defRPr sz="1200">
+                <a:solidFill>
+                  <a:srgbClr val="F8FAFC"/>
+                </a:solidFill>
+                <a:latin typeface="Calibri"/>
+              </a:defRPr>
+            </a:pPr>
+            <a:r>
+              <a:t>• SQLAlchemy 2.0 ORM with relational foreign keys, unique constraints, and indexes.</a:t>
+            </a:r>
+          </a:p>
+          <a:p>
+            <a:pPr>
+              <a:spcAft>
+                <a:spcPts val="800"/>
+              </a:spcAft>
+              <a:defRPr sz="1200">
+                <a:solidFill>
+                  <a:srgbClr val="F8FAFC"/>
+                </a:solidFill>
+                <a:latin typeface="Calibri"/>
+              </a:defRPr>
+            </a:pPr>
+            <a:r>
+              <a:t>• Alembic schema migrations with automated pre-upgrade execution.</a:t>
+            </a:r>
+          </a:p>
+          <a:p>
+            <a:pPr>
+              <a:spcAft>
+                <a:spcPts val="800"/>
+              </a:spcAft>
+              <a:defRPr sz="1200">
+                <a:solidFill>
+                  <a:srgbClr val="F8FAFC"/>
+                </a:solidFill>
+                <a:latin typeface="Calibri"/>
+              </a:defRPr>
+            </a:pPr>
+            <a:r>
+              <a:t>• Cloud Storage: AWS EBS gp3 volume claim via AWS EBS CSI driver.</a:t>
+            </a:r>
+          </a:p>
+        </p:txBody>
+      </p:sp>
+      <p:sp>
+        <p:nvSpPr>
+          <p:cNvPr id="17" name="TextBox 16"/>
+          <p:cNvSpPr txBox="1"/>
+          <p:nvPr/>
+        </p:nvSpPr>
+        <p:spPr>
+          <a:xfrm>
+            <a:off x="731520" y="6446520"/>
+            <a:ext cx="10728655" cy="274320"/>
+          </a:xfrm>
+          <a:prstGeom prst="rect">
+            <a:avLst/>
+          </a:prstGeom>
+          <a:noFill/>
+        </p:spPr>
+        <p:txBody>
+          <a:bodyPr wrap="none">
+            <a:spAutoFit/>
+          </a:bodyPr>
+          <a:lstStyle/>
+          <a:p>
+            <a:pPr>
+              <a:defRPr sz="900">
+                <a:solidFill>
+                  <a:srgbClr val="94A3B8"/>
+                </a:solidFill>
+                <a:latin typeface="Arial"/>
+              </a:defRPr>
+            </a:pPr>
+            <a:r>
+              <a:t>PodiumHQ DevSecOps Capstone • GitOps, Automated Verification &amp; Observability</a:t>
             </a:r>
           </a:p>
         </p:txBody>
@@ -4487,10 +6480,267 @@
         </p:nvSpPr>
         <p:spPr>
           <a:xfrm>
-            <a:off x="731520" y="731520"/>
-            <a:ext cx="10728655" cy="5394960"/>
-          </a:xfrm>
-          <a:prstGeom prst="rect">
+            <a:off x="731520" y="365760"/>
+            <a:ext cx="10728655" cy="54864"/>
+          </a:xfrm>
+          <a:prstGeom prst="rect">
+            <a:avLst/>
+          </a:prstGeom>
+          <a:solidFill>
+            <a:srgbClr val="F59E0B"/>
+          </a:solidFill>
+          <a:ln>
+            <a:solidFill>
+              <a:srgbClr val="F59E0B"/>
+            </a:solidFill>
+          </a:ln>
+        </p:spPr>
+        <p:style>
+          <a:lnRef idx="1">
+            <a:schemeClr val="accent1"/>
+          </a:lnRef>
+          <a:fillRef idx="3">
+            <a:schemeClr val="accent1"/>
+          </a:fillRef>
+          <a:effectRef idx="2">
+            <a:schemeClr val="accent1"/>
+          </a:effectRef>
+          <a:fontRef idx="minor">
+            <a:schemeClr val="lt1"/>
+          </a:fontRef>
+        </p:style>
+        <p:txBody>
+          <a:bodyPr rtlCol="0" anchor="ctr"/>
+          <a:lstStyle/>
+          <a:p>
+            <a:pPr algn="ctr"/>
+          </a:p>
+        </p:txBody>
+      </p:sp>
+      <p:sp>
+        <p:nvSpPr>
+          <p:cNvPr id="4" name="TextBox 3"/>
+          <p:cNvSpPr txBox="1"/>
+          <p:nvPr/>
+        </p:nvSpPr>
+        <p:spPr>
+          <a:xfrm>
+            <a:off x="731520" y="502920"/>
+            <a:ext cx="5486400" cy="320040"/>
+          </a:xfrm>
+          <a:prstGeom prst="rect">
+            <a:avLst/>
+          </a:prstGeom>
+          <a:noFill/>
+        </p:spPr>
+        <p:txBody>
+          <a:bodyPr wrap="none">
+            <a:spAutoFit/>
+          </a:bodyPr>
+          <a:lstStyle/>
+          <a:p>
+            <a:pPr>
+              <a:defRPr sz="1000" b="1">
+                <a:solidFill>
+                  <a:srgbClr val="F59E0B"/>
+                </a:solidFill>
+                <a:latin typeface="Arial"/>
+              </a:defRPr>
+            </a:pPr>
+            <a:r>
+              <a:t>MODULE CHECKPOINT • SYSTEM ARCHITECTURE DIAGRAM</a:t>
+            </a:r>
+          </a:p>
+        </p:txBody>
+      </p:sp>
+      <p:sp>
+        <p:nvSpPr>
+          <p:cNvPr id="5" name="TextBox 4"/>
+          <p:cNvSpPr txBox="1"/>
+          <p:nvPr/>
+        </p:nvSpPr>
+        <p:spPr>
+          <a:xfrm>
+            <a:off x="8686800" y="502920"/>
+            <a:ext cx="2743200" cy="320040"/>
+          </a:xfrm>
+          <a:prstGeom prst="rect">
+            <a:avLst/>
+          </a:prstGeom>
+          <a:noFill/>
+        </p:spPr>
+        <p:txBody>
+          <a:bodyPr wrap="none">
+            <a:spAutoFit/>
+          </a:bodyPr>
+          <a:lstStyle/>
+          <a:p>
+            <a:pPr algn="r">
+              <a:defRPr sz="1000" b="1">
+                <a:solidFill>
+                  <a:srgbClr val="94A3B8"/>
+                </a:solidFill>
+                <a:latin typeface="Arial"/>
+              </a:defRPr>
+            </a:pPr>
+            <a:r>
+              <a:t>SLIDE 3 OF 10</a:t>
+            </a:r>
+          </a:p>
+        </p:txBody>
+      </p:sp>
+      <p:sp>
+        <p:nvSpPr>
+          <p:cNvPr id="6" name="TextBox 5"/>
+          <p:cNvSpPr txBox="1"/>
+          <p:nvPr/>
+        </p:nvSpPr>
+        <p:spPr>
+          <a:xfrm>
+            <a:off x="731520" y="777240"/>
+            <a:ext cx="10728655" cy="594360"/>
+          </a:xfrm>
+          <a:prstGeom prst="rect">
+            <a:avLst/>
+          </a:prstGeom>
+          <a:noFill/>
+        </p:spPr>
+        <p:txBody>
+          <a:bodyPr wrap="square">
+            <a:spAutoFit/>
+          </a:bodyPr>
+          <a:lstStyle/>
+          <a:p>
+            <a:pPr>
+              <a:defRPr sz="2400" b="1">
+                <a:solidFill>
+                  <a:srgbClr val="F8FAFC"/>
+                </a:solidFill>
+                <a:latin typeface="Arial"/>
+              </a:defRPr>
+            </a:pPr>
+            <a:r>
+              <a:t>End-to-End System Architecture</a:t>
+            </a:r>
+          </a:p>
+        </p:txBody>
+      </p:sp>
+      <p:sp>
+        <p:nvSpPr>
+          <p:cNvPr id="7" name="TextBox 6"/>
+          <p:cNvSpPr txBox="1"/>
+          <p:nvPr/>
+        </p:nvSpPr>
+        <p:spPr>
+          <a:xfrm>
+            <a:off x="731520" y="1325880"/>
+            <a:ext cx="10728655" cy="411480"/>
+          </a:xfrm>
+          <a:prstGeom prst="rect">
+            <a:avLst/>
+          </a:prstGeom>
+          <a:noFill/>
+        </p:spPr>
+        <p:txBody>
+          <a:bodyPr wrap="square">
+            <a:spAutoFit/>
+          </a:bodyPr>
+          <a:lstStyle/>
+          <a:p>
+            <a:pPr>
+              <a:defRPr sz="1300">
+                <a:solidFill>
+                  <a:srgbClr val="10B981"/>
+                </a:solidFill>
+                <a:latin typeface="Arial"/>
+              </a:defRPr>
+            </a:pPr>
+            <a:r>
+              <a:t>Complete Flow: Developer -&gt; CI/CD -&gt; GitOps -&gt; AWS Cloud -&gt; Observability</a:t>
+            </a:r>
+          </a:p>
+        </p:txBody>
+      </p:sp>
+      <p:sp>
+        <p:nvSpPr>
+          <p:cNvPr id="8" name="Rounded Rectangle 7"/>
+          <p:cNvSpPr/>
+          <p:nvPr/>
+        </p:nvSpPr>
+        <p:spPr>
+          <a:xfrm>
+            <a:off x="731520" y="1828800"/>
+            <a:ext cx="1645920" cy="777240"/>
+          </a:xfrm>
+          <a:prstGeom prst="roundRect">
+            <a:avLst/>
+          </a:prstGeom>
+          <a:solidFill>
+            <a:srgbClr val="0F172A"/>
+          </a:solidFill>
+          <a:ln w="12700">
+            <a:solidFill>
+              <a:srgbClr val="1E293B"/>
+            </a:solidFill>
+          </a:ln>
+        </p:spPr>
+        <p:style>
+          <a:lnRef idx="1">
+            <a:schemeClr val="accent1"/>
+          </a:lnRef>
+          <a:fillRef idx="3">
+            <a:schemeClr val="accent1"/>
+          </a:fillRef>
+          <a:effectRef idx="2">
+            <a:schemeClr val="accent1"/>
+          </a:effectRef>
+          <a:fontRef idx="minor">
+            <a:schemeClr val="lt1"/>
+          </a:fontRef>
+        </p:style>
+        <p:txBody>
+          <a:bodyPr rtlCol="0" anchor="ctr" wrap="square"/>
+          <a:lstStyle/>
+          <a:p>
+            <a:pPr algn="ctr">
+              <a:defRPr sz="1100" b="1">
+                <a:solidFill>
+                  <a:srgbClr val="F8FAFC"/>
+                </a:solidFill>
+                <a:latin typeface="Arial"/>
+              </a:defRPr>
+            </a:pPr>
+            <a:r>
+              <a:t>1. Developer</a:t>
+            </a:r>
+          </a:p>
+          <a:p>
+            <a:pPr algn="ctr">
+              <a:defRPr sz="900">
+                <a:solidFill>
+                  <a:srgbClr val="94A3B8"/>
+                </a:solidFill>
+                <a:latin typeface="Calibri"/>
+              </a:defRPr>
+            </a:pPr>
+            <a:r>
+              <a:t>Git Push / Main</a:t>
+            </a:r>
+          </a:p>
+        </p:txBody>
+      </p:sp>
+      <p:sp>
+        <p:nvSpPr>
+          <p:cNvPr id="9" name="Rounded Rectangle 8"/>
+          <p:cNvSpPr/>
+          <p:nvPr/>
+        </p:nvSpPr>
+        <p:spPr>
+          <a:xfrm>
+            <a:off x="2542032" y="1828800"/>
+            <a:ext cx="1645920" cy="777240"/>
+          </a:xfrm>
+          <a:prstGeom prst="roundRect">
             <a:avLst/>
           </a:prstGeom>
           <a:solidFill>
@@ -4517,6 +6767,346 @@
           </a:fontRef>
         </p:style>
         <p:txBody>
+          <a:bodyPr rtlCol="0" anchor="ctr" wrap="square"/>
+          <a:lstStyle/>
+          <a:p>
+            <a:pPr algn="ctr">
+              <a:defRPr sz="1100" b="1">
+                <a:solidFill>
+                  <a:srgbClr val="F8FAFC"/>
+                </a:solidFill>
+                <a:latin typeface="Arial"/>
+              </a:defRPr>
+            </a:pPr>
+            <a:r>
+              <a:t>2. GitHub Actions</a:t>
+            </a:r>
+          </a:p>
+          <a:p>
+            <a:pPr algn="ctr">
+              <a:defRPr sz="900">
+                <a:solidFill>
+                  <a:srgbClr val="94A3B8"/>
+                </a:solidFill>
+                <a:latin typeface="Calibri"/>
+              </a:defRPr>
+            </a:pPr>
+            <a:r>
+              <a:t>Lint -&gt; Pytest 91% -&gt; Trivy</a:t>
+            </a:r>
+          </a:p>
+        </p:txBody>
+      </p:sp>
+      <p:sp>
+        <p:nvSpPr>
+          <p:cNvPr id="10" name="Rounded Rectangle 9"/>
+          <p:cNvSpPr/>
+          <p:nvPr/>
+        </p:nvSpPr>
+        <p:spPr>
+          <a:xfrm>
+            <a:off x="4352544" y="1828800"/>
+            <a:ext cx="1645920" cy="777240"/>
+          </a:xfrm>
+          <a:prstGeom prst="roundRect">
+            <a:avLst/>
+          </a:prstGeom>
+          <a:solidFill>
+            <a:srgbClr val="0F172A"/>
+          </a:solidFill>
+          <a:ln w="12700">
+            <a:solidFill>
+              <a:srgbClr val="1E293B"/>
+            </a:solidFill>
+          </a:ln>
+        </p:spPr>
+        <p:style>
+          <a:lnRef idx="1">
+            <a:schemeClr val="accent1"/>
+          </a:lnRef>
+          <a:fillRef idx="3">
+            <a:schemeClr val="accent1"/>
+          </a:fillRef>
+          <a:effectRef idx="2">
+            <a:schemeClr val="accent1"/>
+          </a:effectRef>
+          <a:fontRef idx="minor">
+            <a:schemeClr val="lt1"/>
+          </a:fontRef>
+        </p:style>
+        <p:txBody>
+          <a:bodyPr rtlCol="0" anchor="ctr" wrap="square"/>
+          <a:lstStyle/>
+          <a:p>
+            <a:pPr algn="ctr">
+              <a:defRPr sz="1100" b="1">
+                <a:solidFill>
+                  <a:srgbClr val="F8FAFC"/>
+                </a:solidFill>
+                <a:latin typeface="Arial"/>
+              </a:defRPr>
+            </a:pPr>
+            <a:r>
+              <a:t>3. Registry</a:t>
+            </a:r>
+          </a:p>
+          <a:p>
+            <a:pPr algn="ctr">
+              <a:defRPr sz="900">
+                <a:solidFill>
+                  <a:srgbClr val="94A3B8"/>
+                </a:solidFill>
+                <a:latin typeface="Calibri"/>
+              </a:defRPr>
+            </a:pPr>
+            <a:r>
+              <a:t>GHCR (Git SHA Tag)</a:t>
+            </a:r>
+          </a:p>
+        </p:txBody>
+      </p:sp>
+      <p:sp>
+        <p:nvSpPr>
+          <p:cNvPr id="11" name="Rounded Rectangle 10"/>
+          <p:cNvSpPr/>
+          <p:nvPr/>
+        </p:nvSpPr>
+        <p:spPr>
+          <a:xfrm>
+            <a:off x="6163056" y="1828800"/>
+            <a:ext cx="1645920" cy="777240"/>
+          </a:xfrm>
+          <a:prstGeom prst="roundRect">
+            <a:avLst/>
+          </a:prstGeom>
+          <a:solidFill>
+            <a:srgbClr val="0F172A"/>
+          </a:solidFill>
+          <a:ln w="12700">
+            <a:solidFill>
+              <a:srgbClr val="1E293B"/>
+            </a:solidFill>
+          </a:ln>
+        </p:spPr>
+        <p:style>
+          <a:lnRef idx="1">
+            <a:schemeClr val="accent1"/>
+          </a:lnRef>
+          <a:fillRef idx="3">
+            <a:schemeClr val="accent1"/>
+          </a:fillRef>
+          <a:effectRef idx="2">
+            <a:schemeClr val="accent1"/>
+          </a:effectRef>
+          <a:fontRef idx="minor">
+            <a:schemeClr val="lt1"/>
+          </a:fontRef>
+        </p:style>
+        <p:txBody>
+          <a:bodyPr rtlCol="0" anchor="ctr" wrap="square"/>
+          <a:lstStyle/>
+          <a:p>
+            <a:pPr algn="ctr">
+              <a:defRPr sz="1100" b="1">
+                <a:solidFill>
+                  <a:srgbClr val="F8FAFC"/>
+                </a:solidFill>
+                <a:latin typeface="Arial"/>
+              </a:defRPr>
+            </a:pPr>
+            <a:r>
+              <a:t>4. GitOps</a:t>
+            </a:r>
+          </a:p>
+          <a:p>
+            <a:pPr algn="ctr">
+              <a:defRPr sz="900">
+                <a:solidFill>
+                  <a:srgbClr val="94A3B8"/>
+                </a:solidFill>
+                <a:latin typeface="Calibri"/>
+              </a:defRPr>
+            </a:pPr>
+            <a:r>
+              <a:t>ArgoCD Auto-Sync</a:t>
+            </a:r>
+          </a:p>
+        </p:txBody>
+      </p:sp>
+      <p:sp>
+        <p:nvSpPr>
+          <p:cNvPr id="12" name="Rounded Rectangle 11"/>
+          <p:cNvSpPr/>
+          <p:nvPr/>
+        </p:nvSpPr>
+        <p:spPr>
+          <a:xfrm>
+            <a:off x="7973568" y="1828800"/>
+            <a:ext cx="1645920" cy="777240"/>
+          </a:xfrm>
+          <a:prstGeom prst="roundRect">
+            <a:avLst/>
+          </a:prstGeom>
+          <a:solidFill>
+            <a:srgbClr val="0F172A"/>
+          </a:solidFill>
+          <a:ln w="12700">
+            <a:solidFill>
+              <a:srgbClr val="1E293B"/>
+            </a:solidFill>
+          </a:ln>
+        </p:spPr>
+        <p:style>
+          <a:lnRef idx="1">
+            <a:schemeClr val="accent1"/>
+          </a:lnRef>
+          <a:fillRef idx="3">
+            <a:schemeClr val="accent1"/>
+          </a:fillRef>
+          <a:effectRef idx="2">
+            <a:schemeClr val="accent1"/>
+          </a:effectRef>
+          <a:fontRef idx="minor">
+            <a:schemeClr val="lt1"/>
+          </a:fontRef>
+        </p:style>
+        <p:txBody>
+          <a:bodyPr rtlCol="0" anchor="ctr" wrap="square"/>
+          <a:lstStyle/>
+          <a:p>
+            <a:pPr algn="ctr">
+              <a:defRPr sz="1100" b="1">
+                <a:solidFill>
+                  <a:srgbClr val="F8FAFC"/>
+                </a:solidFill>
+                <a:latin typeface="Arial"/>
+              </a:defRPr>
+            </a:pPr>
+            <a:r>
+              <a:t>5. AWS EKS</a:t>
+            </a:r>
+          </a:p>
+          <a:p>
+            <a:pPr algn="ctr">
+              <a:defRPr sz="900">
+                <a:solidFill>
+                  <a:srgbClr val="94A3B8"/>
+                </a:solidFill>
+                <a:latin typeface="Calibri"/>
+              </a:defRPr>
+            </a:pPr>
+            <a:r>
+              <a:t>VPC + Ingress + HPA</a:t>
+            </a:r>
+          </a:p>
+        </p:txBody>
+      </p:sp>
+      <p:sp>
+        <p:nvSpPr>
+          <p:cNvPr id="13" name="Rounded Rectangle 12"/>
+          <p:cNvSpPr/>
+          <p:nvPr/>
+        </p:nvSpPr>
+        <p:spPr>
+          <a:xfrm>
+            <a:off x="9784080" y="1828800"/>
+            <a:ext cx="1645920" cy="777240"/>
+          </a:xfrm>
+          <a:prstGeom prst="roundRect">
+            <a:avLst/>
+          </a:prstGeom>
+          <a:solidFill>
+            <a:srgbClr val="0F172A"/>
+          </a:solidFill>
+          <a:ln w="12700">
+            <a:solidFill>
+              <a:srgbClr val="1E293B"/>
+            </a:solidFill>
+          </a:ln>
+        </p:spPr>
+        <p:style>
+          <a:lnRef idx="1">
+            <a:schemeClr val="accent1"/>
+          </a:lnRef>
+          <a:fillRef idx="3">
+            <a:schemeClr val="accent1"/>
+          </a:fillRef>
+          <a:effectRef idx="2">
+            <a:schemeClr val="accent1"/>
+          </a:effectRef>
+          <a:fontRef idx="minor">
+            <a:schemeClr val="lt1"/>
+          </a:fontRef>
+        </p:style>
+        <p:txBody>
+          <a:bodyPr rtlCol="0" anchor="ctr" wrap="square"/>
+          <a:lstStyle/>
+          <a:p>
+            <a:pPr algn="ctr">
+              <a:defRPr sz="1100" b="1">
+                <a:solidFill>
+                  <a:srgbClr val="F8FAFC"/>
+                </a:solidFill>
+                <a:latin typeface="Arial"/>
+              </a:defRPr>
+            </a:pPr>
+            <a:r>
+              <a:t>6. Monitoring</a:t>
+            </a:r>
+          </a:p>
+          <a:p>
+            <a:pPr algn="ctr">
+              <a:defRPr sz="900">
+                <a:solidFill>
+                  <a:srgbClr val="94A3B8"/>
+                </a:solidFill>
+                <a:latin typeface="Calibri"/>
+              </a:defRPr>
+            </a:pPr>
+            <a:r>
+              <a:t>Prometheus &amp; Grafana</a:t>
+            </a:r>
+          </a:p>
+        </p:txBody>
+      </p:sp>
+      <p:sp>
+        <p:nvSpPr>
+          <p:cNvPr id="14" name="Rounded Rectangle 13"/>
+          <p:cNvSpPr/>
+          <p:nvPr/>
+        </p:nvSpPr>
+        <p:spPr>
+          <a:xfrm>
+            <a:off x="731520" y="2834640"/>
+            <a:ext cx="5250027" cy="3474720"/>
+          </a:xfrm>
+          <a:prstGeom prst="roundRect">
+            <a:avLst/>
+          </a:prstGeom>
+          <a:solidFill>
+            <a:srgbClr val="0F172A"/>
+          </a:solidFill>
+          <a:ln w="12700">
+            <a:solidFill>
+              <a:srgbClr val="1E293B"/>
+            </a:solidFill>
+          </a:ln>
+        </p:spPr>
+        <p:style>
+          <a:lnRef idx="1">
+            <a:schemeClr val="accent1"/>
+          </a:lnRef>
+          <a:fillRef idx="3">
+            <a:schemeClr val="accent1"/>
+          </a:fillRef>
+          <a:effectRef idx="2">
+            <a:schemeClr val="accent1"/>
+          </a:effectRef>
+          <a:fontRef idx="minor">
+            <a:schemeClr val="lt1"/>
+          </a:fontRef>
+        </p:style>
+        <p:txBody>
           <a:bodyPr rtlCol="0" anchor="ctr"/>
           <a:lstStyle/>
           <a:p>
@@ -4526,14 +7116,14 @@
       </p:sp>
       <p:sp>
         <p:nvSpPr>
-          <p:cNvPr id="4" name="TextBox 3"/>
+          <p:cNvPr id="15" name="TextBox 14"/>
           <p:cNvSpPr txBox="1"/>
           <p:nvPr/>
         </p:nvSpPr>
         <p:spPr>
           <a:xfrm>
-            <a:off x="1097280" y="1005840"/>
-            <a:ext cx="10058400" cy="731520"/>
+            <a:off x="868680" y="2971800"/>
+            <a:ext cx="4975707" cy="411480"/>
           </a:xfrm>
           <a:prstGeom prst="rect">
             <a:avLst/>
@@ -4547,7 +7137,7 @@
           <a:lstStyle/>
           <a:p>
             <a:pPr>
-              <a:defRPr sz="2800" b="1">
+              <a:defRPr sz="1400" b="1">
                 <a:solidFill>
                   <a:srgbClr val="F59E0B"/>
                 </a:solidFill>
@@ -4555,21 +7145,21 @@
               </a:defRPr>
             </a:pPr>
             <a:r>
-              <a:t>End-to-End DevSecOps Architecture</a:t>
-            </a:r>
-          </a:p>
-        </p:txBody>
-      </p:sp>
-      <p:sp>
-        <p:nvSpPr>
-          <p:cNvPr id="5" name="TextBox 4"/>
+              <a:t>Pipeline Flow (DevSecOps Quality Gates)</a:t>
+            </a:r>
+          </a:p>
+        </p:txBody>
+      </p:sp>
+      <p:sp>
+        <p:nvSpPr>
+          <p:cNvPr id="16" name="TextBox 15"/>
           <p:cNvSpPr txBox="1"/>
           <p:nvPr/>
         </p:nvSpPr>
         <p:spPr>
           <a:xfrm>
-            <a:off x="1097280" y="1645920"/>
-            <a:ext cx="10058400" cy="548640"/>
+            <a:off x="868680" y="3429000"/>
+            <a:ext cx="4975707" cy="2743200"/>
           </a:xfrm>
           <a:prstGeom prst="rect">
             <a:avLst/>
@@ -4583,29 +7173,125 @@
           <a:lstStyle/>
           <a:p>
             <a:pPr>
-              <a:defRPr sz="1600">
-                <a:solidFill>
-                  <a:srgbClr val="10B981"/>
-                </a:solidFill>
-                <a:latin typeface="Arial"/>
-              </a:defRPr>
-            </a:pPr>
-            <a:r>
-              <a:t>From Local Code to Cloud-Native GitOps Continuous Delivery</a:t>
-            </a:r>
-          </a:p>
-        </p:txBody>
-      </p:sp>
-      <p:sp>
-        <p:nvSpPr>
-          <p:cNvPr id="6" name="TextBox 5"/>
+              <a:spcAft>
+                <a:spcPts val="800"/>
+              </a:spcAft>
+              <a:defRPr sz="1200">
+                <a:solidFill>
+                  <a:srgbClr val="F8FAFC"/>
+                </a:solidFill>
+                <a:latin typeface="Calibri"/>
+              </a:defRPr>
+            </a:pPr>
+            <a:r>
+              <a:t>• Pre-commit verification enforces Ruff formatting and Gitleaks secret scanning.</a:t>
+            </a:r>
+          </a:p>
+          <a:p>
+            <a:pPr>
+              <a:spcAft>
+                <a:spcPts val="800"/>
+              </a:spcAft>
+              <a:defRPr sz="1200">
+                <a:solidFill>
+                  <a:srgbClr val="F8FAFC"/>
+                </a:solidFill>
+                <a:latin typeface="Calibri"/>
+              </a:defRPr>
+            </a:pPr>
+            <a:r>
+              <a:t>• GitHub Actions executes automated gates: linting, pytest coverage (&gt;=80%), multi-stage builds.</a:t>
+            </a:r>
+          </a:p>
+          <a:p>
+            <a:pPr>
+              <a:spcAft>
+                <a:spcPts val="800"/>
+              </a:spcAft>
+              <a:defRPr sz="1200">
+                <a:solidFill>
+                  <a:srgbClr val="F8FAFC"/>
+                </a:solidFill>
+                <a:latin typeface="Calibri"/>
+              </a:defRPr>
+            </a:pPr>
+            <a:r>
+              <a:t>• Trivy blocks image publishing if any HIGH or CRITICAL CVEs are detected.</a:t>
+            </a:r>
+          </a:p>
+          <a:p>
+            <a:pPr>
+              <a:spcAft>
+                <a:spcPts val="800"/>
+              </a:spcAft>
+              <a:defRPr sz="1200">
+                <a:solidFill>
+                  <a:srgbClr val="F8FAFC"/>
+                </a:solidFill>
+                <a:latin typeface="Calibri"/>
+              </a:defRPr>
+            </a:pPr>
+            <a:r>
+              <a:t>• Approved container images are tagged with immutable Git commit SHAs—never :latest.</a:t>
+            </a:r>
+          </a:p>
+        </p:txBody>
+      </p:sp>
+      <p:sp>
+        <p:nvSpPr>
+          <p:cNvPr id="17" name="Rounded Rectangle 16"/>
+          <p:cNvSpPr/>
+          <p:nvPr/>
+        </p:nvSpPr>
+        <p:spPr>
+          <a:xfrm>
+            <a:off x="6210147" y="2834640"/>
+            <a:ext cx="5250027" cy="3474720"/>
+          </a:xfrm>
+          <a:prstGeom prst="roundRect">
+            <a:avLst/>
+          </a:prstGeom>
+          <a:solidFill>
+            <a:srgbClr val="0F172A"/>
+          </a:solidFill>
+          <a:ln w="12700">
+            <a:solidFill>
+              <a:srgbClr val="1E293B"/>
+            </a:solidFill>
+          </a:ln>
+        </p:spPr>
+        <p:style>
+          <a:lnRef idx="1">
+            <a:schemeClr val="accent1"/>
+          </a:lnRef>
+          <a:fillRef idx="3">
+            <a:schemeClr val="accent1"/>
+          </a:fillRef>
+          <a:effectRef idx="2">
+            <a:schemeClr val="accent1"/>
+          </a:effectRef>
+          <a:fontRef idx="minor">
+            <a:schemeClr val="lt1"/>
+          </a:fontRef>
+        </p:style>
+        <p:txBody>
+          <a:bodyPr rtlCol="0" anchor="ctr"/>
+          <a:lstStyle/>
+          <a:p>
+            <a:pPr algn="ctr"/>
+          </a:p>
+        </p:txBody>
+      </p:sp>
+      <p:sp>
+        <p:nvSpPr>
+          <p:cNvPr id="18" name="TextBox 17"/>
           <p:cNvSpPr txBox="1"/>
           <p:nvPr/>
         </p:nvSpPr>
         <p:spPr>
           <a:xfrm>
-            <a:off x="1097280" y="2377440"/>
-            <a:ext cx="10058400" cy="3474720"/>
+            <a:off x="6347307" y="2971800"/>
+            <a:ext cx="4975707" cy="411480"/>
           </a:xfrm>
           <a:prstGeom prst="rect">
             <a:avLst/>
@@ -4619,66 +7305,138 @@
           <a:lstStyle/>
           <a:p>
             <a:pPr>
+              <a:defRPr sz="1400" b="1">
+                <a:solidFill>
+                  <a:srgbClr val="10B981"/>
+                </a:solidFill>
+                <a:latin typeface="Arial"/>
+              </a:defRPr>
+            </a:pPr>
+            <a:r>
+              <a:t>Cloud Runtime (AWS EKS &amp; GitOps Delivery)</a:t>
+            </a:r>
+          </a:p>
+        </p:txBody>
+      </p:sp>
+      <p:sp>
+        <p:nvSpPr>
+          <p:cNvPr id="19" name="TextBox 18"/>
+          <p:cNvSpPr txBox="1"/>
+          <p:nvPr/>
+        </p:nvSpPr>
+        <p:spPr>
+          <a:xfrm>
+            <a:off x="6347307" y="3429000"/>
+            <a:ext cx="4975707" cy="2743200"/>
+          </a:xfrm>
+          <a:prstGeom prst="rect">
+            <a:avLst/>
+          </a:prstGeom>
+          <a:noFill/>
+        </p:spPr>
+        <p:txBody>
+          <a:bodyPr wrap="square">
+            <a:spAutoFit/>
+          </a:bodyPr>
+          <a:lstStyle/>
+          <a:p>
+            <a:pPr>
               <a:spcAft>
-                <a:spcPts val="1400"/>
+                <a:spcPts val="800"/>
               </a:spcAft>
-              <a:defRPr sz="1800">
-                <a:solidFill>
-                  <a:srgbClr val="FFFFFF"/>
+              <a:defRPr sz="1200">
+                <a:solidFill>
+                  <a:srgbClr val="F8FAFC"/>
                 </a:solidFill>
                 <a:latin typeface="Calibri"/>
               </a:defRPr>
             </a:pPr>
             <a:r>
-              <a:t>• Developer Flow: Feature branch -&gt; Pre-commit hooks (ruff, gitleaks, mypy).</a:t>
+              <a:t>• ArgoCD polls the repository, detects image updates, and auto-syncs manifests to the cluster.</a:t>
             </a:r>
           </a:p>
           <a:p>
             <a:pPr>
               <a:spcAft>
-                <a:spcPts val="1400"/>
+                <a:spcPts val="800"/>
               </a:spcAft>
-              <a:defRPr sz="1800">
-                <a:solidFill>
-                  <a:srgbClr val="FFFFFF"/>
+              <a:defRPr sz="1200">
+                <a:solidFill>
+                  <a:srgbClr val="F8FAFC"/>
                 </a:solidFill>
                 <a:latin typeface="Calibri"/>
               </a:defRPr>
             </a:pPr>
             <a:r>
-              <a:t>• CI/CD Pipeline: GitHub Actions validates lint -&gt; runs pytest (91% coverage) -&gt; builds multi-stage images -&gt; Trivy security gates.</a:t>
+              <a:t>• Traffic flows: AWS ALB / Ingress Controller -&gt; Frontend (:8080) -&gt; Backend (:8000) -&gt; PostgreSQL (:5432).</a:t>
             </a:r>
           </a:p>
           <a:p>
             <a:pPr>
               <a:spcAft>
-                <a:spcPts val="1400"/>
+                <a:spcPts val="800"/>
               </a:spcAft>
-              <a:defRPr sz="1800">
-                <a:solidFill>
-                  <a:srgbClr val="FFFFFF"/>
+              <a:defRPr sz="1200">
+                <a:solidFill>
+                  <a:srgbClr val="F8FAFC"/>
                 </a:solidFill>
                 <a:latin typeface="Calibri"/>
               </a:defRPr>
             </a:pPr>
             <a:r>
-              <a:t>• GitOps Continuous Deployment: ArgoCD monitors repository image tags and synchronizes state to AWS EKS automatically.</a:t>
+              <a:t>• Horizontal Pod Autoscaler (HPA) dynamically scales backend pods between 2 and 6 replicas based on CPU load.</a:t>
             </a:r>
           </a:p>
           <a:p>
             <a:pPr>
               <a:spcAft>
-                <a:spcPts val="1400"/>
+                <a:spcPts val="800"/>
               </a:spcAft>
-              <a:defRPr sz="1800">
-                <a:solidFill>
-                  <a:srgbClr val="FFFFFF"/>
+              <a:defRPr sz="1200">
+                <a:solidFill>
+                  <a:srgbClr val="F8FAFC"/>
                 </a:solidFill>
                 <a:latin typeface="Calibri"/>
               </a:defRPr>
             </a:pPr>
             <a:r>
-              <a:t>• Cloud Infrastructure: AWS VPC (3 AZs, public/private subnets) + Managed EKS Cluster provisioned via Terraform.</a:t>
+              <a:t>• Prometheus scrapes application metrics every 15s via dedicated ServiceMonitor.</a:t>
+            </a:r>
+          </a:p>
+        </p:txBody>
+      </p:sp>
+      <p:sp>
+        <p:nvSpPr>
+          <p:cNvPr id="20" name="TextBox 19"/>
+          <p:cNvSpPr txBox="1"/>
+          <p:nvPr/>
+        </p:nvSpPr>
+        <p:spPr>
+          <a:xfrm>
+            <a:off x="731520" y="6446520"/>
+            <a:ext cx="10728655" cy="274320"/>
+          </a:xfrm>
+          <a:prstGeom prst="rect">
+            <a:avLst/>
+          </a:prstGeom>
+          <a:noFill/>
+        </p:spPr>
+        <p:txBody>
+          <a:bodyPr wrap="none">
+            <a:spAutoFit/>
+          </a:bodyPr>
+          <a:lstStyle/>
+          <a:p>
+            <a:pPr>
+              <a:defRPr sz="900">
+                <a:solidFill>
+                  <a:srgbClr val="94A3B8"/>
+                </a:solidFill>
+                <a:latin typeface="Arial"/>
+              </a:defRPr>
+            </a:pPr>
+            <a:r>
+              <a:t>PodiumHQ DevSecOps Capstone • GitOps, Automated Verification &amp; Observability</a:t>
             </a:r>
           </a:p>
         </p:txBody>
@@ -4754,16 +7512,16 @@
         </p:nvSpPr>
         <p:spPr>
           <a:xfrm>
-            <a:off x="731520" y="731520"/>
-            <a:ext cx="10728655" cy="5394960"/>
+            <a:off x="731520" y="365760"/>
+            <a:ext cx="10728655" cy="54864"/>
           </a:xfrm>
           <a:prstGeom prst="rect">
             <a:avLst/>
           </a:prstGeom>
           <a:solidFill>
-            <a:srgbClr val="0F172A"/>
+            <a:srgbClr val="F59E0B"/>
           </a:solidFill>
-          <a:ln w="19050">
+          <a:ln>
             <a:solidFill>
               <a:srgbClr val="F59E0B"/>
             </a:solidFill>
@@ -4799,8 +7557,80 @@
         </p:nvSpPr>
         <p:spPr>
           <a:xfrm>
-            <a:off x="1097280" y="1005840"/>
-            <a:ext cx="10058400" cy="731520"/>
+            <a:off x="731520" y="502920"/>
+            <a:ext cx="5486400" cy="320040"/>
+          </a:xfrm>
+          <a:prstGeom prst="rect">
+            <a:avLst/>
+          </a:prstGeom>
+          <a:noFill/>
+        </p:spPr>
+        <p:txBody>
+          <a:bodyPr wrap="none">
+            <a:spAutoFit/>
+          </a:bodyPr>
+          <a:lstStyle/>
+          <a:p>
+            <a:pPr>
+              <a:defRPr sz="1000" b="1">
+                <a:solidFill>
+                  <a:srgbClr val="F59E0B"/>
+                </a:solidFill>
+                <a:latin typeface="Arial"/>
+              </a:defRPr>
+            </a:pPr>
+            <a:r>
+              <a:t>MODULE CHECKPOINT • CONTINUOUS DELIVERY PIPELINE</a:t>
+            </a:r>
+          </a:p>
+        </p:txBody>
+      </p:sp>
+      <p:sp>
+        <p:nvSpPr>
+          <p:cNvPr id="5" name="TextBox 4"/>
+          <p:cNvSpPr txBox="1"/>
+          <p:nvPr/>
+        </p:nvSpPr>
+        <p:spPr>
+          <a:xfrm>
+            <a:off x="8686800" y="502920"/>
+            <a:ext cx="2743200" cy="320040"/>
+          </a:xfrm>
+          <a:prstGeom prst="rect">
+            <a:avLst/>
+          </a:prstGeom>
+          <a:noFill/>
+        </p:spPr>
+        <p:txBody>
+          <a:bodyPr wrap="none">
+            <a:spAutoFit/>
+          </a:bodyPr>
+          <a:lstStyle/>
+          <a:p>
+            <a:pPr algn="r">
+              <a:defRPr sz="1000" b="1">
+                <a:solidFill>
+                  <a:srgbClr val="94A3B8"/>
+                </a:solidFill>
+                <a:latin typeface="Arial"/>
+              </a:defRPr>
+            </a:pPr>
+            <a:r>
+              <a:t>SLIDE 4 OF 10</a:t>
+            </a:r>
+          </a:p>
+        </p:txBody>
+      </p:sp>
+      <p:sp>
+        <p:nvSpPr>
+          <p:cNvPr id="6" name="TextBox 5"/>
+          <p:cNvSpPr txBox="1"/>
+          <p:nvPr/>
+        </p:nvSpPr>
+        <p:spPr>
+          <a:xfrm>
+            <a:off x="731520" y="777240"/>
+            <a:ext cx="10728655" cy="594360"/>
           </a:xfrm>
           <a:prstGeom prst="rect">
             <a:avLst/>
@@ -4814,29 +7644,29 @@
           <a:lstStyle/>
           <a:p>
             <a:pPr>
-              <a:defRPr sz="2800" b="1">
-                <a:solidFill>
-                  <a:srgbClr val="F59E0B"/>
+              <a:defRPr sz="2400" b="1">
+                <a:solidFill>
+                  <a:srgbClr val="F8FAFC"/>
                 </a:solidFill>
                 <a:latin typeface="Arial"/>
               </a:defRPr>
             </a:pPr>
             <a:r>
-              <a:t>Application Deep-Dive: PodiumHQ</a:t>
-            </a:r>
-          </a:p>
-        </p:txBody>
-      </p:sp>
-      <p:sp>
-        <p:nvSpPr>
-          <p:cNvPr id="5" name="TextBox 4"/>
+              <a:t>CI/CD Pipeline: GitHub Actions</a:t>
+            </a:r>
+          </a:p>
+        </p:txBody>
+      </p:sp>
+      <p:sp>
+        <p:nvSpPr>
+          <p:cNvPr id="7" name="TextBox 6"/>
           <p:cNvSpPr txBox="1"/>
           <p:nvPr/>
         </p:nvSpPr>
         <p:spPr>
           <a:xfrm>
-            <a:off x="1097280" y="1645920"/>
-            <a:ext cx="10058400" cy="548640"/>
+            <a:off x="731520" y="1325880"/>
+            <a:ext cx="10728655" cy="411480"/>
           </a:xfrm>
           <a:prstGeom prst="rect">
             <a:avLst/>
@@ -4850,7 +7680,7 @@
           <a:lstStyle/>
           <a:p>
             <a:pPr>
-              <a:defRPr sz="1600">
+              <a:defRPr sz="1300">
                 <a:solidFill>
                   <a:srgbClr val="10B981"/>
                 </a:solidFill>
@@ -4858,21 +7688,66 @@
               </a:defRPr>
             </a:pPr>
             <a:r>
-              <a:t>High-Performance Modern Web Architecture</a:t>
-            </a:r>
-          </a:p>
-        </p:txBody>
-      </p:sp>
-      <p:sp>
-        <p:nvSpPr>
-          <p:cNvPr id="6" name="TextBox 5"/>
+              <a:t>Automated Quality Gates, Vulnerability Blocking, and Immutable Tagging</a:t>
+            </a:r>
+          </a:p>
+        </p:txBody>
+      </p:sp>
+      <p:sp>
+        <p:nvSpPr>
+          <p:cNvPr id="8" name="Rounded Rectangle 7"/>
+          <p:cNvSpPr/>
+          <p:nvPr/>
+        </p:nvSpPr>
+        <p:spPr>
+          <a:xfrm>
+            <a:off x="731520" y="1874519"/>
+            <a:ext cx="3423818" cy="4434840"/>
+          </a:xfrm>
+          <a:prstGeom prst="roundRect">
+            <a:avLst/>
+          </a:prstGeom>
+          <a:solidFill>
+            <a:srgbClr val="0F172A"/>
+          </a:solidFill>
+          <a:ln w="12700">
+            <a:solidFill>
+              <a:srgbClr val="1E293B"/>
+            </a:solidFill>
+          </a:ln>
+        </p:spPr>
+        <p:style>
+          <a:lnRef idx="1">
+            <a:schemeClr val="accent1"/>
+          </a:lnRef>
+          <a:fillRef idx="3">
+            <a:schemeClr val="accent1"/>
+          </a:fillRef>
+          <a:effectRef idx="2">
+            <a:schemeClr val="accent1"/>
+          </a:effectRef>
+          <a:fontRef idx="minor">
+            <a:schemeClr val="lt1"/>
+          </a:fontRef>
+        </p:style>
+        <p:txBody>
+          <a:bodyPr rtlCol="0" anchor="ctr"/>
+          <a:lstStyle/>
+          <a:p>
+            <a:pPr algn="ctr"/>
+          </a:p>
+        </p:txBody>
+      </p:sp>
+      <p:sp>
+        <p:nvSpPr>
+          <p:cNvPr id="9" name="TextBox 8"/>
           <p:cNvSpPr txBox="1"/>
           <p:nvPr/>
         </p:nvSpPr>
         <p:spPr>
           <a:xfrm>
-            <a:off x="1097280" y="2377440"/>
-            <a:ext cx="10058400" cy="3474720"/>
+            <a:off x="868680" y="2011679"/>
+            <a:ext cx="3149498" cy="411480"/>
           </a:xfrm>
           <a:prstGeom prst="rect">
             <a:avLst/>
@@ -4886,66 +7761,426 @@
           <a:lstStyle/>
           <a:p>
             <a:pPr>
+              <a:defRPr sz="1400" b="1">
+                <a:solidFill>
+                  <a:srgbClr val="38BDF8"/>
+                </a:solidFill>
+                <a:latin typeface="Arial"/>
+              </a:defRPr>
+            </a:pPr>
+            <a:r>
+              <a:t>Gate 1: Code Quality &amp; Static Analysis</a:t>
+            </a:r>
+          </a:p>
+        </p:txBody>
+      </p:sp>
+      <p:sp>
+        <p:nvSpPr>
+          <p:cNvPr id="10" name="TextBox 9"/>
+          <p:cNvSpPr txBox="1"/>
+          <p:nvPr/>
+        </p:nvSpPr>
+        <p:spPr>
+          <a:xfrm>
+            <a:off x="868680" y="2468879"/>
+            <a:ext cx="3149498" cy="3703320"/>
+          </a:xfrm>
+          <a:prstGeom prst="rect">
+            <a:avLst/>
+          </a:prstGeom>
+          <a:noFill/>
+        </p:spPr>
+        <p:txBody>
+          <a:bodyPr wrap="square">
+            <a:spAutoFit/>
+          </a:bodyPr>
+          <a:lstStyle/>
+          <a:p>
+            <a:pPr>
               <a:spcAft>
-                <a:spcPts val="1400"/>
+                <a:spcPts val="800"/>
               </a:spcAft>
-              <a:defRPr sz="1800">
-                <a:solidFill>
-                  <a:srgbClr val="FFFFFF"/>
+              <a:defRPr sz="1200">
+                <a:solidFill>
+                  <a:srgbClr val="F8FAFC"/>
                 </a:solidFill>
                 <a:latin typeface="Calibri"/>
               </a:defRPr>
             </a:pPr>
             <a:r>
-              <a:t>• Frontend: React 18 SPA built with Vite, Tailwind CSS, custom Obsidian &amp; Solar Gold visual palette.</a:t>
+              <a:t>• Ruff: Ultra-fast linting and code formatting checks across all backend Python modules.</a:t>
             </a:r>
           </a:p>
           <a:p>
             <a:pPr>
               <a:spcAft>
-                <a:spcPts val="1400"/>
+                <a:spcPts val="800"/>
               </a:spcAft>
-              <a:defRPr sz="1800">
-                <a:solidFill>
-                  <a:srgbClr val="FFFFFF"/>
+              <a:defRPr sz="1200">
+                <a:solidFill>
+                  <a:srgbClr val="F8FAFC"/>
                 </a:solidFill>
                 <a:latin typeface="Calibri"/>
               </a:defRPr>
             </a:pPr>
             <a:r>
-              <a:t>• Backend: FastAPI async ASGI service running Python 3.12 with SQLAlchemy 2.0 and Alembic database migrations.</a:t>
+              <a:t>• Mypy: Static type checking ensuring Pydantic and FastAPI schema integrity.</a:t>
             </a:r>
           </a:p>
           <a:p>
             <a:pPr>
               <a:spcAft>
-                <a:spcPts val="1400"/>
+                <a:spcPts val="800"/>
               </a:spcAft>
-              <a:defRPr sz="1800">
-                <a:solidFill>
-                  <a:srgbClr val="FFFFFF"/>
+              <a:defRPr sz="1200">
+                <a:solidFill>
+                  <a:srgbClr val="F8FAFC"/>
                 </a:solidFill>
                 <a:latin typeface="Calibri"/>
               </a:defRPr>
             </a:pPr>
             <a:r>
-              <a:t>• Database: PostgreSQL 16 with indexed relational constraints and connection pooling via Psycopg 3.</a:t>
-            </a:r>
-          </a:p>
+              <a:t>• ESLint: Static code analysis ensuring frontend React components follow strict standards.</a:t>
+            </a:r>
+          </a:p>
+        </p:txBody>
+      </p:sp>
+      <p:sp>
+        <p:nvSpPr>
+          <p:cNvPr id="11" name="Rounded Rectangle 10"/>
+          <p:cNvSpPr/>
+          <p:nvPr/>
+        </p:nvSpPr>
+        <p:spPr>
+          <a:xfrm>
+            <a:off x="4383938" y="1874519"/>
+            <a:ext cx="3423818" cy="4434840"/>
+          </a:xfrm>
+          <a:prstGeom prst="roundRect">
+            <a:avLst/>
+          </a:prstGeom>
+          <a:solidFill>
+            <a:srgbClr val="0F172A"/>
+          </a:solidFill>
+          <a:ln w="12700">
+            <a:solidFill>
+              <a:srgbClr val="1E293B"/>
+            </a:solidFill>
+          </a:ln>
+        </p:spPr>
+        <p:style>
+          <a:lnRef idx="1">
+            <a:schemeClr val="accent1"/>
+          </a:lnRef>
+          <a:fillRef idx="3">
+            <a:schemeClr val="accent1"/>
+          </a:fillRef>
+          <a:effectRef idx="2">
+            <a:schemeClr val="accent1"/>
+          </a:effectRef>
+          <a:fontRef idx="minor">
+            <a:schemeClr val="lt1"/>
+          </a:fontRef>
+        </p:style>
+        <p:txBody>
+          <a:bodyPr rtlCol="0" anchor="ctr"/>
+          <a:lstStyle/>
+          <a:p>
+            <a:pPr algn="ctr"/>
+          </a:p>
+        </p:txBody>
+      </p:sp>
+      <p:sp>
+        <p:nvSpPr>
+          <p:cNvPr id="12" name="TextBox 11"/>
+          <p:cNvSpPr txBox="1"/>
+          <p:nvPr/>
+        </p:nvSpPr>
+        <p:spPr>
+          <a:xfrm>
+            <a:off x="4521098" y="2011679"/>
+            <a:ext cx="3149498" cy="411480"/>
+          </a:xfrm>
+          <a:prstGeom prst="rect">
+            <a:avLst/>
+          </a:prstGeom>
+          <a:noFill/>
+        </p:spPr>
+        <p:txBody>
+          <a:bodyPr wrap="square">
+            <a:spAutoFit/>
+          </a:bodyPr>
+          <a:lstStyle/>
+          <a:p>
+            <a:pPr>
+              <a:defRPr sz="1400" b="1">
+                <a:solidFill>
+                  <a:srgbClr val="10B981"/>
+                </a:solidFill>
+                <a:latin typeface="Arial"/>
+              </a:defRPr>
+            </a:pPr>
+            <a:r>
+              <a:t>Gate 2: Automated Testing &amp; Coverage Gate</a:t>
+            </a:r>
+          </a:p>
+        </p:txBody>
+      </p:sp>
+      <p:sp>
+        <p:nvSpPr>
+          <p:cNvPr id="13" name="TextBox 12"/>
+          <p:cNvSpPr txBox="1"/>
+          <p:nvPr/>
+        </p:nvSpPr>
+        <p:spPr>
+          <a:xfrm>
+            <a:off x="4521098" y="2468879"/>
+            <a:ext cx="3149498" cy="3703320"/>
+          </a:xfrm>
+          <a:prstGeom prst="rect">
+            <a:avLst/>
+          </a:prstGeom>
+          <a:noFill/>
+        </p:spPr>
+        <p:txBody>
+          <a:bodyPr wrap="square">
+            <a:spAutoFit/>
+          </a:bodyPr>
+          <a:lstStyle/>
           <a:p>
             <a:pPr>
               <a:spcAft>
-                <a:spcPts val="1400"/>
+                <a:spcPts val="800"/>
               </a:spcAft>
-              <a:defRPr sz="1800">
-                <a:solidFill>
-                  <a:srgbClr val="FFFFFF"/>
+              <a:defRPr sz="1200">
+                <a:solidFill>
+                  <a:srgbClr val="F8FAFC"/>
                 </a:solidFill>
                 <a:latin typeface="Calibri"/>
               </a:defRPr>
             </a:pPr>
             <a:r>
-              <a:t>• Observability Endpoints: Standardized /health (liveness), /ready (database ping), and /metrics (Prometheus instrumentation).</a:t>
+              <a:t>• Pytest: Executes 31 unit and integration tests against in-memory SQLite database.</a:t>
+            </a:r>
+          </a:p>
+          <a:p>
+            <a:pPr>
+              <a:spcAft>
+                <a:spcPts val="800"/>
+              </a:spcAft>
+              <a:defRPr sz="1200">
+                <a:solidFill>
+                  <a:srgbClr val="F8FAFC"/>
+                </a:solidFill>
+                <a:latin typeface="Calibri"/>
+              </a:defRPr>
+            </a:pPr>
+            <a:r>
+              <a:t>• Coverage Gate: Pytest-cov enforces a hard 80% coverage threshold (currently achieving 91%).</a:t>
+            </a:r>
+          </a:p>
+          <a:p>
+            <a:pPr>
+              <a:spcAft>
+                <a:spcPts val="800"/>
+              </a:spcAft>
+              <a:defRPr sz="1200">
+                <a:solidFill>
+                  <a:srgbClr val="F8FAFC"/>
+                </a:solidFill>
+                <a:latin typeface="Calibri"/>
+              </a:defRPr>
+            </a:pPr>
+            <a:r>
+              <a:t>• Pipeline Failure: Any failing test or coverage drop below 80% instantly terminates the workflow.</a:t>
+            </a:r>
+          </a:p>
+        </p:txBody>
+      </p:sp>
+      <p:sp>
+        <p:nvSpPr>
+          <p:cNvPr id="14" name="Rounded Rectangle 13"/>
+          <p:cNvSpPr/>
+          <p:nvPr/>
+        </p:nvSpPr>
+        <p:spPr>
+          <a:xfrm>
+            <a:off x="8036356" y="1874519"/>
+            <a:ext cx="3423818" cy="4434840"/>
+          </a:xfrm>
+          <a:prstGeom prst="roundRect">
+            <a:avLst/>
+          </a:prstGeom>
+          <a:solidFill>
+            <a:srgbClr val="0F172A"/>
+          </a:solidFill>
+          <a:ln w="12700">
+            <a:solidFill>
+              <a:srgbClr val="1E293B"/>
+            </a:solidFill>
+          </a:ln>
+        </p:spPr>
+        <p:style>
+          <a:lnRef idx="1">
+            <a:schemeClr val="accent1"/>
+          </a:lnRef>
+          <a:fillRef idx="3">
+            <a:schemeClr val="accent1"/>
+          </a:fillRef>
+          <a:effectRef idx="2">
+            <a:schemeClr val="accent1"/>
+          </a:effectRef>
+          <a:fontRef idx="minor">
+            <a:schemeClr val="lt1"/>
+          </a:fontRef>
+        </p:style>
+        <p:txBody>
+          <a:bodyPr rtlCol="0" anchor="ctr"/>
+          <a:lstStyle/>
+          <a:p>
+            <a:pPr algn="ctr"/>
+          </a:p>
+        </p:txBody>
+      </p:sp>
+      <p:sp>
+        <p:nvSpPr>
+          <p:cNvPr id="15" name="TextBox 14"/>
+          <p:cNvSpPr txBox="1"/>
+          <p:nvPr/>
+        </p:nvSpPr>
+        <p:spPr>
+          <a:xfrm>
+            <a:off x="8173516" y="2011679"/>
+            <a:ext cx="3149498" cy="411480"/>
+          </a:xfrm>
+          <a:prstGeom prst="rect">
+            <a:avLst/>
+          </a:prstGeom>
+          <a:noFill/>
+        </p:spPr>
+        <p:txBody>
+          <a:bodyPr wrap="square">
+            <a:spAutoFit/>
+          </a:bodyPr>
+          <a:lstStyle/>
+          <a:p>
+            <a:pPr>
+              <a:defRPr sz="1400" b="1">
+                <a:solidFill>
+                  <a:srgbClr val="F59E0B"/>
+                </a:solidFill>
+                <a:latin typeface="Arial"/>
+              </a:defRPr>
+            </a:pPr>
+            <a:r>
+              <a:t>Gate 3: Hardened Build &amp; Trivy Vulnerability Scan</a:t>
+            </a:r>
+          </a:p>
+        </p:txBody>
+      </p:sp>
+      <p:sp>
+        <p:nvSpPr>
+          <p:cNvPr id="16" name="TextBox 15"/>
+          <p:cNvSpPr txBox="1"/>
+          <p:nvPr/>
+        </p:nvSpPr>
+        <p:spPr>
+          <a:xfrm>
+            <a:off x="8173516" y="2468879"/>
+            <a:ext cx="3149498" cy="3703320"/>
+          </a:xfrm>
+          <a:prstGeom prst="rect">
+            <a:avLst/>
+          </a:prstGeom>
+          <a:noFill/>
+        </p:spPr>
+        <p:txBody>
+          <a:bodyPr wrap="square">
+            <a:spAutoFit/>
+          </a:bodyPr>
+          <a:lstStyle/>
+          <a:p>
+            <a:pPr>
+              <a:spcAft>
+                <a:spcPts val="800"/>
+              </a:spcAft>
+              <a:defRPr sz="1200">
+                <a:solidFill>
+                  <a:srgbClr val="F8FAFC"/>
+                </a:solidFill>
+                <a:latin typeface="Calibri"/>
+              </a:defRPr>
+            </a:pPr>
+            <a:r>
+              <a:t>• Docker Buildx: Multi-stage builds compiling frontend assets and backend dependencies.</a:t>
+            </a:r>
+          </a:p>
+          <a:p>
+            <a:pPr>
+              <a:spcAft>
+                <a:spcPts val="800"/>
+              </a:spcAft>
+              <a:defRPr sz="1200">
+                <a:solidFill>
+                  <a:srgbClr val="F8FAFC"/>
+                </a:solidFill>
+                <a:latin typeface="Calibri"/>
+              </a:defRPr>
+            </a:pPr>
+            <a:r>
+              <a:t>• Trivy Scanner: Scans root filesystem and built images with exit-code: 1 on HIGH/CRITICAL CVEs.</a:t>
+            </a:r>
+          </a:p>
+          <a:p>
+            <a:pPr>
+              <a:spcAft>
+                <a:spcPts val="800"/>
+              </a:spcAft>
+              <a:defRPr sz="1200">
+                <a:solidFill>
+                  <a:srgbClr val="F8FAFC"/>
+                </a:solidFill>
+                <a:latin typeface="Calibri"/>
+              </a:defRPr>
+            </a:pPr>
+            <a:r>
+              <a:t>• GHCR Publishing: Immutable tags using github.sha (e.g. ghcr.io/user/podiumhq-backend:f990516).</a:t>
+            </a:r>
+          </a:p>
+        </p:txBody>
+      </p:sp>
+      <p:sp>
+        <p:nvSpPr>
+          <p:cNvPr id="17" name="TextBox 16"/>
+          <p:cNvSpPr txBox="1"/>
+          <p:nvPr/>
+        </p:nvSpPr>
+        <p:spPr>
+          <a:xfrm>
+            <a:off x="731520" y="6446520"/>
+            <a:ext cx="10728655" cy="274320"/>
+          </a:xfrm>
+          <a:prstGeom prst="rect">
+            <a:avLst/>
+          </a:prstGeom>
+          <a:noFill/>
+        </p:spPr>
+        <p:txBody>
+          <a:bodyPr wrap="none">
+            <a:spAutoFit/>
+          </a:bodyPr>
+          <a:lstStyle/>
+          <a:p>
+            <a:pPr>
+              <a:defRPr sz="900">
+                <a:solidFill>
+                  <a:srgbClr val="94A3B8"/>
+                </a:solidFill>
+                <a:latin typeface="Arial"/>
+              </a:defRPr>
+            </a:pPr>
+            <a:r>
+              <a:t>PodiumHQ DevSecOps Capstone • GitOps, Automated Verification &amp; Observability</a:t>
             </a:r>
           </a:p>
         </p:txBody>
@@ -5021,16 +8256,16 @@
         </p:nvSpPr>
         <p:spPr>
           <a:xfrm>
-            <a:off x="731520" y="731520"/>
-            <a:ext cx="10728655" cy="5394960"/>
+            <a:off x="731520" y="365760"/>
+            <a:ext cx="10728655" cy="54864"/>
           </a:xfrm>
           <a:prstGeom prst="rect">
             <a:avLst/>
           </a:prstGeom>
           <a:solidFill>
-            <a:srgbClr val="0F172A"/>
+            <a:srgbClr val="F59E0B"/>
           </a:solidFill>
-          <a:ln w="19050">
+          <a:ln>
             <a:solidFill>
               <a:srgbClr val="F59E0B"/>
             </a:solidFill>
@@ -5066,8 +8301,80 @@
         </p:nvSpPr>
         <p:spPr>
           <a:xfrm>
-            <a:off x="1097280" y="1005840"/>
-            <a:ext cx="10058400" cy="731520"/>
+            <a:off x="731520" y="502920"/>
+            <a:ext cx="5486400" cy="320040"/>
+          </a:xfrm>
+          <a:prstGeom prst="rect">
+            <a:avLst/>
+          </a:prstGeom>
+          <a:noFill/>
+        </p:spPr>
+        <p:txBody>
+          <a:bodyPr wrap="none">
+            <a:spAutoFit/>
+          </a:bodyPr>
+          <a:lstStyle/>
+          <a:p>
+            <a:pPr>
+              <a:defRPr sz="1000" b="1">
+                <a:solidFill>
+                  <a:srgbClr val="F59E0B"/>
+                </a:solidFill>
+                <a:latin typeface="Arial"/>
+              </a:defRPr>
+            </a:pPr>
+            <a:r>
+              <a:t>MODULE CHECKPOINT • TERRAFORM IAC SPECIFICATION</a:t>
+            </a:r>
+          </a:p>
+        </p:txBody>
+      </p:sp>
+      <p:sp>
+        <p:nvSpPr>
+          <p:cNvPr id="5" name="TextBox 4"/>
+          <p:cNvSpPr txBox="1"/>
+          <p:nvPr/>
+        </p:nvSpPr>
+        <p:spPr>
+          <a:xfrm>
+            <a:off x="8686800" y="502920"/>
+            <a:ext cx="2743200" cy="320040"/>
+          </a:xfrm>
+          <a:prstGeom prst="rect">
+            <a:avLst/>
+          </a:prstGeom>
+          <a:noFill/>
+        </p:spPr>
+        <p:txBody>
+          <a:bodyPr wrap="none">
+            <a:spAutoFit/>
+          </a:bodyPr>
+          <a:lstStyle/>
+          <a:p>
+            <a:pPr algn="r">
+              <a:defRPr sz="1000" b="1">
+                <a:solidFill>
+                  <a:srgbClr val="94A3B8"/>
+                </a:solidFill>
+                <a:latin typeface="Arial"/>
+              </a:defRPr>
+            </a:pPr>
+            <a:r>
+              <a:t>SLIDE 5 OF 10</a:t>
+            </a:r>
+          </a:p>
+        </p:txBody>
+      </p:sp>
+      <p:sp>
+        <p:nvSpPr>
+          <p:cNvPr id="6" name="TextBox 5"/>
+          <p:cNvSpPr txBox="1"/>
+          <p:nvPr/>
+        </p:nvSpPr>
+        <p:spPr>
+          <a:xfrm>
+            <a:off x="731520" y="777240"/>
+            <a:ext cx="10728655" cy="594360"/>
           </a:xfrm>
           <a:prstGeom prst="rect">
             <a:avLst/>
@@ -5081,29 +8388,29 @@
           <a:lstStyle/>
           <a:p>
             <a:pPr>
-              <a:defRPr sz="2800" b="1">
-                <a:solidFill>
-                  <a:srgbClr val="F59E0B"/>
+              <a:defRPr sz="2400" b="1">
+                <a:solidFill>
+                  <a:srgbClr val="F8FAFC"/>
                 </a:solidFill>
                 <a:latin typeface="Arial"/>
               </a:defRPr>
             </a:pPr>
             <a:r>
-              <a:t>Test Automation &amp; Quality Assurance</a:t>
-            </a:r>
-          </a:p>
-        </p:txBody>
-      </p:sp>
-      <p:sp>
-        <p:nvSpPr>
-          <p:cNvPr id="5" name="TextBox 4"/>
+              <a:t>Infrastructure as Code: Terraform on AWS</a:t>
+            </a:r>
+          </a:p>
+        </p:txBody>
+      </p:sp>
+      <p:sp>
+        <p:nvSpPr>
+          <p:cNvPr id="7" name="TextBox 6"/>
           <p:cNvSpPr txBox="1"/>
           <p:nvPr/>
         </p:nvSpPr>
         <p:spPr>
           <a:xfrm>
-            <a:off x="1097280" y="1645920"/>
-            <a:ext cx="10058400" cy="548640"/>
+            <a:off x="731520" y="1325880"/>
+            <a:ext cx="10728655" cy="411480"/>
           </a:xfrm>
           <a:prstGeom prst="rect">
             <a:avLst/>
@@ -5117,7 +8424,7 @@
           <a:lstStyle/>
           <a:p>
             <a:pPr>
-              <a:defRPr sz="1600">
+              <a:defRPr sz="1300">
                 <a:solidFill>
                   <a:srgbClr val="10B981"/>
                 </a:solidFill>
@@ -5125,21 +8432,66 @@
               </a:defRPr>
             </a:pPr>
             <a:r>
-              <a:t>Exceeding the 80% Coverage Rubric Requirement with Isolated Fixtures</a:t>
-            </a:r>
-          </a:p>
-        </p:txBody>
-      </p:sp>
-      <p:sp>
-        <p:nvSpPr>
-          <p:cNvPr id="6" name="TextBox 5"/>
+              <a:t>Modular, Reproducible Cloud Infrastructure Provisioning across 3 AZs</a:t>
+            </a:r>
+          </a:p>
+        </p:txBody>
+      </p:sp>
+      <p:sp>
+        <p:nvSpPr>
+          <p:cNvPr id="8" name="Rounded Rectangle 7"/>
+          <p:cNvSpPr/>
+          <p:nvPr/>
+        </p:nvSpPr>
+        <p:spPr>
+          <a:xfrm>
+            <a:off x="731520" y="1874519"/>
+            <a:ext cx="3423818" cy="4434840"/>
+          </a:xfrm>
+          <a:prstGeom prst="roundRect">
+            <a:avLst/>
+          </a:prstGeom>
+          <a:solidFill>
+            <a:srgbClr val="0F172A"/>
+          </a:solidFill>
+          <a:ln w="12700">
+            <a:solidFill>
+              <a:srgbClr val="1E293B"/>
+            </a:solidFill>
+          </a:ln>
+        </p:spPr>
+        <p:style>
+          <a:lnRef idx="1">
+            <a:schemeClr val="accent1"/>
+          </a:lnRef>
+          <a:fillRef idx="3">
+            <a:schemeClr val="accent1"/>
+          </a:fillRef>
+          <a:effectRef idx="2">
+            <a:schemeClr val="accent1"/>
+          </a:effectRef>
+          <a:fontRef idx="minor">
+            <a:schemeClr val="lt1"/>
+          </a:fontRef>
+        </p:style>
+        <p:txBody>
+          <a:bodyPr rtlCol="0" anchor="ctr"/>
+          <a:lstStyle/>
+          <a:p>
+            <a:pPr algn="ctr"/>
+          </a:p>
+        </p:txBody>
+      </p:sp>
+      <p:sp>
+        <p:nvSpPr>
+          <p:cNvPr id="9" name="TextBox 8"/>
           <p:cNvSpPr txBox="1"/>
           <p:nvPr/>
         </p:nvSpPr>
         <p:spPr>
           <a:xfrm>
-            <a:off x="1097280" y="2377440"/>
-            <a:ext cx="10058400" cy="3474720"/>
+            <a:off x="868680" y="2011679"/>
+            <a:ext cx="3149498" cy="411480"/>
           </a:xfrm>
           <a:prstGeom prst="rect">
             <a:avLst/>
@@ -5153,66 +8505,458 @@
           <a:lstStyle/>
           <a:p>
             <a:pPr>
+              <a:defRPr sz="1400" b="1">
+                <a:solidFill>
+                  <a:srgbClr val="38BDF8"/>
+                </a:solidFill>
+                <a:latin typeface="Arial"/>
+              </a:defRPr>
+            </a:pPr>
+            <a:r>
+              <a:t>VPC &amp; Network Architecture (vpc.tf)</a:t>
+            </a:r>
+          </a:p>
+        </p:txBody>
+      </p:sp>
+      <p:sp>
+        <p:nvSpPr>
+          <p:cNvPr id="10" name="TextBox 9"/>
+          <p:cNvSpPr txBox="1"/>
+          <p:nvPr/>
+        </p:nvSpPr>
+        <p:spPr>
+          <a:xfrm>
+            <a:off x="868680" y="2468879"/>
+            <a:ext cx="3149498" cy="3703320"/>
+          </a:xfrm>
+          <a:prstGeom prst="rect">
+            <a:avLst/>
+          </a:prstGeom>
+          <a:noFill/>
+        </p:spPr>
+        <p:txBody>
+          <a:bodyPr wrap="square">
+            <a:spAutoFit/>
+          </a:bodyPr>
+          <a:lstStyle/>
+          <a:p>
+            <a:pPr>
               <a:spcAft>
-                <a:spcPts val="1400"/>
+                <a:spcPts val="800"/>
               </a:spcAft>
-              <a:defRPr sz="1800">
-                <a:solidFill>
-                  <a:srgbClr val="FFFFFF"/>
+              <a:defRPr sz="1200">
+                <a:solidFill>
+                  <a:srgbClr val="F8FAFC"/>
                 </a:solidFill>
                 <a:latin typeface="Calibri"/>
               </a:defRPr>
             </a:pPr>
             <a:r>
-              <a:t>• Pytest Suite: 31 comprehensive unit and integration tests passing in under 1.5 seconds.</a:t>
+              <a:t>• Region: AWS ap-south-1 (Mumbai) across 3 Availability Zones for fault tolerance.</a:t>
             </a:r>
           </a:p>
           <a:p>
             <a:pPr>
               <a:spcAft>
-                <a:spcPts val="1400"/>
+                <a:spcPts val="800"/>
               </a:spcAft>
-              <a:defRPr sz="1800">
-                <a:solidFill>
-                  <a:srgbClr val="FFFFFF"/>
+              <a:defRPr sz="1200">
+                <a:solidFill>
+                  <a:srgbClr val="F8FAFC"/>
                 </a:solidFill>
                 <a:latin typeface="Calibri"/>
               </a:defRPr>
             </a:pPr>
             <a:r>
-              <a:t>• Test Coverage: 91% code coverage across all routers, services, models, and schemas.</a:t>
+              <a:t>• Subnet Layout: 3 public subnets (for Ingress/ALBs) and 3 private subnets (for EKS worker nodes).</a:t>
             </a:r>
           </a:p>
           <a:p>
             <a:pPr>
               <a:spcAft>
-                <a:spcPts val="1400"/>
+                <a:spcPts val="800"/>
               </a:spcAft>
-              <a:defRPr sz="1800">
-                <a:solidFill>
-                  <a:srgbClr val="FFFFFF"/>
+              <a:defRPr sz="1200">
+                <a:solidFill>
+                  <a:srgbClr val="F8FAFC"/>
                 </a:solidFill>
                 <a:latin typeface="Calibri"/>
               </a:defRPr>
             </a:pPr>
             <a:r>
-              <a:t>• Zero Flakiness: In-memory SQLite with StaticPool ensures 100% test isolation without touching production databases.</a:t>
+              <a:t>• Egress: Dedicated NAT Gateway in public subnet routing private outbound internet traffic.</a:t>
             </a:r>
           </a:p>
           <a:p>
             <a:pPr>
               <a:spcAft>
-                <a:spcPts val="1400"/>
+                <a:spcPts val="800"/>
               </a:spcAft>
-              <a:defRPr sz="1800">
-                <a:solidFill>
-                  <a:srgbClr val="FFFFFF"/>
+              <a:defRPr sz="1200">
+                <a:solidFill>
+                  <a:srgbClr val="F8FAFC"/>
                 </a:solidFill>
                 <a:latin typeface="Calibri"/>
               </a:defRPr>
             </a:pPr>
             <a:r>
-              <a:t>• Full Validation: Tested team lifecycle transitions, duplicate prevention, out-of-bounds score rejection, and leaderboard ranking.</a:t>
+              <a:t>• Kubernetes Tags: Strict kubernetes.io/role/elb and internal-elb tags for AWS Load Balancer Controller.</a:t>
+            </a:r>
+          </a:p>
+        </p:txBody>
+      </p:sp>
+      <p:sp>
+        <p:nvSpPr>
+          <p:cNvPr id="11" name="Rounded Rectangle 10"/>
+          <p:cNvSpPr/>
+          <p:nvPr/>
+        </p:nvSpPr>
+        <p:spPr>
+          <a:xfrm>
+            <a:off x="4383938" y="1874519"/>
+            <a:ext cx="3423818" cy="4434840"/>
+          </a:xfrm>
+          <a:prstGeom prst="roundRect">
+            <a:avLst/>
+          </a:prstGeom>
+          <a:solidFill>
+            <a:srgbClr val="0F172A"/>
+          </a:solidFill>
+          <a:ln w="12700">
+            <a:solidFill>
+              <a:srgbClr val="1E293B"/>
+            </a:solidFill>
+          </a:ln>
+        </p:spPr>
+        <p:style>
+          <a:lnRef idx="1">
+            <a:schemeClr val="accent1"/>
+          </a:lnRef>
+          <a:fillRef idx="3">
+            <a:schemeClr val="accent1"/>
+          </a:fillRef>
+          <a:effectRef idx="2">
+            <a:schemeClr val="accent1"/>
+          </a:effectRef>
+          <a:fontRef idx="minor">
+            <a:schemeClr val="lt1"/>
+          </a:fontRef>
+        </p:style>
+        <p:txBody>
+          <a:bodyPr rtlCol="0" anchor="ctr"/>
+          <a:lstStyle/>
+          <a:p>
+            <a:pPr algn="ctr"/>
+          </a:p>
+        </p:txBody>
+      </p:sp>
+      <p:sp>
+        <p:nvSpPr>
+          <p:cNvPr id="12" name="TextBox 11"/>
+          <p:cNvSpPr txBox="1"/>
+          <p:nvPr/>
+        </p:nvSpPr>
+        <p:spPr>
+          <a:xfrm>
+            <a:off x="4521098" y="2011679"/>
+            <a:ext cx="3149498" cy="411480"/>
+          </a:xfrm>
+          <a:prstGeom prst="rect">
+            <a:avLst/>
+          </a:prstGeom>
+          <a:noFill/>
+        </p:spPr>
+        <p:txBody>
+          <a:bodyPr wrap="square">
+            <a:spAutoFit/>
+          </a:bodyPr>
+          <a:lstStyle/>
+          <a:p>
+            <a:pPr>
+              <a:defRPr sz="1400" b="1">
+                <a:solidFill>
+                  <a:srgbClr val="10B981"/>
+                </a:solidFill>
+                <a:latin typeface="Arial"/>
+              </a:defRPr>
+            </a:pPr>
+            <a:r>
+              <a:t>EKS Cluster &amp; Node Groups (eks.tf)</a:t>
+            </a:r>
+          </a:p>
+        </p:txBody>
+      </p:sp>
+      <p:sp>
+        <p:nvSpPr>
+          <p:cNvPr id="13" name="TextBox 12"/>
+          <p:cNvSpPr txBox="1"/>
+          <p:nvPr/>
+        </p:nvSpPr>
+        <p:spPr>
+          <a:xfrm>
+            <a:off x="4521098" y="2468879"/>
+            <a:ext cx="3149498" cy="3703320"/>
+          </a:xfrm>
+          <a:prstGeom prst="rect">
+            <a:avLst/>
+          </a:prstGeom>
+          <a:noFill/>
+        </p:spPr>
+        <p:txBody>
+          <a:bodyPr wrap="square">
+            <a:spAutoFit/>
+          </a:bodyPr>
+          <a:lstStyle/>
+          <a:p>
+            <a:pPr>
+              <a:spcAft>
+                <a:spcPts val="800"/>
+              </a:spcAft>
+              <a:defRPr sz="1200">
+                <a:solidFill>
+                  <a:srgbClr val="F8FAFC"/>
+                </a:solidFill>
+                <a:latin typeface="Calibri"/>
+              </a:defRPr>
+            </a:pPr>
+            <a:r>
+              <a:t>• EKS Control Plane: Managed Kubernetes v1.30 control plane with private &amp; public API endpoints.</a:t>
+            </a:r>
+          </a:p>
+          <a:p>
+            <a:pPr>
+              <a:spcAft>
+                <a:spcPts val="800"/>
+              </a:spcAft>
+              <a:defRPr sz="1200">
+                <a:solidFill>
+                  <a:srgbClr val="F8FAFC"/>
+                </a:solidFill>
+                <a:latin typeface="Calibri"/>
+              </a:defRPr>
+            </a:pPr>
+            <a:r>
+              <a:t>• Managed Node Group: 2 to 4 t3.medium EC2 instances distributed across private subnets.</a:t>
+            </a:r>
+          </a:p>
+          <a:p>
+            <a:pPr>
+              <a:spcAft>
+                <a:spcPts val="800"/>
+              </a:spcAft>
+              <a:defRPr sz="1200">
+                <a:solidFill>
+                  <a:srgbClr val="F8FAFC"/>
+                </a:solidFill>
+                <a:latin typeface="Calibri"/>
+              </a:defRPr>
+            </a:pPr>
+            <a:r>
+              <a:t>• IAM Roles: Least-privilege roles for EKS Cluster, CNI, and ContainerRegistryReadOnly.</a:t>
+            </a:r>
+          </a:p>
+          <a:p>
+            <a:pPr>
+              <a:spcAft>
+                <a:spcPts val="800"/>
+              </a:spcAft>
+              <a:defRPr sz="1200">
+                <a:solidFill>
+                  <a:srgbClr val="F8FAFC"/>
+                </a:solidFill>
+                <a:latin typeface="Calibri"/>
+              </a:defRPr>
+            </a:pPr>
+            <a:r>
+              <a:t>• Add-ons (addons.tf): AWS EBS CSI driver (for gp3 volumes) and Kubernetes Metrics Server (for HPA).</a:t>
+            </a:r>
+          </a:p>
+        </p:txBody>
+      </p:sp>
+      <p:sp>
+        <p:nvSpPr>
+          <p:cNvPr id="14" name="Rounded Rectangle 13"/>
+          <p:cNvSpPr/>
+          <p:nvPr/>
+        </p:nvSpPr>
+        <p:spPr>
+          <a:xfrm>
+            <a:off x="8036356" y="1874519"/>
+            <a:ext cx="3423818" cy="4434840"/>
+          </a:xfrm>
+          <a:prstGeom prst="roundRect">
+            <a:avLst/>
+          </a:prstGeom>
+          <a:solidFill>
+            <a:srgbClr val="0F172A"/>
+          </a:solidFill>
+          <a:ln w="12700">
+            <a:solidFill>
+              <a:srgbClr val="1E293B"/>
+            </a:solidFill>
+          </a:ln>
+        </p:spPr>
+        <p:style>
+          <a:lnRef idx="1">
+            <a:schemeClr val="accent1"/>
+          </a:lnRef>
+          <a:fillRef idx="3">
+            <a:schemeClr val="accent1"/>
+          </a:fillRef>
+          <a:effectRef idx="2">
+            <a:schemeClr val="accent1"/>
+          </a:effectRef>
+          <a:fontRef idx="minor">
+            <a:schemeClr val="lt1"/>
+          </a:fontRef>
+        </p:style>
+        <p:txBody>
+          <a:bodyPr rtlCol="0" anchor="ctr"/>
+          <a:lstStyle/>
+          <a:p>
+            <a:pPr algn="ctr"/>
+          </a:p>
+        </p:txBody>
+      </p:sp>
+      <p:sp>
+        <p:nvSpPr>
+          <p:cNvPr id="15" name="TextBox 14"/>
+          <p:cNvSpPr txBox="1"/>
+          <p:nvPr/>
+        </p:nvSpPr>
+        <p:spPr>
+          <a:xfrm>
+            <a:off x="8173516" y="2011679"/>
+            <a:ext cx="3149498" cy="411480"/>
+          </a:xfrm>
+          <a:prstGeom prst="rect">
+            <a:avLst/>
+          </a:prstGeom>
+          <a:noFill/>
+        </p:spPr>
+        <p:txBody>
+          <a:bodyPr wrap="square">
+            <a:spAutoFit/>
+          </a:bodyPr>
+          <a:lstStyle/>
+          <a:p>
+            <a:pPr>
+              <a:defRPr sz="1400" b="1">
+                <a:solidFill>
+                  <a:srgbClr val="F59E0B"/>
+                </a:solidFill>
+                <a:latin typeface="Arial"/>
+              </a:defRPr>
+            </a:pPr>
+            <a:r>
+              <a:t>Cost Safety &amp; Teardown Runbook</a:t>
+            </a:r>
+          </a:p>
+        </p:txBody>
+      </p:sp>
+      <p:sp>
+        <p:nvSpPr>
+          <p:cNvPr id="16" name="TextBox 15"/>
+          <p:cNvSpPr txBox="1"/>
+          <p:nvPr/>
+        </p:nvSpPr>
+        <p:spPr>
+          <a:xfrm>
+            <a:off x="8173516" y="2468879"/>
+            <a:ext cx="3149498" cy="3703320"/>
+          </a:xfrm>
+          <a:prstGeom prst="rect">
+            <a:avLst/>
+          </a:prstGeom>
+          <a:noFill/>
+        </p:spPr>
+        <p:txBody>
+          <a:bodyPr wrap="square">
+            <a:spAutoFit/>
+          </a:bodyPr>
+          <a:lstStyle/>
+          <a:p>
+            <a:pPr>
+              <a:spcAft>
+                <a:spcPts val="800"/>
+              </a:spcAft>
+              <a:defRPr sz="1200">
+                <a:solidFill>
+                  <a:srgbClr val="F8FAFC"/>
+                </a:solidFill>
+                <a:latin typeface="Calibri"/>
+              </a:defRPr>
+            </a:pPr>
+            <a:r>
+              <a:t>• Reproducibility: Configured via terraform.tfvars.example with parameterized variables.</a:t>
+            </a:r>
+          </a:p>
+          <a:p>
+            <a:pPr>
+              <a:spcAft>
+                <a:spcPts val="800"/>
+              </a:spcAft>
+              <a:defRPr sz="1200">
+                <a:solidFill>
+                  <a:srgbClr val="F8FAFC"/>
+                </a:solidFill>
+                <a:latin typeface="Calibri"/>
+              </a:defRPr>
+            </a:pPr>
+            <a:r>
+              <a:t>• Automated Teardown: Documented runbook in terraform/README.md for clean resource destruction.</a:t>
+            </a:r>
+          </a:p>
+          <a:p>
+            <a:pPr>
+              <a:spcAft>
+                <a:spcPts val="800"/>
+              </a:spcAft>
+              <a:defRPr sz="1200">
+                <a:solidFill>
+                  <a:srgbClr val="F8FAFC"/>
+                </a:solidFill>
+                <a:latin typeface="Calibri"/>
+              </a:defRPr>
+            </a:pPr>
+            <a:r>
+              <a:t>• Zero-Leak Guarantee: PVCs and Ingresses uninstalled prior to terraform destroy to prevent dangling ALBs.</a:t>
+            </a:r>
+          </a:p>
+        </p:txBody>
+      </p:sp>
+      <p:sp>
+        <p:nvSpPr>
+          <p:cNvPr id="17" name="TextBox 16"/>
+          <p:cNvSpPr txBox="1"/>
+          <p:nvPr/>
+        </p:nvSpPr>
+        <p:spPr>
+          <a:xfrm>
+            <a:off x="731520" y="6446520"/>
+            <a:ext cx="10728655" cy="274320"/>
+          </a:xfrm>
+          <a:prstGeom prst="rect">
+            <a:avLst/>
+          </a:prstGeom>
+          <a:noFill/>
+        </p:spPr>
+        <p:txBody>
+          <a:bodyPr wrap="none">
+            <a:spAutoFit/>
+          </a:bodyPr>
+          <a:lstStyle/>
+          <a:p>
+            <a:pPr>
+              <a:defRPr sz="900">
+                <a:solidFill>
+                  <a:srgbClr val="94A3B8"/>
+                </a:solidFill>
+                <a:latin typeface="Arial"/>
+              </a:defRPr>
+            </a:pPr>
+            <a:r>
+              <a:t>PodiumHQ DevSecOps Capstone • GitOps, Automated Verification &amp; Observability</a:t>
             </a:r>
           </a:p>
         </p:txBody>
@@ -5288,16 +9032,16 @@
         </p:nvSpPr>
         <p:spPr>
           <a:xfrm>
-            <a:off x="731520" y="731520"/>
-            <a:ext cx="10728655" cy="5394960"/>
+            <a:off x="731520" y="365760"/>
+            <a:ext cx="10728655" cy="54864"/>
           </a:xfrm>
           <a:prstGeom prst="rect">
             <a:avLst/>
           </a:prstGeom>
           <a:solidFill>
-            <a:srgbClr val="0F172A"/>
+            <a:srgbClr val="F59E0B"/>
           </a:solidFill>
-          <a:ln w="19050">
+          <a:ln>
             <a:solidFill>
               <a:srgbClr val="F59E0B"/>
             </a:solidFill>
@@ -5333,8 +9077,80 @@
         </p:nvSpPr>
         <p:spPr>
           <a:xfrm>
-            <a:off x="1097280" y="1005840"/>
-            <a:ext cx="10058400" cy="731520"/>
+            <a:off x="731520" y="502920"/>
+            <a:ext cx="5486400" cy="320040"/>
+          </a:xfrm>
+          <a:prstGeom prst="rect">
+            <a:avLst/>
+          </a:prstGeom>
+          <a:noFill/>
+        </p:spPr>
+        <p:txBody>
+          <a:bodyPr wrap="none">
+            <a:spAutoFit/>
+          </a:bodyPr>
+          <a:lstStyle/>
+          <a:p>
+            <a:pPr>
+              <a:defRPr sz="1000" b="1">
+                <a:solidFill>
+                  <a:srgbClr val="F59E0B"/>
+                </a:solidFill>
+                <a:latin typeface="Arial"/>
+              </a:defRPr>
+            </a:pPr>
+            <a:r>
+              <a:t>MODULE CHECKPOINT • KUBERNETES &amp; HELM DEPLOYMENT</a:t>
+            </a:r>
+          </a:p>
+        </p:txBody>
+      </p:sp>
+      <p:sp>
+        <p:nvSpPr>
+          <p:cNvPr id="5" name="TextBox 4"/>
+          <p:cNvSpPr txBox="1"/>
+          <p:nvPr/>
+        </p:nvSpPr>
+        <p:spPr>
+          <a:xfrm>
+            <a:off x="8686800" y="502920"/>
+            <a:ext cx="2743200" cy="320040"/>
+          </a:xfrm>
+          <a:prstGeom prst="rect">
+            <a:avLst/>
+          </a:prstGeom>
+          <a:noFill/>
+        </p:spPr>
+        <p:txBody>
+          <a:bodyPr wrap="none">
+            <a:spAutoFit/>
+          </a:bodyPr>
+          <a:lstStyle/>
+          <a:p>
+            <a:pPr algn="r">
+              <a:defRPr sz="1000" b="1">
+                <a:solidFill>
+                  <a:srgbClr val="94A3B8"/>
+                </a:solidFill>
+                <a:latin typeface="Arial"/>
+              </a:defRPr>
+            </a:pPr>
+            <a:r>
+              <a:t>SLIDE 6 OF 10</a:t>
+            </a:r>
+          </a:p>
+        </p:txBody>
+      </p:sp>
+      <p:sp>
+        <p:nvSpPr>
+          <p:cNvPr id="6" name="TextBox 5"/>
+          <p:cNvSpPr txBox="1"/>
+          <p:nvPr/>
+        </p:nvSpPr>
+        <p:spPr>
+          <a:xfrm>
+            <a:off x="731520" y="777240"/>
+            <a:ext cx="10728655" cy="594360"/>
           </a:xfrm>
           <a:prstGeom prst="rect">
             <a:avLst/>
@@ -5348,29 +9164,29 @@
           <a:lstStyle/>
           <a:p>
             <a:pPr>
-              <a:defRPr sz="2800" b="1">
-                <a:solidFill>
-                  <a:srgbClr val="F59E0B"/>
+              <a:defRPr sz="2400" b="1">
+                <a:solidFill>
+                  <a:srgbClr val="F8FAFC"/>
                 </a:solidFill>
                 <a:latin typeface="Arial"/>
               </a:defRPr>
             </a:pPr>
             <a:r>
-              <a:t>Container Hardening &amp; DevSecOps Gates</a:t>
-            </a:r>
-          </a:p>
-        </p:txBody>
-      </p:sp>
-      <p:sp>
-        <p:nvSpPr>
-          <p:cNvPr id="5" name="TextBox 4"/>
+              <a:t>Kubernetes Packaging: Helm &amp; Workloads</a:t>
+            </a:r>
+          </a:p>
+        </p:txBody>
+      </p:sp>
+      <p:sp>
+        <p:nvSpPr>
+          <p:cNvPr id="7" name="TextBox 6"/>
           <p:cNvSpPr txBox="1"/>
           <p:nvPr/>
         </p:nvSpPr>
         <p:spPr>
           <a:xfrm>
-            <a:off x="1097280" y="1645920"/>
-            <a:ext cx="10058400" cy="548640"/>
+            <a:off x="731520" y="1325880"/>
+            <a:ext cx="10728655" cy="411480"/>
           </a:xfrm>
           <a:prstGeom prst="rect">
             <a:avLst/>
@@ -5384,7 +9200,7 @@
           <a:lstStyle/>
           <a:p>
             <a:pPr>
-              <a:defRPr sz="1600">
+              <a:defRPr sz="1300">
                 <a:solidFill>
                   <a:srgbClr val="10B981"/>
                 </a:solidFill>
@@ -5392,21 +9208,66 @@
               </a:defRPr>
             </a:pPr>
             <a:r>
-              <a:t>Defense-in-Depth Container Security from Base Image to Runtime</a:t>
-            </a:r>
-          </a:p>
-        </p:txBody>
-      </p:sp>
-      <p:sp>
-        <p:nvSpPr>
-          <p:cNvPr id="6" name="TextBox 5"/>
+              <a:t>Declarative Packaging, Non-Root Workloads, and Migration Job Hooks</a:t>
+            </a:r>
+          </a:p>
+        </p:txBody>
+      </p:sp>
+      <p:sp>
+        <p:nvSpPr>
+          <p:cNvPr id="8" name="Rounded Rectangle 7"/>
+          <p:cNvSpPr/>
+          <p:nvPr/>
+        </p:nvSpPr>
+        <p:spPr>
+          <a:xfrm>
+            <a:off x="731520" y="1874519"/>
+            <a:ext cx="3423818" cy="4434840"/>
+          </a:xfrm>
+          <a:prstGeom prst="roundRect">
+            <a:avLst/>
+          </a:prstGeom>
+          <a:solidFill>
+            <a:srgbClr val="0F172A"/>
+          </a:solidFill>
+          <a:ln w="12700">
+            <a:solidFill>
+              <a:srgbClr val="1E293B"/>
+            </a:solidFill>
+          </a:ln>
+        </p:spPr>
+        <p:style>
+          <a:lnRef idx="1">
+            <a:schemeClr val="accent1"/>
+          </a:lnRef>
+          <a:fillRef idx="3">
+            <a:schemeClr val="accent1"/>
+          </a:fillRef>
+          <a:effectRef idx="2">
+            <a:schemeClr val="accent1"/>
+          </a:effectRef>
+          <a:fontRef idx="minor">
+            <a:schemeClr val="lt1"/>
+          </a:fontRef>
+        </p:style>
+        <p:txBody>
+          <a:bodyPr rtlCol="0" anchor="ctr"/>
+          <a:lstStyle/>
+          <a:p>
+            <a:pPr algn="ctr"/>
+          </a:p>
+        </p:txBody>
+      </p:sp>
+      <p:sp>
+        <p:nvSpPr>
+          <p:cNvPr id="9" name="TextBox 8"/>
           <p:cNvSpPr txBox="1"/>
           <p:nvPr/>
         </p:nvSpPr>
         <p:spPr>
           <a:xfrm>
-            <a:off x="1097280" y="2377440"/>
-            <a:ext cx="10058400" cy="3474720"/>
+            <a:off x="868680" y="2011679"/>
+            <a:ext cx="3149498" cy="411480"/>
           </a:xfrm>
           <a:prstGeom prst="rect">
             <a:avLst/>
@@ -5420,66 +9281,442 @@
           <a:lstStyle/>
           <a:p>
             <a:pPr>
+              <a:defRPr sz="1400" b="1">
+                <a:solidFill>
+                  <a:srgbClr val="38BDF8"/>
+                </a:solidFill>
+                <a:latin typeface="Arial"/>
+              </a:defRPr>
+            </a:pPr>
+            <a:r>
+              <a:t>Workload Declarations</a:t>
+            </a:r>
+          </a:p>
+        </p:txBody>
+      </p:sp>
+      <p:sp>
+        <p:nvSpPr>
+          <p:cNvPr id="10" name="TextBox 9"/>
+          <p:cNvSpPr txBox="1"/>
+          <p:nvPr/>
+        </p:nvSpPr>
+        <p:spPr>
+          <a:xfrm>
+            <a:off x="868680" y="2468879"/>
+            <a:ext cx="3149498" cy="3703320"/>
+          </a:xfrm>
+          <a:prstGeom prst="rect">
+            <a:avLst/>
+          </a:prstGeom>
+          <a:noFill/>
+        </p:spPr>
+        <p:txBody>
+          <a:bodyPr wrap="square">
+            <a:spAutoFit/>
+          </a:bodyPr>
+          <a:lstStyle/>
+          <a:p>
+            <a:pPr>
               <a:spcAft>
-                <a:spcPts val="1400"/>
+                <a:spcPts val="800"/>
               </a:spcAft>
-              <a:defRPr sz="1800">
-                <a:solidFill>
-                  <a:srgbClr val="FFFFFF"/>
+              <a:defRPr sz="1200">
+                <a:solidFill>
+                  <a:srgbClr val="F8FAFC"/>
                 </a:solidFill>
                 <a:latin typeface="Calibri"/>
               </a:defRPr>
             </a:pPr>
             <a:r>
-              <a:t>• Multi-Stage Builds: Frontend compiles React with Node 22, served via unprivileged Nginx (UID 101).</a:t>
+              <a:t>• Backend Deployment: 2 replicas, rolling updates (maxSurge: 1, maxUnavailable: 0), liveness and readiness probes.</a:t>
             </a:r>
           </a:p>
           <a:p>
             <a:pPr>
               <a:spcAft>
-                <a:spcPts val="1400"/>
+                <a:spcPts val="800"/>
               </a:spcAft>
-              <a:defRPr sz="1800">
-                <a:solidFill>
-                  <a:srgbClr val="FFFFFF"/>
+              <a:defRPr sz="1200">
+                <a:solidFill>
+                  <a:srgbClr val="F8FAFC"/>
                 </a:solidFill>
                 <a:latin typeface="Calibri"/>
               </a:defRPr>
             </a:pPr>
             <a:r>
-              <a:t>• Strict Non-Root Runtime: Backend runs as explicit UID/GID 10001 (appuser:appgroup), verified via in-container inspection.</a:t>
+              <a:t>• Frontend Deployment: 2 replicas, unprivileged Nginx reverse-proxying API traffic to backend.</a:t>
             </a:r>
           </a:p>
           <a:p>
             <a:pPr>
               <a:spcAft>
-                <a:spcPts val="1400"/>
+                <a:spcPts val="800"/>
               </a:spcAft>
-              <a:defRPr sz="1800">
-                <a:solidFill>
-                  <a:srgbClr val="FFFFFF"/>
+              <a:defRPr sz="1200">
+                <a:solidFill>
+                  <a:srgbClr val="F8FAFC"/>
                 </a:solidFill>
                 <a:latin typeface="Calibri"/>
               </a:defRPr>
             </a:pPr>
             <a:r>
-              <a:t>• Vulnerability Scanning: Trivy scans filesystems, dependencies, and container images for HIGH/CRITICAL vulnerabilities.</a:t>
+              <a:t>• PostgreSQL StatefulSet: 1 replica with gp3 StorageClass PersistentVolumeClaim (10Gi).</a:t>
             </a:r>
           </a:p>
           <a:p>
             <a:pPr>
               <a:spcAft>
-                <a:spcPts val="1400"/>
+                <a:spcPts val="800"/>
               </a:spcAft>
-              <a:defRPr sz="1800">
-                <a:solidFill>
-                  <a:srgbClr val="FFFFFF"/>
+              <a:defRPr sz="1200">
+                <a:solidFill>
+                  <a:srgbClr val="F8FAFC"/>
                 </a:solidFill>
                 <a:latin typeface="Calibri"/>
               </a:defRPr>
             </a:pPr>
             <a:r>
-              <a:t>• Secret Prevention: Gitleaks automated scanning blocks credentials, API keys, or database secrets from entering Git history.</a:t>
+              <a:t>• PodDisruptionBudget (PDB): Guarantees at least 1 backend pod remains available during node maintenance.</a:t>
+            </a:r>
+          </a:p>
+        </p:txBody>
+      </p:sp>
+      <p:sp>
+        <p:nvSpPr>
+          <p:cNvPr id="11" name="Rounded Rectangle 10"/>
+          <p:cNvSpPr/>
+          <p:nvPr/>
+        </p:nvSpPr>
+        <p:spPr>
+          <a:xfrm>
+            <a:off x="4383938" y="1874519"/>
+            <a:ext cx="3423818" cy="4434840"/>
+          </a:xfrm>
+          <a:prstGeom prst="roundRect">
+            <a:avLst/>
+          </a:prstGeom>
+          <a:solidFill>
+            <a:srgbClr val="0F172A"/>
+          </a:solidFill>
+          <a:ln w="12700">
+            <a:solidFill>
+              <a:srgbClr val="1E293B"/>
+            </a:solidFill>
+          </a:ln>
+        </p:spPr>
+        <p:style>
+          <a:lnRef idx="1">
+            <a:schemeClr val="accent1"/>
+          </a:lnRef>
+          <a:fillRef idx="3">
+            <a:schemeClr val="accent1"/>
+          </a:fillRef>
+          <a:effectRef idx="2">
+            <a:schemeClr val="accent1"/>
+          </a:effectRef>
+          <a:fontRef idx="minor">
+            <a:schemeClr val="lt1"/>
+          </a:fontRef>
+        </p:style>
+        <p:txBody>
+          <a:bodyPr rtlCol="0" anchor="ctr"/>
+          <a:lstStyle/>
+          <a:p>
+            <a:pPr algn="ctr"/>
+          </a:p>
+        </p:txBody>
+      </p:sp>
+      <p:sp>
+        <p:nvSpPr>
+          <p:cNvPr id="12" name="TextBox 11"/>
+          <p:cNvSpPr txBox="1"/>
+          <p:nvPr/>
+        </p:nvSpPr>
+        <p:spPr>
+          <a:xfrm>
+            <a:off x="4521098" y="2011679"/>
+            <a:ext cx="3149498" cy="411480"/>
+          </a:xfrm>
+          <a:prstGeom prst="rect">
+            <a:avLst/>
+          </a:prstGeom>
+          <a:noFill/>
+        </p:spPr>
+        <p:txBody>
+          <a:bodyPr wrap="square">
+            <a:spAutoFit/>
+          </a:bodyPr>
+          <a:lstStyle/>
+          <a:p>
+            <a:pPr>
+              <a:defRPr sz="1400" b="1">
+                <a:solidFill>
+                  <a:srgbClr val="10B981"/>
+                </a:solidFill>
+                <a:latin typeface="Arial"/>
+              </a:defRPr>
+            </a:pPr>
+            <a:r>
+              <a:t>SecurityContext &amp; Hardening</a:t>
+            </a:r>
+          </a:p>
+        </p:txBody>
+      </p:sp>
+      <p:sp>
+        <p:nvSpPr>
+          <p:cNvPr id="13" name="TextBox 12"/>
+          <p:cNvSpPr txBox="1"/>
+          <p:nvPr/>
+        </p:nvSpPr>
+        <p:spPr>
+          <a:xfrm>
+            <a:off x="4521098" y="2468879"/>
+            <a:ext cx="3149498" cy="3703320"/>
+          </a:xfrm>
+          <a:prstGeom prst="rect">
+            <a:avLst/>
+          </a:prstGeom>
+          <a:noFill/>
+        </p:spPr>
+        <p:txBody>
+          <a:bodyPr wrap="square">
+            <a:spAutoFit/>
+          </a:bodyPr>
+          <a:lstStyle/>
+          <a:p>
+            <a:pPr>
+              <a:spcAft>
+                <a:spcPts val="800"/>
+              </a:spcAft>
+              <a:defRPr sz="1200">
+                <a:solidFill>
+                  <a:srgbClr val="F8FAFC"/>
+                </a:solidFill>
+                <a:latin typeface="Calibri"/>
+              </a:defRPr>
+            </a:pPr>
+            <a:r>
+              <a:t>• Backend Pods: runAsNonRoot: true, runAsUser: 10001, runAsGroup: 10001, drop ALL capabilities.</a:t>
+            </a:r>
+          </a:p>
+          <a:p>
+            <a:pPr>
+              <a:spcAft>
+                <a:spcPts val="800"/>
+              </a:spcAft>
+              <a:defRPr sz="1200">
+                <a:solidFill>
+                  <a:srgbClr val="F8FAFC"/>
+                </a:solidFill>
+                <a:latin typeface="Calibri"/>
+              </a:defRPr>
+            </a:pPr>
+            <a:r>
+              <a:t>• Frontend Pods: runAsNonRoot: true, runAsUser: 101, runAsGroup: 101, drop ALL capabilities.</a:t>
+            </a:r>
+          </a:p>
+          <a:p>
+            <a:pPr>
+              <a:spcAft>
+                <a:spcPts val="800"/>
+              </a:spcAft>
+              <a:defRPr sz="1200">
+                <a:solidFill>
+                  <a:srgbClr val="F8FAFC"/>
+                </a:solidFill>
+                <a:latin typeface="Calibri"/>
+              </a:defRPr>
+            </a:pPr>
+            <a:r>
+              <a:t>• Ingress Controller: Routes / to frontend and /api, /health, /ready, /metrics to backend service.</a:t>
+            </a:r>
+          </a:p>
+        </p:txBody>
+      </p:sp>
+      <p:sp>
+        <p:nvSpPr>
+          <p:cNvPr id="14" name="Rounded Rectangle 13"/>
+          <p:cNvSpPr/>
+          <p:nvPr/>
+        </p:nvSpPr>
+        <p:spPr>
+          <a:xfrm>
+            <a:off x="8036356" y="1874519"/>
+            <a:ext cx="3423818" cy="4434840"/>
+          </a:xfrm>
+          <a:prstGeom prst="roundRect">
+            <a:avLst/>
+          </a:prstGeom>
+          <a:solidFill>
+            <a:srgbClr val="0F172A"/>
+          </a:solidFill>
+          <a:ln w="12700">
+            <a:solidFill>
+              <a:srgbClr val="1E293B"/>
+            </a:solidFill>
+          </a:ln>
+        </p:spPr>
+        <p:style>
+          <a:lnRef idx="1">
+            <a:schemeClr val="accent1"/>
+          </a:lnRef>
+          <a:fillRef idx="3">
+            <a:schemeClr val="accent1"/>
+          </a:fillRef>
+          <a:effectRef idx="2">
+            <a:schemeClr val="accent1"/>
+          </a:effectRef>
+          <a:fontRef idx="minor">
+            <a:schemeClr val="lt1"/>
+          </a:fontRef>
+        </p:style>
+        <p:txBody>
+          <a:bodyPr rtlCol="0" anchor="ctr"/>
+          <a:lstStyle/>
+          <a:p>
+            <a:pPr algn="ctr"/>
+          </a:p>
+        </p:txBody>
+      </p:sp>
+      <p:sp>
+        <p:nvSpPr>
+          <p:cNvPr id="15" name="TextBox 14"/>
+          <p:cNvSpPr txBox="1"/>
+          <p:nvPr/>
+        </p:nvSpPr>
+        <p:spPr>
+          <a:xfrm>
+            <a:off x="8173516" y="2011679"/>
+            <a:ext cx="3149498" cy="411480"/>
+          </a:xfrm>
+          <a:prstGeom prst="rect">
+            <a:avLst/>
+          </a:prstGeom>
+          <a:noFill/>
+        </p:spPr>
+        <p:txBody>
+          <a:bodyPr wrap="square">
+            <a:spAutoFit/>
+          </a:bodyPr>
+          <a:lstStyle/>
+          <a:p>
+            <a:pPr>
+              <a:defRPr sz="1400" b="1">
+                <a:solidFill>
+                  <a:srgbClr val="F59E0B"/>
+                </a:solidFill>
+                <a:latin typeface="Arial"/>
+              </a:defRPr>
+            </a:pPr>
+            <a:r>
+              <a:t>Database Migration Hook (Race Prevention)</a:t>
+            </a:r>
+          </a:p>
+        </p:txBody>
+      </p:sp>
+      <p:sp>
+        <p:nvSpPr>
+          <p:cNvPr id="16" name="TextBox 15"/>
+          <p:cNvSpPr txBox="1"/>
+          <p:nvPr/>
+        </p:nvSpPr>
+        <p:spPr>
+          <a:xfrm>
+            <a:off x="8173516" y="2468879"/>
+            <a:ext cx="3149498" cy="3703320"/>
+          </a:xfrm>
+          <a:prstGeom prst="rect">
+            <a:avLst/>
+          </a:prstGeom>
+          <a:noFill/>
+        </p:spPr>
+        <p:txBody>
+          <a:bodyPr wrap="square">
+            <a:spAutoFit/>
+          </a:bodyPr>
+          <a:lstStyle/>
+          <a:p>
+            <a:pPr>
+              <a:spcAft>
+                <a:spcPts val="800"/>
+              </a:spcAft>
+              <a:defRPr sz="1200">
+                <a:solidFill>
+                  <a:srgbClr val="F8FAFC"/>
+                </a:solidFill>
+                <a:latin typeface="Calibri"/>
+              </a:defRPr>
+            </a:pPr>
+            <a:r>
+              <a:t>• Problem Solved: Multiple backend replicas starting simultaneously cause database migration lock races.</a:t>
+            </a:r>
+          </a:p>
+          <a:p>
+            <a:pPr>
+              <a:spcAft>
+                <a:spcPts val="800"/>
+              </a:spcAft>
+              <a:defRPr sz="1200">
+                <a:solidFill>
+                  <a:srgbClr val="F8FAFC"/>
+                </a:solidFill>
+                <a:latin typeface="Calibri"/>
+              </a:defRPr>
+            </a:pPr>
+            <a:r>
+              <a:t>• Helm Hook Job: migration-job.yaml runs 'alembic upgrade head' as a pre-install/pre-upgrade hook.</a:t>
+            </a:r>
+          </a:p>
+          <a:p>
+            <a:pPr>
+              <a:spcAft>
+                <a:spcPts val="800"/>
+              </a:spcAft>
+              <a:defRPr sz="1200">
+                <a:solidFill>
+                  <a:srgbClr val="F8FAFC"/>
+                </a:solidFill>
+                <a:latin typeface="Calibri"/>
+              </a:defRPr>
+            </a:pPr>
+            <a:r>
+              <a:t>• App pods start with RUN_MIGRATIONS=false only AFTER the migration Job reports success.</a:t>
+            </a:r>
+          </a:p>
+        </p:txBody>
+      </p:sp>
+      <p:sp>
+        <p:nvSpPr>
+          <p:cNvPr id="17" name="TextBox 16"/>
+          <p:cNvSpPr txBox="1"/>
+          <p:nvPr/>
+        </p:nvSpPr>
+        <p:spPr>
+          <a:xfrm>
+            <a:off x="731520" y="6446520"/>
+            <a:ext cx="10728655" cy="274320"/>
+          </a:xfrm>
+          <a:prstGeom prst="rect">
+            <a:avLst/>
+          </a:prstGeom>
+          <a:noFill/>
+        </p:spPr>
+        <p:txBody>
+          <a:bodyPr wrap="none">
+            <a:spAutoFit/>
+          </a:bodyPr>
+          <a:lstStyle/>
+          <a:p>
+            <a:pPr>
+              <a:defRPr sz="900">
+                <a:solidFill>
+                  <a:srgbClr val="94A3B8"/>
+                </a:solidFill>
+                <a:latin typeface="Arial"/>
+              </a:defRPr>
+            </a:pPr>
+            <a:r>
+              <a:t>PodiumHQ DevSecOps Capstone • GitOps, Automated Verification &amp; Observability</a:t>
             </a:r>
           </a:p>
         </p:txBody>
@@ -5555,16 +9792,16 @@
         </p:nvSpPr>
         <p:spPr>
           <a:xfrm>
-            <a:off x="731520" y="731520"/>
-            <a:ext cx="10728655" cy="5394960"/>
+            <a:off x="731520" y="365760"/>
+            <a:ext cx="10728655" cy="54864"/>
           </a:xfrm>
           <a:prstGeom prst="rect">
             <a:avLst/>
           </a:prstGeom>
           <a:solidFill>
-            <a:srgbClr val="0F172A"/>
+            <a:srgbClr val="F59E0B"/>
           </a:solidFill>
-          <a:ln w="19050">
+          <a:ln>
             <a:solidFill>
               <a:srgbClr val="F59E0B"/>
             </a:solidFill>
@@ -5600,8 +9837,80 @@
         </p:nvSpPr>
         <p:spPr>
           <a:xfrm>
-            <a:off x="1097280" y="1005840"/>
-            <a:ext cx="10058400" cy="731520"/>
+            <a:off x="731520" y="502920"/>
+            <a:ext cx="5486400" cy="320040"/>
+          </a:xfrm>
+          <a:prstGeom prst="rect">
+            <a:avLst/>
+          </a:prstGeom>
+          <a:noFill/>
+        </p:spPr>
+        <p:txBody>
+          <a:bodyPr wrap="none">
+            <a:spAutoFit/>
+          </a:bodyPr>
+          <a:lstStyle/>
+          <a:p>
+            <a:pPr>
+              <a:defRPr sz="1000" b="1">
+                <a:solidFill>
+                  <a:srgbClr val="F59E0B"/>
+                </a:solidFill>
+                <a:latin typeface="Arial"/>
+              </a:defRPr>
+            </a:pPr>
+            <a:r>
+              <a:t>MODULE CHECKPOINT • GITOPS CONTINUOUS DELIVERY</a:t>
+            </a:r>
+          </a:p>
+        </p:txBody>
+      </p:sp>
+      <p:sp>
+        <p:nvSpPr>
+          <p:cNvPr id="5" name="TextBox 4"/>
+          <p:cNvSpPr txBox="1"/>
+          <p:nvPr/>
+        </p:nvSpPr>
+        <p:spPr>
+          <a:xfrm>
+            <a:off x="8686800" y="502920"/>
+            <a:ext cx="2743200" cy="320040"/>
+          </a:xfrm>
+          <a:prstGeom prst="rect">
+            <a:avLst/>
+          </a:prstGeom>
+          <a:noFill/>
+        </p:spPr>
+        <p:txBody>
+          <a:bodyPr wrap="none">
+            <a:spAutoFit/>
+          </a:bodyPr>
+          <a:lstStyle/>
+          <a:p>
+            <a:pPr algn="r">
+              <a:defRPr sz="1000" b="1">
+                <a:solidFill>
+                  <a:srgbClr val="94A3B8"/>
+                </a:solidFill>
+                <a:latin typeface="Arial"/>
+              </a:defRPr>
+            </a:pPr>
+            <a:r>
+              <a:t>SLIDE 7 OF 10</a:t>
+            </a:r>
+          </a:p>
+        </p:txBody>
+      </p:sp>
+      <p:sp>
+        <p:nvSpPr>
+          <p:cNvPr id="6" name="TextBox 5"/>
+          <p:cNvSpPr txBox="1"/>
+          <p:nvPr/>
+        </p:nvSpPr>
+        <p:spPr>
+          <a:xfrm>
+            <a:off x="731520" y="777240"/>
+            <a:ext cx="10728655" cy="594360"/>
           </a:xfrm>
           <a:prstGeom prst="rect">
             <a:avLst/>
@@ -5615,29 +9924,29 @@
           <a:lstStyle/>
           <a:p>
             <a:pPr>
-              <a:defRPr sz="2800" b="1">
-                <a:solidFill>
-                  <a:srgbClr val="F59E0B"/>
+              <a:defRPr sz="2400" b="1">
+                <a:solidFill>
+                  <a:srgbClr val="F8FAFC"/>
                 </a:solidFill>
                 <a:latin typeface="Arial"/>
               </a:defRPr>
             </a:pPr>
             <a:r>
-              <a:t>CI/CD Pipeline: GitHub Actions</a:t>
-            </a:r>
-          </a:p>
-        </p:txBody>
-      </p:sp>
-      <p:sp>
-        <p:nvSpPr>
-          <p:cNvPr id="5" name="TextBox 4"/>
+              <a:t>GitOps with ArgoCD</a:t>
+            </a:r>
+          </a:p>
+        </p:txBody>
+      </p:sp>
+      <p:sp>
+        <p:nvSpPr>
+          <p:cNvPr id="7" name="TextBox 6"/>
           <p:cNvSpPr txBox="1"/>
           <p:nvPr/>
         </p:nvSpPr>
         <p:spPr>
           <a:xfrm>
-            <a:off x="1097280" y="1645920"/>
-            <a:ext cx="10058400" cy="548640"/>
+            <a:off x="731520" y="1325880"/>
+            <a:ext cx="10728655" cy="411480"/>
           </a:xfrm>
           <a:prstGeom prst="rect">
             <a:avLst/>
@@ -5651,7 +9960,7 @@
           <a:lstStyle/>
           <a:p>
             <a:pPr>
-              <a:defRPr sz="1600">
+              <a:defRPr sz="1300">
                 <a:solidFill>
                   <a:srgbClr val="10B981"/>
                 </a:solidFill>
@@ -5659,21 +9968,66 @@
               </a:defRPr>
             </a:pPr>
             <a:r>
-              <a:t>Automated Quality Gates, Vulnerability Blocking, and Immutable Tagging</a:t>
-            </a:r>
-          </a:p>
-        </p:txBody>
-      </p:sp>
-      <p:sp>
-        <p:nvSpPr>
-          <p:cNvPr id="6" name="TextBox 5"/>
+              <a:t>Continuous Reconciliation, Automated Syncing, and Self-Healing Drift Control</a:t>
+            </a:r>
+          </a:p>
+        </p:txBody>
+      </p:sp>
+      <p:sp>
+        <p:nvSpPr>
+          <p:cNvPr id="8" name="Rounded Rectangle 7"/>
+          <p:cNvSpPr/>
+          <p:nvPr/>
+        </p:nvSpPr>
+        <p:spPr>
+          <a:xfrm>
+            <a:off x="731520" y="1874519"/>
+            <a:ext cx="3423818" cy="4434840"/>
+          </a:xfrm>
+          <a:prstGeom prst="roundRect">
+            <a:avLst/>
+          </a:prstGeom>
+          <a:solidFill>
+            <a:srgbClr val="0F172A"/>
+          </a:solidFill>
+          <a:ln w="12700">
+            <a:solidFill>
+              <a:srgbClr val="1E293B"/>
+            </a:solidFill>
+          </a:ln>
+        </p:spPr>
+        <p:style>
+          <a:lnRef idx="1">
+            <a:schemeClr val="accent1"/>
+          </a:lnRef>
+          <a:fillRef idx="3">
+            <a:schemeClr val="accent1"/>
+          </a:fillRef>
+          <a:effectRef idx="2">
+            <a:schemeClr val="accent1"/>
+          </a:effectRef>
+          <a:fontRef idx="minor">
+            <a:schemeClr val="lt1"/>
+          </a:fontRef>
+        </p:style>
+        <p:txBody>
+          <a:bodyPr rtlCol="0" anchor="ctr"/>
+          <a:lstStyle/>
+          <a:p>
+            <a:pPr algn="ctr"/>
+          </a:p>
+        </p:txBody>
+      </p:sp>
+      <p:sp>
+        <p:nvSpPr>
+          <p:cNvPr id="9" name="TextBox 8"/>
           <p:cNvSpPr txBox="1"/>
           <p:nvPr/>
         </p:nvSpPr>
         <p:spPr>
           <a:xfrm>
-            <a:off x="1097280" y="2377440"/>
-            <a:ext cx="10058400" cy="3474720"/>
+            <a:off x="868680" y="2011679"/>
+            <a:ext cx="3149498" cy="411480"/>
           </a:xfrm>
           <a:prstGeom prst="rect">
             <a:avLst/>
@@ -5687,82 +10041,426 @@
           <a:lstStyle/>
           <a:p>
             <a:pPr>
+              <a:defRPr sz="1400" b="1">
+                <a:solidFill>
+                  <a:srgbClr val="38BDF8"/>
+                </a:solidFill>
+                <a:latin typeface="Arial"/>
+              </a:defRPr>
+            </a:pPr>
+            <a:r>
+              <a:t>ArgoCD Application Configuration</a:t>
+            </a:r>
+          </a:p>
+        </p:txBody>
+      </p:sp>
+      <p:sp>
+        <p:nvSpPr>
+          <p:cNvPr id="10" name="TextBox 9"/>
+          <p:cNvSpPr txBox="1"/>
+          <p:nvPr/>
+        </p:nvSpPr>
+        <p:spPr>
+          <a:xfrm>
+            <a:off x="868680" y="2468879"/>
+            <a:ext cx="3149498" cy="3703320"/>
+          </a:xfrm>
+          <a:prstGeom prst="rect">
+            <a:avLst/>
+          </a:prstGeom>
+          <a:noFill/>
+        </p:spPr>
+        <p:txBody>
+          <a:bodyPr wrap="square">
+            <a:spAutoFit/>
+          </a:bodyPr>
+          <a:lstStyle/>
+          <a:p>
+            <a:pPr>
               <a:spcAft>
-                <a:spcPts val="1400"/>
+                <a:spcPts val="800"/>
               </a:spcAft>
-              <a:defRPr sz="1800">
-                <a:solidFill>
-                  <a:srgbClr val="FFFFFF"/>
+              <a:defRPr sz="1200">
+                <a:solidFill>
+                  <a:srgbClr val="F8FAFC"/>
                 </a:solidFill>
                 <a:latin typeface="Calibri"/>
               </a:defRPr>
             </a:pPr>
             <a:r>
-              <a:t>• Gate 1 - Code Quality: Ruff linter, Mypy type-checking, and frontend ESLint.</a:t>
+              <a:t>• Manifest: argocd/application.yaml targeting namespace podiumhq with project: default.</a:t>
             </a:r>
           </a:p>
           <a:p>
             <a:pPr>
               <a:spcAft>
-                <a:spcPts val="1400"/>
+                <a:spcPts val="800"/>
               </a:spcAft>
-              <a:defRPr sz="1800">
-                <a:solidFill>
-                  <a:srgbClr val="FFFFFF"/>
+              <a:defRPr sz="1200">
+                <a:solidFill>
+                  <a:srgbClr val="F8FAFC"/>
                 </a:solidFill>
                 <a:latin typeface="Calibri"/>
               </a:defRPr>
             </a:pPr>
             <a:r>
-              <a:t>• Gate 2 - Automated Tests: Pytest with coverage threshold gate (must be &gt;= 80%).</a:t>
+              <a:t>• Source: Watches this Git repository (path: helm/podiumhq, targetRevision: HEAD).</a:t>
             </a:r>
           </a:p>
           <a:p>
             <a:pPr>
               <a:spcAft>
-                <a:spcPts val="1400"/>
+                <a:spcPts val="800"/>
               </a:spcAft>
-              <a:defRPr sz="1800">
-                <a:solidFill>
-                  <a:srgbClr val="FFFFFF"/>
+              <a:defRPr sz="1200">
+                <a:solidFill>
+                  <a:srgbClr val="F8FAFC"/>
                 </a:solidFill>
                 <a:latin typeface="Calibri"/>
               </a:defRPr>
             </a:pPr>
             <a:r>
-              <a:t>• Gate 3 - Multi-Stage Container Build: Buildx caching for backend and frontend images.</a:t>
-            </a:r>
-          </a:p>
+              <a:t>• Environment Values: Uses values-prod.yaml for production cluster deployment.</a:t>
+            </a:r>
+          </a:p>
+        </p:txBody>
+      </p:sp>
+      <p:sp>
+        <p:nvSpPr>
+          <p:cNvPr id="11" name="Rounded Rectangle 10"/>
+          <p:cNvSpPr/>
+          <p:nvPr/>
+        </p:nvSpPr>
+        <p:spPr>
+          <a:xfrm>
+            <a:off x="4383938" y="1874519"/>
+            <a:ext cx="3423818" cy="4434840"/>
+          </a:xfrm>
+          <a:prstGeom prst="roundRect">
+            <a:avLst/>
+          </a:prstGeom>
+          <a:solidFill>
+            <a:srgbClr val="0F172A"/>
+          </a:solidFill>
+          <a:ln w="12700">
+            <a:solidFill>
+              <a:srgbClr val="1E293B"/>
+            </a:solidFill>
+          </a:ln>
+        </p:spPr>
+        <p:style>
+          <a:lnRef idx="1">
+            <a:schemeClr val="accent1"/>
+          </a:lnRef>
+          <a:fillRef idx="3">
+            <a:schemeClr val="accent1"/>
+          </a:fillRef>
+          <a:effectRef idx="2">
+            <a:schemeClr val="accent1"/>
+          </a:effectRef>
+          <a:fontRef idx="minor">
+            <a:schemeClr val="lt1"/>
+          </a:fontRef>
+        </p:style>
+        <p:txBody>
+          <a:bodyPr rtlCol="0" anchor="ctr"/>
+          <a:lstStyle/>
+          <a:p>
+            <a:pPr algn="ctr"/>
+          </a:p>
+        </p:txBody>
+      </p:sp>
+      <p:sp>
+        <p:nvSpPr>
+          <p:cNvPr id="12" name="TextBox 11"/>
+          <p:cNvSpPr txBox="1"/>
+          <p:nvPr/>
+        </p:nvSpPr>
+        <p:spPr>
+          <a:xfrm>
+            <a:off x="4521098" y="2011679"/>
+            <a:ext cx="3149498" cy="411480"/>
+          </a:xfrm>
+          <a:prstGeom prst="rect">
+            <a:avLst/>
+          </a:prstGeom>
+          <a:noFill/>
+        </p:spPr>
+        <p:txBody>
+          <a:bodyPr wrap="square">
+            <a:spAutoFit/>
+          </a:bodyPr>
+          <a:lstStyle/>
+          <a:p>
+            <a:pPr>
+              <a:defRPr sz="1400" b="1">
+                <a:solidFill>
+                  <a:srgbClr val="10B981"/>
+                </a:solidFill>
+                <a:latin typeface="Arial"/>
+              </a:defRPr>
+            </a:pPr>
+            <a:r>
+              <a:t>Automated Sync &amp; Self-Healing</a:t>
+            </a:r>
+          </a:p>
+        </p:txBody>
+      </p:sp>
+      <p:sp>
+        <p:nvSpPr>
+          <p:cNvPr id="13" name="TextBox 12"/>
+          <p:cNvSpPr txBox="1"/>
+          <p:nvPr/>
+        </p:nvSpPr>
+        <p:spPr>
+          <a:xfrm>
+            <a:off x="4521098" y="2468879"/>
+            <a:ext cx="3149498" cy="3703320"/>
+          </a:xfrm>
+          <a:prstGeom prst="rect">
+            <a:avLst/>
+          </a:prstGeom>
+          <a:noFill/>
+        </p:spPr>
+        <p:txBody>
+          <a:bodyPr wrap="square">
+            <a:spAutoFit/>
+          </a:bodyPr>
+          <a:lstStyle/>
           <a:p>
             <a:pPr>
               <a:spcAft>
-                <a:spcPts val="1400"/>
+                <a:spcPts val="800"/>
               </a:spcAft>
-              <a:defRPr sz="1800">
-                <a:solidFill>
-                  <a:srgbClr val="FFFFFF"/>
+              <a:defRPr sz="1200">
+                <a:solidFill>
+                  <a:srgbClr val="F8FAFC"/>
                 </a:solidFill>
                 <a:latin typeface="Calibri"/>
               </a:defRPr>
             </a:pPr>
             <a:r>
-              <a:t>• Gate 4 - Security Scanning: Trivy container vulnerability scanner with blocking threshold.</a:t>
+              <a:t>• Automated Sync: ArgoCD automatically detects new image tag commits and applies them without human intervention.</a:t>
             </a:r>
           </a:p>
           <a:p>
             <a:pPr>
               <a:spcAft>
-                <a:spcPts val="1400"/>
+                <a:spcPts val="800"/>
               </a:spcAft>
-              <a:defRPr sz="1800">
-                <a:solidFill>
-                  <a:srgbClr val="FFFFFF"/>
+              <a:defRPr sz="1200">
+                <a:solidFill>
+                  <a:srgbClr val="F8FAFC"/>
                 </a:solidFill>
                 <a:latin typeface="Calibri"/>
               </a:defRPr>
             </a:pPr>
             <a:r>
-              <a:t>• Gate 5 - Release &amp; GitOps: Push to GHCR with Git commit SHA tags (never :latest) and trigger ArgoCD image bump.</a:t>
+              <a:t>• Self-Healing (selfHeal: true): If an engineer manually alters cluster state via kubectl, ArgoCD immediately reverts the drift.</a:t>
+            </a:r>
+          </a:p>
+          <a:p>
+            <a:pPr>
+              <a:spcAft>
+                <a:spcPts val="800"/>
+              </a:spcAft>
+              <a:defRPr sz="1200">
+                <a:solidFill>
+                  <a:srgbClr val="F8FAFC"/>
+                </a:solidFill>
+                <a:latin typeface="Calibri"/>
+              </a:defRPr>
+            </a:pPr>
+            <a:r>
+              <a:t>• Pruning (prune: true): Deletes orphaned cluster resources when removed from Helm templates.</a:t>
+            </a:r>
+          </a:p>
+        </p:txBody>
+      </p:sp>
+      <p:sp>
+        <p:nvSpPr>
+          <p:cNvPr id="14" name="Rounded Rectangle 13"/>
+          <p:cNvSpPr/>
+          <p:nvPr/>
+        </p:nvSpPr>
+        <p:spPr>
+          <a:xfrm>
+            <a:off x="8036356" y="1874519"/>
+            <a:ext cx="3423818" cy="4434840"/>
+          </a:xfrm>
+          <a:prstGeom prst="roundRect">
+            <a:avLst/>
+          </a:prstGeom>
+          <a:solidFill>
+            <a:srgbClr val="0F172A"/>
+          </a:solidFill>
+          <a:ln w="12700">
+            <a:solidFill>
+              <a:srgbClr val="1E293B"/>
+            </a:solidFill>
+          </a:ln>
+        </p:spPr>
+        <p:style>
+          <a:lnRef idx="1">
+            <a:schemeClr val="accent1"/>
+          </a:lnRef>
+          <a:fillRef idx="3">
+            <a:schemeClr val="accent1"/>
+          </a:fillRef>
+          <a:effectRef idx="2">
+            <a:schemeClr val="accent1"/>
+          </a:effectRef>
+          <a:fontRef idx="minor">
+            <a:schemeClr val="lt1"/>
+          </a:fontRef>
+        </p:style>
+        <p:txBody>
+          <a:bodyPr rtlCol="0" anchor="ctr"/>
+          <a:lstStyle/>
+          <a:p>
+            <a:pPr algn="ctr"/>
+          </a:p>
+        </p:txBody>
+      </p:sp>
+      <p:sp>
+        <p:nvSpPr>
+          <p:cNvPr id="15" name="TextBox 14"/>
+          <p:cNvSpPr txBox="1"/>
+          <p:nvPr/>
+        </p:nvSpPr>
+        <p:spPr>
+          <a:xfrm>
+            <a:off x="8173516" y="2011679"/>
+            <a:ext cx="3149498" cy="411480"/>
+          </a:xfrm>
+          <a:prstGeom prst="rect">
+            <a:avLst/>
+          </a:prstGeom>
+          <a:noFill/>
+        </p:spPr>
+        <p:txBody>
+          <a:bodyPr wrap="square">
+            <a:spAutoFit/>
+          </a:bodyPr>
+          <a:lstStyle/>
+          <a:p>
+            <a:pPr>
+              <a:defRPr sz="1400" b="1">
+                <a:solidFill>
+                  <a:srgbClr val="F59E0B"/>
+                </a:solidFill>
+                <a:latin typeface="Arial"/>
+              </a:defRPr>
+            </a:pPr>
+            <a:r>
+              <a:t>Live Drift Demonstration (Viva Check)</a:t>
+            </a:r>
+          </a:p>
+        </p:txBody>
+      </p:sp>
+      <p:sp>
+        <p:nvSpPr>
+          <p:cNvPr id="16" name="TextBox 15"/>
+          <p:cNvSpPr txBox="1"/>
+          <p:nvPr/>
+        </p:nvSpPr>
+        <p:spPr>
+          <a:xfrm>
+            <a:off x="8173516" y="2468879"/>
+            <a:ext cx="3149498" cy="3703320"/>
+          </a:xfrm>
+          <a:prstGeom prst="rect">
+            <a:avLst/>
+          </a:prstGeom>
+          <a:noFill/>
+        </p:spPr>
+        <p:txBody>
+          <a:bodyPr wrap="square">
+            <a:spAutoFit/>
+          </a:bodyPr>
+          <a:lstStyle/>
+          <a:p>
+            <a:pPr>
+              <a:spcAft>
+                <a:spcPts val="800"/>
+              </a:spcAft>
+              <a:defRPr sz="1200">
+                <a:solidFill>
+                  <a:srgbClr val="F8FAFC"/>
+                </a:solidFill>
+                <a:latin typeface="Calibri"/>
+              </a:defRPr>
+            </a:pPr>
+            <a:r>
+              <a:t>• Step 1: Manually scale backend deployment: 'kubectl scale deployment podiumhq-backend --replicas=5'.</a:t>
+            </a:r>
+          </a:p>
+          <a:p>
+            <a:pPr>
+              <a:spcAft>
+                <a:spcPts val="800"/>
+              </a:spcAft>
+              <a:defRPr sz="1200">
+                <a:solidFill>
+                  <a:srgbClr val="F8FAFC"/>
+                </a:solidFill>
+                <a:latin typeface="Calibri"/>
+              </a:defRPr>
+            </a:pPr>
+            <a:r>
+              <a:t>• Step 2: ArgoCD detects state drift and marks application OutOfSync.</a:t>
+            </a:r>
+          </a:p>
+          <a:p>
+            <a:pPr>
+              <a:spcAft>
+                <a:spcPts val="800"/>
+              </a:spcAft>
+              <a:defRPr sz="1200">
+                <a:solidFill>
+                  <a:srgbClr val="F8FAFC"/>
+                </a:solidFill>
+                <a:latin typeface="Calibri"/>
+              </a:defRPr>
+            </a:pPr>
+            <a:r>
+              <a:t>• Step 3: Within seconds, ArgoCD self-heals the cluster back to the Git source of truth (2 replicas).</a:t>
+            </a:r>
+          </a:p>
+        </p:txBody>
+      </p:sp>
+      <p:sp>
+        <p:nvSpPr>
+          <p:cNvPr id="17" name="TextBox 16"/>
+          <p:cNvSpPr txBox="1"/>
+          <p:nvPr/>
+        </p:nvSpPr>
+        <p:spPr>
+          <a:xfrm>
+            <a:off x="731520" y="6446520"/>
+            <a:ext cx="10728655" cy="274320"/>
+          </a:xfrm>
+          <a:prstGeom prst="rect">
+            <a:avLst/>
+          </a:prstGeom>
+          <a:noFill/>
+        </p:spPr>
+        <p:txBody>
+          <a:bodyPr wrap="none">
+            <a:spAutoFit/>
+          </a:bodyPr>
+          <a:lstStyle/>
+          <a:p>
+            <a:pPr>
+              <a:defRPr sz="900">
+                <a:solidFill>
+                  <a:srgbClr val="94A3B8"/>
+                </a:solidFill>
+                <a:latin typeface="Arial"/>
+              </a:defRPr>
+            </a:pPr>
+            <a:r>
+              <a:t>PodiumHQ DevSecOps Capstone • GitOps, Automated Verification &amp; Observability</a:t>
             </a:r>
           </a:p>
         </p:txBody>
@@ -5838,16 +10536,16 @@
         </p:nvSpPr>
         <p:spPr>
           <a:xfrm>
-            <a:off x="731520" y="731520"/>
-            <a:ext cx="10728655" cy="5394960"/>
+            <a:off x="731520" y="365760"/>
+            <a:ext cx="10728655" cy="54864"/>
           </a:xfrm>
           <a:prstGeom prst="rect">
             <a:avLst/>
           </a:prstGeom>
           <a:solidFill>
-            <a:srgbClr val="0F172A"/>
+            <a:srgbClr val="F59E0B"/>
           </a:solidFill>
-          <a:ln w="19050">
+          <a:ln>
             <a:solidFill>
               <a:srgbClr val="F59E0B"/>
             </a:solidFill>
@@ -5883,8 +10581,80 @@
         </p:nvSpPr>
         <p:spPr>
           <a:xfrm>
-            <a:off x="1097280" y="1005840"/>
-            <a:ext cx="10058400" cy="731520"/>
+            <a:off x="731520" y="502920"/>
+            <a:ext cx="5486400" cy="320040"/>
+          </a:xfrm>
+          <a:prstGeom prst="rect">
+            <a:avLst/>
+          </a:prstGeom>
+          <a:noFill/>
+        </p:spPr>
+        <p:txBody>
+          <a:bodyPr wrap="none">
+            <a:spAutoFit/>
+          </a:bodyPr>
+          <a:lstStyle/>
+          <a:p>
+            <a:pPr>
+              <a:defRPr sz="1000" b="1">
+                <a:solidFill>
+                  <a:srgbClr val="F59E0B"/>
+                </a:solidFill>
+                <a:latin typeface="Arial"/>
+              </a:defRPr>
+            </a:pPr>
+            <a:r>
+              <a:t>MODULE CHECKPOINT • OBSERVABILITY &amp; MONITORING</a:t>
+            </a:r>
+          </a:p>
+        </p:txBody>
+      </p:sp>
+      <p:sp>
+        <p:nvSpPr>
+          <p:cNvPr id="5" name="TextBox 4"/>
+          <p:cNvSpPr txBox="1"/>
+          <p:nvPr/>
+        </p:nvSpPr>
+        <p:spPr>
+          <a:xfrm>
+            <a:off x="8686800" y="502920"/>
+            <a:ext cx="2743200" cy="320040"/>
+          </a:xfrm>
+          <a:prstGeom prst="rect">
+            <a:avLst/>
+          </a:prstGeom>
+          <a:noFill/>
+        </p:spPr>
+        <p:txBody>
+          <a:bodyPr wrap="none">
+            <a:spAutoFit/>
+          </a:bodyPr>
+          <a:lstStyle/>
+          <a:p>
+            <a:pPr algn="r">
+              <a:defRPr sz="1000" b="1">
+                <a:solidFill>
+                  <a:srgbClr val="94A3B8"/>
+                </a:solidFill>
+                <a:latin typeface="Arial"/>
+              </a:defRPr>
+            </a:pPr>
+            <a:r>
+              <a:t>SLIDE 8 OF 10</a:t>
+            </a:r>
+          </a:p>
+        </p:txBody>
+      </p:sp>
+      <p:sp>
+        <p:nvSpPr>
+          <p:cNvPr id="6" name="TextBox 5"/>
+          <p:cNvSpPr txBox="1"/>
+          <p:nvPr/>
+        </p:nvSpPr>
+        <p:spPr>
+          <a:xfrm>
+            <a:off x="731520" y="777240"/>
+            <a:ext cx="10728655" cy="594360"/>
           </a:xfrm>
           <a:prstGeom prst="rect">
             <a:avLst/>
@@ -5898,29 +10668,29 @@
           <a:lstStyle/>
           <a:p>
             <a:pPr>
-              <a:defRPr sz="2800" b="1">
-                <a:solidFill>
-                  <a:srgbClr val="F59E0B"/>
+              <a:defRPr sz="2400" b="1">
+                <a:solidFill>
+                  <a:srgbClr val="F8FAFC"/>
                 </a:solidFill>
                 <a:latin typeface="Arial"/>
               </a:defRPr>
             </a:pPr>
             <a:r>
-              <a:t>Infrastructure as Code: Terraform on AWS</a:t>
-            </a:r>
-          </a:p>
-        </p:txBody>
-      </p:sp>
-      <p:sp>
-        <p:nvSpPr>
-          <p:cNvPr id="5" name="TextBox 4"/>
+              <a:t>Observability: Prometheus &amp; Grafana</a:t>
+            </a:r>
+          </a:p>
+        </p:txBody>
+      </p:sp>
+      <p:sp>
+        <p:nvSpPr>
+          <p:cNvPr id="7" name="TextBox 6"/>
           <p:cNvSpPr txBox="1"/>
           <p:nvPr/>
         </p:nvSpPr>
         <p:spPr>
           <a:xfrm>
-            <a:off x="1097280" y="1645920"/>
-            <a:ext cx="10058400" cy="548640"/>
+            <a:off x="731520" y="1325880"/>
+            <a:ext cx="10728655" cy="411480"/>
           </a:xfrm>
           <a:prstGeom prst="rect">
             <a:avLst/>
@@ -5934,7 +10704,7 @@
           <a:lstStyle/>
           <a:p>
             <a:pPr>
-              <a:defRPr sz="1600">
+              <a:defRPr sz="1300">
                 <a:solidFill>
                   <a:srgbClr val="10B981"/>
                 </a:solidFill>
@@ -5942,21 +10712,66 @@
               </a:defRPr>
             </a:pPr>
             <a:r>
-              <a:t>Modular, Reproducible Cloud Infrastructure Provisioning</a:t>
-            </a:r>
-          </a:p>
-        </p:txBody>
-      </p:sp>
-      <p:sp>
-        <p:nvSpPr>
-          <p:cNvPr id="6" name="TextBox 5"/>
+              <a:t>Full-Stack System Metrics, Custom Domain Telemetry, and Alerting Rules</a:t>
+            </a:r>
+          </a:p>
+        </p:txBody>
+      </p:sp>
+      <p:sp>
+        <p:nvSpPr>
+          <p:cNvPr id="8" name="Rounded Rectangle 7"/>
+          <p:cNvSpPr/>
+          <p:nvPr/>
+        </p:nvSpPr>
+        <p:spPr>
+          <a:xfrm>
+            <a:off x="731520" y="1874519"/>
+            <a:ext cx="3423818" cy="4434840"/>
+          </a:xfrm>
+          <a:prstGeom prst="roundRect">
+            <a:avLst/>
+          </a:prstGeom>
+          <a:solidFill>
+            <a:srgbClr val="0F172A"/>
+          </a:solidFill>
+          <a:ln w="12700">
+            <a:solidFill>
+              <a:srgbClr val="1E293B"/>
+            </a:solidFill>
+          </a:ln>
+        </p:spPr>
+        <p:style>
+          <a:lnRef idx="1">
+            <a:schemeClr val="accent1"/>
+          </a:lnRef>
+          <a:fillRef idx="3">
+            <a:schemeClr val="accent1"/>
+          </a:fillRef>
+          <a:effectRef idx="2">
+            <a:schemeClr val="accent1"/>
+          </a:effectRef>
+          <a:fontRef idx="minor">
+            <a:schemeClr val="lt1"/>
+          </a:fontRef>
+        </p:style>
+        <p:txBody>
+          <a:bodyPr rtlCol="0" anchor="ctr"/>
+          <a:lstStyle/>
+          <a:p>
+            <a:pPr algn="ctr"/>
+          </a:p>
+        </p:txBody>
+      </p:sp>
+      <p:sp>
+        <p:nvSpPr>
+          <p:cNvPr id="9" name="TextBox 8"/>
           <p:cNvSpPr txBox="1"/>
           <p:nvPr/>
         </p:nvSpPr>
         <p:spPr>
           <a:xfrm>
-            <a:off x="1097280" y="2377440"/>
-            <a:ext cx="10058400" cy="3474720"/>
+            <a:off x="868680" y="2011679"/>
+            <a:ext cx="3149498" cy="411480"/>
           </a:xfrm>
           <a:prstGeom prst="rect">
             <a:avLst/>
@@ -5970,66 +10785,426 @@
           <a:lstStyle/>
           <a:p>
             <a:pPr>
+              <a:defRPr sz="1400" b="1">
+                <a:solidFill>
+                  <a:srgbClr val="38BDF8"/>
+                </a:solidFill>
+                <a:latin typeface="Arial"/>
+              </a:defRPr>
+            </a:pPr>
+            <a:r>
+              <a:t>Exposed Telemetry (/metrics)</a:t>
+            </a:r>
+          </a:p>
+        </p:txBody>
+      </p:sp>
+      <p:sp>
+        <p:nvSpPr>
+          <p:cNvPr id="10" name="TextBox 9"/>
+          <p:cNvSpPr txBox="1"/>
+          <p:nvPr/>
+        </p:nvSpPr>
+        <p:spPr>
+          <a:xfrm>
+            <a:off x="868680" y="2468879"/>
+            <a:ext cx="3149498" cy="3703320"/>
+          </a:xfrm>
+          <a:prstGeom prst="rect">
+            <a:avLst/>
+          </a:prstGeom>
+          <a:noFill/>
+        </p:spPr>
+        <p:txBody>
+          <a:bodyPr wrap="square">
+            <a:spAutoFit/>
+          </a:bodyPr>
+          <a:lstStyle/>
+          <a:p>
+            <a:pPr>
               <a:spcAft>
-                <a:spcPts val="1400"/>
+                <a:spcPts val="800"/>
               </a:spcAft>
-              <a:defRPr sz="1800">
-                <a:solidFill>
-                  <a:srgbClr val="FFFFFF"/>
+              <a:defRPr sz="1200">
+                <a:solidFill>
+                  <a:srgbClr val="F8FAFC"/>
                 </a:solidFill>
                 <a:latin typeface="Calibri"/>
               </a:defRPr>
             </a:pPr>
             <a:r>
-              <a:t>• VPC Module: 3 Availability Zones, public/private subnets, NAT Gateways, and EKS tag compliance.</a:t>
+              <a:t>• Standard Metrics: HTTP request counts, response status codes (2xx/4xx/5xx), and latency histograms.</a:t>
             </a:r>
           </a:p>
           <a:p>
             <a:pPr>
               <a:spcAft>
-                <a:spcPts val="1400"/>
+                <a:spcPts val="800"/>
               </a:spcAft>
-              <a:defRPr sz="1800">
-                <a:solidFill>
-                  <a:srgbClr val="FFFFFF"/>
+              <a:defRPr sz="1200">
+                <a:solidFill>
+                  <a:srgbClr val="F8FAFC"/>
                 </a:solidFill>
                 <a:latin typeface="Calibri"/>
               </a:defRPr>
             </a:pPr>
             <a:r>
-              <a:t>• EKS Cluster: Managed Kubernetes control plane (v1.30) with managed node groups across multiple AZs.</a:t>
+              <a:t>• Runtime Telemetry: Python garbage collection, memory usage, CPU seconds, and active file descriptors.</a:t>
             </a:r>
           </a:p>
           <a:p>
             <a:pPr>
               <a:spcAft>
-                <a:spcPts val="1400"/>
+                <a:spcPts val="800"/>
               </a:spcAft>
-              <a:defRPr sz="1800">
-                <a:solidFill>
-                  <a:srgbClr val="FFFFFF"/>
+              <a:defRPr sz="1200">
+                <a:solidFill>
+                  <a:srgbClr val="F8FAFC"/>
                 </a:solidFill>
                 <a:latin typeface="Calibri"/>
               </a:defRPr>
             </a:pPr>
             <a:r>
-              <a:t>• Add-Ons: AWS EBS CSI driver with gp3 StorageClass for persistent data, plus Kubernetes Metrics Server for HPA.</a:t>
-            </a:r>
-          </a:p>
+              <a:t>• Instrumentation: Powered by prometheus-client and prometheus-fastapi-instrumentator.</a:t>
+            </a:r>
+          </a:p>
+        </p:txBody>
+      </p:sp>
+      <p:sp>
+        <p:nvSpPr>
+          <p:cNvPr id="11" name="Rounded Rectangle 10"/>
+          <p:cNvSpPr/>
+          <p:nvPr/>
+        </p:nvSpPr>
+        <p:spPr>
+          <a:xfrm>
+            <a:off x="4383938" y="1874519"/>
+            <a:ext cx="3423818" cy="4434840"/>
+          </a:xfrm>
+          <a:prstGeom prst="roundRect">
+            <a:avLst/>
+          </a:prstGeom>
+          <a:solidFill>
+            <a:srgbClr val="0F172A"/>
+          </a:solidFill>
+          <a:ln w="12700">
+            <a:solidFill>
+              <a:srgbClr val="1E293B"/>
+            </a:solidFill>
+          </a:ln>
+        </p:spPr>
+        <p:style>
+          <a:lnRef idx="1">
+            <a:schemeClr val="accent1"/>
+          </a:lnRef>
+          <a:fillRef idx="3">
+            <a:schemeClr val="accent1"/>
+          </a:fillRef>
+          <a:effectRef idx="2">
+            <a:schemeClr val="accent1"/>
+          </a:effectRef>
+          <a:fontRef idx="minor">
+            <a:schemeClr val="lt1"/>
+          </a:fontRef>
+        </p:style>
+        <p:txBody>
+          <a:bodyPr rtlCol="0" anchor="ctr"/>
+          <a:lstStyle/>
+          <a:p>
+            <a:pPr algn="ctr"/>
+          </a:p>
+        </p:txBody>
+      </p:sp>
+      <p:sp>
+        <p:nvSpPr>
+          <p:cNvPr id="12" name="TextBox 11"/>
+          <p:cNvSpPr txBox="1"/>
+          <p:nvPr/>
+        </p:nvSpPr>
+        <p:spPr>
+          <a:xfrm>
+            <a:off x="4521098" y="2011679"/>
+            <a:ext cx="3149498" cy="411480"/>
+          </a:xfrm>
+          <a:prstGeom prst="rect">
+            <a:avLst/>
+          </a:prstGeom>
+          <a:noFill/>
+        </p:spPr>
+        <p:txBody>
+          <a:bodyPr wrap="square">
+            <a:spAutoFit/>
+          </a:bodyPr>
+          <a:lstStyle/>
+          <a:p>
+            <a:pPr>
+              <a:defRPr sz="1400" b="1">
+                <a:solidFill>
+                  <a:srgbClr val="10B981"/>
+                </a:solidFill>
+                <a:latin typeface="Arial"/>
+              </a:defRPr>
+            </a:pPr>
+            <a:r>
+              <a:t>Custom Domain Business Metrics</a:t>
+            </a:r>
+          </a:p>
+        </p:txBody>
+      </p:sp>
+      <p:sp>
+        <p:nvSpPr>
+          <p:cNvPr id="13" name="TextBox 12"/>
+          <p:cNvSpPr txBox="1"/>
+          <p:nvPr/>
+        </p:nvSpPr>
+        <p:spPr>
+          <a:xfrm>
+            <a:off x="4521098" y="2468879"/>
+            <a:ext cx="3149498" cy="3703320"/>
+          </a:xfrm>
+          <a:prstGeom prst="rect">
+            <a:avLst/>
+          </a:prstGeom>
+          <a:noFill/>
+        </p:spPr>
+        <p:txBody>
+          <a:bodyPr wrap="square">
+            <a:spAutoFit/>
+          </a:bodyPr>
+          <a:lstStyle/>
           <a:p>
             <a:pPr>
               <a:spcAft>
-                <a:spcPts val="1400"/>
+                <a:spcPts val="800"/>
               </a:spcAft>
-              <a:defRPr sz="1800">
-                <a:solidFill>
-                  <a:srgbClr val="FFFFFF"/>
+              <a:defRPr sz="1200">
+                <a:solidFill>
+                  <a:srgbClr val="F8FAFC"/>
                 </a:solidFill>
                 <a:latin typeface="Calibri"/>
               </a:defRPr>
             </a:pPr>
             <a:r>
-              <a:t>• Lifecycle &amp; Cost Safety: Comprehensive terraform.tfvars.example and verified 'terraform destroy' runbook for cost zeroing.</a:t>
+              <a:t>• podiumhq_scores_submitted_total: Counter tracking total judge scores submitted across rounds.</a:t>
+            </a:r>
+          </a:p>
+          <a:p>
+            <a:pPr>
+              <a:spcAft>
+                <a:spcPts val="800"/>
+              </a:spcAft>
+              <a:defRPr sz="1200">
+                <a:solidFill>
+                  <a:srgbClr val="F8FAFC"/>
+                </a:solidFill>
+                <a:latin typeface="Calibri"/>
+              </a:defRPr>
+            </a:pPr>
+            <a:r>
+              <a:t>• podiumhq_teams_by_status: Gauge tracking team counts categorized by lifecycle status (ACTIVE, EVALUATED).</a:t>
+            </a:r>
+          </a:p>
+          <a:p>
+            <a:pPr>
+              <a:spcAft>
+                <a:spcPts val="800"/>
+              </a:spcAft>
+              <a:defRPr sz="1200">
+                <a:solidFill>
+                  <a:srgbClr val="F8FAFC"/>
+                </a:solidFill>
+                <a:latin typeface="Calibri"/>
+              </a:defRPr>
+            </a:pPr>
+            <a:r>
+              <a:t>• podiumhq_leaderboard_requests_total: Counter tracking traffic to the live standings endpoint.</a:t>
+            </a:r>
+          </a:p>
+        </p:txBody>
+      </p:sp>
+      <p:sp>
+        <p:nvSpPr>
+          <p:cNvPr id="14" name="Rounded Rectangle 13"/>
+          <p:cNvSpPr/>
+          <p:nvPr/>
+        </p:nvSpPr>
+        <p:spPr>
+          <a:xfrm>
+            <a:off x="8036356" y="1874519"/>
+            <a:ext cx="3423818" cy="4434840"/>
+          </a:xfrm>
+          <a:prstGeom prst="roundRect">
+            <a:avLst/>
+          </a:prstGeom>
+          <a:solidFill>
+            <a:srgbClr val="0F172A"/>
+          </a:solidFill>
+          <a:ln w="12700">
+            <a:solidFill>
+              <a:srgbClr val="1E293B"/>
+            </a:solidFill>
+          </a:ln>
+        </p:spPr>
+        <p:style>
+          <a:lnRef idx="1">
+            <a:schemeClr val="accent1"/>
+          </a:lnRef>
+          <a:fillRef idx="3">
+            <a:schemeClr val="accent1"/>
+          </a:fillRef>
+          <a:effectRef idx="2">
+            <a:schemeClr val="accent1"/>
+          </a:effectRef>
+          <a:fontRef idx="minor">
+            <a:schemeClr val="lt1"/>
+          </a:fontRef>
+        </p:style>
+        <p:txBody>
+          <a:bodyPr rtlCol="0" anchor="ctr"/>
+          <a:lstStyle/>
+          <a:p>
+            <a:pPr algn="ctr"/>
+          </a:p>
+        </p:txBody>
+      </p:sp>
+      <p:sp>
+        <p:nvSpPr>
+          <p:cNvPr id="15" name="TextBox 14"/>
+          <p:cNvSpPr txBox="1"/>
+          <p:nvPr/>
+        </p:nvSpPr>
+        <p:spPr>
+          <a:xfrm>
+            <a:off x="8173516" y="2011679"/>
+            <a:ext cx="3149498" cy="411480"/>
+          </a:xfrm>
+          <a:prstGeom prst="rect">
+            <a:avLst/>
+          </a:prstGeom>
+          <a:noFill/>
+        </p:spPr>
+        <p:txBody>
+          <a:bodyPr wrap="square">
+            <a:spAutoFit/>
+          </a:bodyPr>
+          <a:lstStyle/>
+          <a:p>
+            <a:pPr>
+              <a:defRPr sz="1400" b="1">
+                <a:solidFill>
+                  <a:srgbClr val="F59E0B"/>
+                </a:solidFill>
+                <a:latin typeface="Arial"/>
+              </a:defRPr>
+            </a:pPr>
+            <a:r>
+              <a:t>Grafana Dashboard &amp; PrometheusRules</a:t>
+            </a:r>
+          </a:p>
+        </p:txBody>
+      </p:sp>
+      <p:sp>
+        <p:nvSpPr>
+          <p:cNvPr id="16" name="TextBox 15"/>
+          <p:cNvSpPr txBox="1"/>
+          <p:nvPr/>
+        </p:nvSpPr>
+        <p:spPr>
+          <a:xfrm>
+            <a:off x="8173516" y="2468879"/>
+            <a:ext cx="3149498" cy="3703320"/>
+          </a:xfrm>
+          <a:prstGeom prst="rect">
+            <a:avLst/>
+          </a:prstGeom>
+          <a:noFill/>
+        </p:spPr>
+        <p:txBody>
+          <a:bodyPr wrap="square">
+            <a:spAutoFit/>
+          </a:bodyPr>
+          <a:lstStyle/>
+          <a:p>
+            <a:pPr>
+              <a:spcAft>
+                <a:spcPts val="800"/>
+              </a:spcAft>
+              <a:defRPr sz="1200">
+                <a:solidFill>
+                  <a:srgbClr val="F8FAFC"/>
+                </a:solidFill>
+                <a:latin typeface="Calibri"/>
+              </a:defRPr>
+            </a:pPr>
+            <a:r>
+              <a:t>• Grafana JSON (monitoring/grafana-dashboard.json): 5+ real-time panels tracking RPS, p95 latency, errors, and domain stats.</a:t>
+            </a:r>
+          </a:p>
+          <a:p>
+            <a:pPr>
+              <a:spcAft>
+                <a:spcPts val="800"/>
+              </a:spcAft>
+              <a:defRPr sz="1200">
+                <a:solidFill>
+                  <a:srgbClr val="F8FAFC"/>
+                </a:solidFill>
+                <a:latin typeface="Calibri"/>
+              </a:defRPr>
+            </a:pPr>
+            <a:r>
+              <a:t>• PrometheusRule (monitoring/alerts.yaml): Automated alerts for High Error Rate (&gt;1% 5xx) and Backend Target Down.</a:t>
+            </a:r>
+          </a:p>
+          <a:p>
+            <a:pPr>
+              <a:spcAft>
+                <a:spcPts val="800"/>
+              </a:spcAft>
+              <a:defRPr sz="1200">
+                <a:solidFill>
+                  <a:srgbClr val="F8FAFC"/>
+                </a:solidFill>
+                <a:latin typeface="Calibri"/>
+              </a:defRPr>
+            </a:pPr>
+            <a:r>
+              <a:t>• ServiceMonitor: Scrapes backend service every 15s via Prometheus Operator.</a:t>
+            </a:r>
+          </a:p>
+        </p:txBody>
+      </p:sp>
+      <p:sp>
+        <p:nvSpPr>
+          <p:cNvPr id="17" name="TextBox 16"/>
+          <p:cNvSpPr txBox="1"/>
+          <p:nvPr/>
+        </p:nvSpPr>
+        <p:spPr>
+          <a:xfrm>
+            <a:off x="731520" y="6446520"/>
+            <a:ext cx="10728655" cy="274320"/>
+          </a:xfrm>
+          <a:prstGeom prst="rect">
+            <a:avLst/>
+          </a:prstGeom>
+          <a:noFill/>
+        </p:spPr>
+        <p:txBody>
+          <a:bodyPr wrap="none">
+            <a:spAutoFit/>
+          </a:bodyPr>
+          <a:lstStyle/>
+          <a:p>
+            <a:pPr>
+              <a:defRPr sz="900">
+                <a:solidFill>
+                  <a:srgbClr val="94A3B8"/>
+                </a:solidFill>
+                <a:latin typeface="Arial"/>
+              </a:defRPr>
+            </a:pPr>
+            <a:r>
+              <a:t>PodiumHQ DevSecOps Capstone • GitOps, Automated Verification &amp; Observability</a:t>
             </a:r>
           </a:p>
         </p:txBody>
@@ -6105,16 +11280,16 @@
         </p:nvSpPr>
         <p:spPr>
           <a:xfrm>
-            <a:off x="731520" y="731520"/>
-            <a:ext cx="10728655" cy="5394960"/>
+            <a:off x="731520" y="365760"/>
+            <a:ext cx="10728655" cy="54864"/>
           </a:xfrm>
           <a:prstGeom prst="rect">
             <a:avLst/>
           </a:prstGeom>
           <a:solidFill>
-            <a:srgbClr val="0F172A"/>
+            <a:srgbClr val="F59E0B"/>
           </a:solidFill>
-          <a:ln w="19050">
+          <a:ln>
             <a:solidFill>
               <a:srgbClr val="F59E0B"/>
             </a:solidFill>
@@ -6150,8 +11325,80 @@
         </p:nvSpPr>
         <p:spPr>
           <a:xfrm>
-            <a:off x="1097280" y="1005840"/>
-            <a:ext cx="10058400" cy="731520"/>
+            <a:off x="731520" y="502920"/>
+            <a:ext cx="5486400" cy="320040"/>
+          </a:xfrm>
+          <a:prstGeom prst="rect">
+            <a:avLst/>
+          </a:prstGeom>
+          <a:noFill/>
+        </p:spPr>
+        <p:txBody>
+          <a:bodyPr wrap="none">
+            <a:spAutoFit/>
+          </a:bodyPr>
+          <a:lstStyle/>
+          <a:p>
+            <a:pPr>
+              <a:defRPr sz="1000" b="1">
+                <a:solidFill>
+                  <a:srgbClr val="F59E0B"/>
+                </a:solidFill>
+                <a:latin typeface="Arial"/>
+              </a:defRPr>
+            </a:pPr>
+            <a:r>
+              <a:t>MODULE CHECKPOINT • VERIFICATION &amp; ENGINEERING CHALLENGES</a:t>
+            </a:r>
+          </a:p>
+        </p:txBody>
+      </p:sp>
+      <p:sp>
+        <p:nvSpPr>
+          <p:cNvPr id="5" name="TextBox 4"/>
+          <p:cNvSpPr txBox="1"/>
+          <p:nvPr/>
+        </p:nvSpPr>
+        <p:spPr>
+          <a:xfrm>
+            <a:off x="8686800" y="502920"/>
+            <a:ext cx="2743200" cy="320040"/>
+          </a:xfrm>
+          <a:prstGeom prst="rect">
+            <a:avLst/>
+          </a:prstGeom>
+          <a:noFill/>
+        </p:spPr>
+        <p:txBody>
+          <a:bodyPr wrap="none">
+            <a:spAutoFit/>
+          </a:bodyPr>
+          <a:lstStyle/>
+          <a:p>
+            <a:pPr algn="r">
+              <a:defRPr sz="1000" b="1">
+                <a:solidFill>
+                  <a:srgbClr val="94A3B8"/>
+                </a:solidFill>
+                <a:latin typeface="Arial"/>
+              </a:defRPr>
+            </a:pPr>
+            <a:r>
+              <a:t>SLIDE 9 OF 10</a:t>
+            </a:r>
+          </a:p>
+        </p:txBody>
+      </p:sp>
+      <p:sp>
+        <p:nvSpPr>
+          <p:cNvPr id="6" name="TextBox 5"/>
+          <p:cNvSpPr txBox="1"/>
+          <p:nvPr/>
+        </p:nvSpPr>
+        <p:spPr>
+          <a:xfrm>
+            <a:off x="731520" y="777240"/>
+            <a:ext cx="10728655" cy="594360"/>
           </a:xfrm>
           <a:prstGeom prst="rect">
             <a:avLst/>
@@ -6165,29 +11412,29 @@
           <a:lstStyle/>
           <a:p>
             <a:pPr>
-              <a:defRPr sz="2800" b="1">
-                <a:solidFill>
-                  <a:srgbClr val="F59E0B"/>
+              <a:defRPr sz="2400" b="1">
+                <a:solidFill>
+                  <a:srgbClr val="F8FAFC"/>
                 </a:solidFill>
                 <a:latin typeface="Arial"/>
               </a:defRPr>
             </a:pPr>
             <a:r>
-              <a:t>Kubernetes Packaging: Helm &amp; GitOps with ArgoCD</a:t>
-            </a:r>
-          </a:p>
-        </p:txBody>
-      </p:sp>
-      <p:sp>
-        <p:nvSpPr>
-          <p:cNvPr id="5" name="TextBox 4"/>
+              <a:t>Testing, Security, &amp; Real Challenges</a:t>
+            </a:r>
+          </a:p>
+        </p:txBody>
+      </p:sp>
+      <p:sp>
+        <p:nvSpPr>
+          <p:cNvPr id="7" name="TextBox 6"/>
           <p:cNvSpPr txBox="1"/>
           <p:nvPr/>
         </p:nvSpPr>
         <p:spPr>
           <a:xfrm>
-            <a:off x="1097280" y="1645920"/>
-            <a:ext cx="10058400" cy="548640"/>
+            <a:off x="731520" y="1325880"/>
+            <a:ext cx="10728655" cy="411480"/>
           </a:xfrm>
           <a:prstGeom prst="rect">
             <a:avLst/>
@@ -6201,7 +11448,7 @@
           <a:lstStyle/>
           <a:p>
             <a:pPr>
-              <a:defRPr sz="1600">
+              <a:defRPr sz="1300">
                 <a:solidFill>
                   <a:srgbClr val="10B981"/>
                 </a:solidFill>
@@ -6209,21 +11456,66 @@
               </a:defRPr>
             </a:pPr>
             <a:r>
-              <a:t>Declarative Cloud-Native Delivery &amp; Automated Drift Healing</a:t>
-            </a:r>
-          </a:p>
-        </p:txBody>
-      </p:sp>
-      <p:sp>
-        <p:nvSpPr>
-          <p:cNvPr id="6" name="TextBox 5"/>
+              <a:t>91% Test Coverage, Container Non-Root Verification, and Practical Bug Fixes</a:t>
+            </a:r>
+          </a:p>
+        </p:txBody>
+      </p:sp>
+      <p:sp>
+        <p:nvSpPr>
+          <p:cNvPr id="8" name="Rounded Rectangle 7"/>
+          <p:cNvSpPr/>
+          <p:nvPr/>
+        </p:nvSpPr>
+        <p:spPr>
+          <a:xfrm>
+            <a:off x="731520" y="1874519"/>
+            <a:ext cx="3423818" cy="4434840"/>
+          </a:xfrm>
+          <a:prstGeom prst="roundRect">
+            <a:avLst/>
+          </a:prstGeom>
+          <a:solidFill>
+            <a:srgbClr val="0F172A"/>
+          </a:solidFill>
+          <a:ln w="12700">
+            <a:solidFill>
+              <a:srgbClr val="1E293B"/>
+            </a:solidFill>
+          </a:ln>
+        </p:spPr>
+        <p:style>
+          <a:lnRef idx="1">
+            <a:schemeClr val="accent1"/>
+          </a:lnRef>
+          <a:fillRef idx="3">
+            <a:schemeClr val="accent1"/>
+          </a:fillRef>
+          <a:effectRef idx="2">
+            <a:schemeClr val="accent1"/>
+          </a:effectRef>
+          <a:fontRef idx="minor">
+            <a:schemeClr val="lt1"/>
+          </a:fontRef>
+        </p:style>
+        <p:txBody>
+          <a:bodyPr rtlCol="0" anchor="ctr"/>
+          <a:lstStyle/>
+          <a:p>
+            <a:pPr algn="ctr"/>
+          </a:p>
+        </p:txBody>
+      </p:sp>
+      <p:sp>
+        <p:nvSpPr>
+          <p:cNvPr id="9" name="TextBox 8"/>
           <p:cNvSpPr txBox="1"/>
           <p:nvPr/>
         </p:nvSpPr>
         <p:spPr>
           <a:xfrm>
-            <a:off x="1097280" y="2377440"/>
-            <a:ext cx="10058400" cy="3474720"/>
+            <a:off x="868680" y="2011679"/>
+            <a:ext cx="3149498" cy="411480"/>
           </a:xfrm>
           <a:prstGeom prst="rect">
             <a:avLst/>
@@ -6237,66 +11529,426 @@
           <a:lstStyle/>
           <a:p>
             <a:pPr>
+              <a:defRPr sz="1400" b="1">
+                <a:solidFill>
+                  <a:srgbClr val="10B981"/>
+                </a:solidFill>
+                <a:latin typeface="Arial"/>
+              </a:defRPr>
+            </a:pPr>
+            <a:r>
+              <a:t>Automated Testing Verification</a:t>
+            </a:r>
+          </a:p>
+        </p:txBody>
+      </p:sp>
+      <p:sp>
+        <p:nvSpPr>
+          <p:cNvPr id="10" name="TextBox 9"/>
+          <p:cNvSpPr txBox="1"/>
+          <p:nvPr/>
+        </p:nvSpPr>
+        <p:spPr>
+          <a:xfrm>
+            <a:off x="868680" y="2468879"/>
+            <a:ext cx="3149498" cy="3703320"/>
+          </a:xfrm>
+          <a:prstGeom prst="rect">
+            <a:avLst/>
+          </a:prstGeom>
+          <a:noFill/>
+        </p:spPr>
+        <p:txBody>
+          <a:bodyPr wrap="square">
+            <a:spAutoFit/>
+          </a:bodyPr>
+          <a:lstStyle/>
+          <a:p>
+            <a:pPr>
               <a:spcAft>
-                <a:spcPts val="1400"/>
+                <a:spcPts val="800"/>
               </a:spcAft>
-              <a:defRPr sz="1800">
-                <a:solidFill>
-                  <a:srgbClr val="FFFFFF"/>
+              <a:defRPr sz="1200">
+                <a:solidFill>
+                  <a:srgbClr val="F8FAFC"/>
                 </a:solidFill>
                 <a:latin typeface="Calibri"/>
               </a:defRPr>
             </a:pPr>
             <a:r>
-              <a:t>• Helm Chart: Modular templates for Backend, Frontend, PostgreSQL StatefulSet, Ingress, and HorizontalPodAutoscaler.</a:t>
+              <a:t>• Pytest Results: 31 passed in 1.32s with 90.99% overall code coverage (target: &gt;=80%).</a:t>
             </a:r>
           </a:p>
           <a:p>
             <a:pPr>
               <a:spcAft>
-                <a:spcPts val="1400"/>
+                <a:spcPts val="800"/>
               </a:spcAft>
-              <a:defRPr sz="1800">
-                <a:solidFill>
-                  <a:srgbClr val="FFFFFF"/>
+              <a:defRPr sz="1200">
+                <a:solidFill>
+                  <a:srgbClr val="F8FAFC"/>
                 </a:solidFill>
                 <a:latin typeface="Calibri"/>
               </a:defRPr>
             </a:pPr>
             <a:r>
-              <a:t>• Migration Job Hook: Database migrations run as a Helm pre-upgrade/pre-install Job, preventing container restart race conditions.</a:t>
+              <a:t>• Test Isolation: SQLite with StaticPool ensures zero interference between test runs.</a:t>
             </a:r>
           </a:p>
           <a:p>
             <a:pPr>
               <a:spcAft>
-                <a:spcPts val="1400"/>
+                <a:spcPts val="800"/>
               </a:spcAft>
-              <a:defRPr sz="1800">
-                <a:solidFill>
-                  <a:srgbClr val="FFFFFF"/>
+              <a:defRPr sz="1200">
+                <a:solidFill>
+                  <a:srgbClr val="F8FAFC"/>
                 </a:solidFill>
                 <a:latin typeface="Calibri"/>
               </a:defRPr>
             </a:pPr>
             <a:r>
-              <a:t>• Pod Security Standards: Restricted securityContext with runAsNonRoot: true, drop ALL capabilities, read-only root filesystem.</a:t>
-            </a:r>
-          </a:p>
+              <a:t>• Business Logic Verified: Tie-breaking, duplicate score rejection, and round lifecycle locks.</a:t>
+            </a:r>
+          </a:p>
+        </p:txBody>
+      </p:sp>
+      <p:sp>
+        <p:nvSpPr>
+          <p:cNvPr id="11" name="Rounded Rectangle 10"/>
+          <p:cNvSpPr/>
+          <p:nvPr/>
+        </p:nvSpPr>
+        <p:spPr>
+          <a:xfrm>
+            <a:off x="4383938" y="1874519"/>
+            <a:ext cx="3423818" cy="4434840"/>
+          </a:xfrm>
+          <a:prstGeom prst="roundRect">
+            <a:avLst/>
+          </a:prstGeom>
+          <a:solidFill>
+            <a:srgbClr val="0F172A"/>
+          </a:solidFill>
+          <a:ln w="12700">
+            <a:solidFill>
+              <a:srgbClr val="1E293B"/>
+            </a:solidFill>
+          </a:ln>
+        </p:spPr>
+        <p:style>
+          <a:lnRef idx="1">
+            <a:schemeClr val="accent1"/>
+          </a:lnRef>
+          <a:fillRef idx="3">
+            <a:schemeClr val="accent1"/>
+          </a:fillRef>
+          <a:effectRef idx="2">
+            <a:schemeClr val="accent1"/>
+          </a:effectRef>
+          <a:fontRef idx="minor">
+            <a:schemeClr val="lt1"/>
+          </a:fontRef>
+        </p:style>
+        <p:txBody>
+          <a:bodyPr rtlCol="0" anchor="ctr"/>
+          <a:lstStyle/>
+          <a:p>
+            <a:pPr algn="ctr"/>
+          </a:p>
+        </p:txBody>
+      </p:sp>
+      <p:sp>
+        <p:nvSpPr>
+          <p:cNvPr id="12" name="TextBox 11"/>
+          <p:cNvSpPr txBox="1"/>
+          <p:nvPr/>
+        </p:nvSpPr>
+        <p:spPr>
+          <a:xfrm>
+            <a:off x="4521098" y="2011679"/>
+            <a:ext cx="3149498" cy="411480"/>
+          </a:xfrm>
+          <a:prstGeom prst="rect">
+            <a:avLst/>
+          </a:prstGeom>
+          <a:noFill/>
+        </p:spPr>
+        <p:txBody>
+          <a:bodyPr wrap="square">
+            <a:spAutoFit/>
+          </a:bodyPr>
+          <a:lstStyle/>
+          <a:p>
+            <a:pPr>
+              <a:defRPr sz="1400" b="1">
+                <a:solidFill>
+                  <a:srgbClr val="38BDF8"/>
+                </a:solidFill>
+                <a:latin typeface="Arial"/>
+              </a:defRPr>
+            </a:pPr>
+            <a:r>
+              <a:t>Container Security Verification</a:t>
+            </a:r>
+          </a:p>
+        </p:txBody>
+      </p:sp>
+      <p:sp>
+        <p:nvSpPr>
+          <p:cNvPr id="13" name="TextBox 12"/>
+          <p:cNvSpPr txBox="1"/>
+          <p:nvPr/>
+        </p:nvSpPr>
+        <p:spPr>
+          <a:xfrm>
+            <a:off x="4521098" y="2468879"/>
+            <a:ext cx="3149498" cy="3703320"/>
+          </a:xfrm>
+          <a:prstGeom prst="rect">
+            <a:avLst/>
+          </a:prstGeom>
+          <a:noFill/>
+        </p:spPr>
+        <p:txBody>
+          <a:bodyPr wrap="square">
+            <a:spAutoFit/>
+          </a:bodyPr>
+          <a:lstStyle/>
           <a:p>
             <a:pPr>
               <a:spcAft>
-                <a:spcPts val="1400"/>
+                <a:spcPts val="800"/>
               </a:spcAft>
-              <a:defRPr sz="1800">
-                <a:solidFill>
-                  <a:srgbClr val="FFFFFF"/>
+              <a:defRPr sz="1200">
+                <a:solidFill>
+                  <a:srgbClr val="F8FAFC"/>
                 </a:solidFill>
                 <a:latin typeface="Calibri"/>
               </a:defRPr>
             </a:pPr>
             <a:r>
-              <a:t>• ArgoCD Synchronization: Automated sync with selfHeal=true and prune=true; reconciles cluster drift in real time.</a:t>
+              <a:t>• Backend: Verified non-root execution via 'docker compose exec backend id' -&gt; uid=10001(appuser).</a:t>
+            </a:r>
+          </a:p>
+          <a:p>
+            <a:pPr>
+              <a:spcAft>
+                <a:spcPts val="800"/>
+              </a:spcAft>
+              <a:defRPr sz="1200">
+                <a:solidFill>
+                  <a:srgbClr val="F8FAFC"/>
+                </a:solidFill>
+                <a:latin typeface="Calibri"/>
+              </a:defRPr>
+            </a:pPr>
+            <a:r>
+              <a:t>• Frontend: Verified unprivileged execution via 'docker compose exec frontend id' -&gt; uid=101(nginx).</a:t>
+            </a:r>
+          </a:p>
+          <a:p>
+            <a:pPr>
+              <a:spcAft>
+                <a:spcPts val="800"/>
+              </a:spcAft>
+              <a:defRPr sz="1200">
+                <a:solidFill>
+                  <a:srgbClr val="F8FAFC"/>
+                </a:solidFill>
+                <a:latin typeface="Calibri"/>
+              </a:defRPr>
+            </a:pPr>
+            <a:r>
+              <a:t>• Secret Scanning: Gitleaks scan confirmed zero committed credentials or API keys in Git history.</a:t>
+            </a:r>
+          </a:p>
+        </p:txBody>
+      </p:sp>
+      <p:sp>
+        <p:nvSpPr>
+          <p:cNvPr id="14" name="Rounded Rectangle 13"/>
+          <p:cNvSpPr/>
+          <p:nvPr/>
+        </p:nvSpPr>
+        <p:spPr>
+          <a:xfrm>
+            <a:off x="8036356" y="1874519"/>
+            <a:ext cx="3423818" cy="4434840"/>
+          </a:xfrm>
+          <a:prstGeom prst="roundRect">
+            <a:avLst/>
+          </a:prstGeom>
+          <a:solidFill>
+            <a:srgbClr val="0F172A"/>
+          </a:solidFill>
+          <a:ln w="12700">
+            <a:solidFill>
+              <a:srgbClr val="1E293B"/>
+            </a:solidFill>
+          </a:ln>
+        </p:spPr>
+        <p:style>
+          <a:lnRef idx="1">
+            <a:schemeClr val="accent1"/>
+          </a:lnRef>
+          <a:fillRef idx="3">
+            <a:schemeClr val="accent1"/>
+          </a:fillRef>
+          <a:effectRef idx="2">
+            <a:schemeClr val="accent1"/>
+          </a:effectRef>
+          <a:fontRef idx="minor">
+            <a:schemeClr val="lt1"/>
+          </a:fontRef>
+        </p:style>
+        <p:txBody>
+          <a:bodyPr rtlCol="0" anchor="ctr"/>
+          <a:lstStyle/>
+          <a:p>
+            <a:pPr algn="ctr"/>
+          </a:p>
+        </p:txBody>
+      </p:sp>
+      <p:sp>
+        <p:nvSpPr>
+          <p:cNvPr id="15" name="TextBox 14"/>
+          <p:cNvSpPr txBox="1"/>
+          <p:nvPr/>
+        </p:nvSpPr>
+        <p:spPr>
+          <a:xfrm>
+            <a:off x="8173516" y="2011679"/>
+            <a:ext cx="3149498" cy="411480"/>
+          </a:xfrm>
+          <a:prstGeom prst="rect">
+            <a:avLst/>
+          </a:prstGeom>
+          <a:noFill/>
+        </p:spPr>
+        <p:txBody>
+          <a:bodyPr wrap="square">
+            <a:spAutoFit/>
+          </a:bodyPr>
+          <a:lstStyle/>
+          <a:p>
+            <a:pPr>
+              <a:defRPr sz="1400" b="1">
+                <a:solidFill>
+                  <a:srgbClr val="F59E0B"/>
+                </a:solidFill>
+                <a:latin typeface="Arial"/>
+              </a:defRPr>
+            </a:pPr>
+            <a:r>
+              <a:t>Real Implementation Challenges Solved</a:t>
+            </a:r>
+          </a:p>
+        </p:txBody>
+      </p:sp>
+      <p:sp>
+        <p:nvSpPr>
+          <p:cNvPr id="16" name="TextBox 15"/>
+          <p:cNvSpPr txBox="1"/>
+          <p:nvPr/>
+        </p:nvSpPr>
+        <p:spPr>
+          <a:xfrm>
+            <a:off x="8173516" y="2468879"/>
+            <a:ext cx="3149498" cy="3703320"/>
+          </a:xfrm>
+          <a:prstGeom prst="rect">
+            <a:avLst/>
+          </a:prstGeom>
+          <a:noFill/>
+        </p:spPr>
+        <p:txBody>
+          <a:bodyPr wrap="square">
+            <a:spAutoFit/>
+          </a:bodyPr>
+          <a:lstStyle/>
+          <a:p>
+            <a:pPr>
+              <a:spcAft>
+                <a:spcPts val="800"/>
+              </a:spcAft>
+              <a:defRPr sz="1200">
+                <a:solidFill>
+                  <a:srgbClr val="F8FAFC"/>
+                </a:solidFill>
+                <a:latin typeface="Calibri"/>
+              </a:defRPr>
+            </a:pPr>
+            <a:r>
+              <a:t>• Challenge 1: In-container SQLite coverage database was blocked because /app was owned by root. Fixed by chowning /app to appuser.</a:t>
+            </a:r>
+          </a:p>
+          <a:p>
+            <a:pPr>
+              <a:spcAft>
+                <a:spcPts val="800"/>
+              </a:spcAft>
+              <a:defRPr sz="1200">
+                <a:solidFill>
+                  <a:srgbClr val="F8FAFC"/>
+                </a:solidFill>
+                <a:latin typeface="Calibri"/>
+              </a:defRPr>
+            </a:pPr>
+            <a:r>
+              <a:t>• Challenge 2: Frontend healthcheck failed with connection refused because BusyBox wget resolved localhost to IPv6 ::1. Fixed by adding listen [::]:8080.</a:t>
+            </a:r>
+          </a:p>
+          <a:p>
+            <a:pPr>
+              <a:spcAft>
+                <a:spcPts val="800"/>
+              </a:spcAft>
+              <a:defRPr sz="1200">
+                <a:solidFill>
+                  <a:srgbClr val="F8FAFC"/>
+                </a:solidFill>
+                <a:latin typeface="Calibri"/>
+              </a:defRPr>
+            </a:pPr>
+            <a:r>
+              <a:t>• Challenge 3: Test dependencies were excluded by .dockerignore. Fixed by selectively including tests for in-container validation.</a:t>
+            </a:r>
+          </a:p>
+        </p:txBody>
+      </p:sp>
+      <p:sp>
+        <p:nvSpPr>
+          <p:cNvPr id="17" name="TextBox 16"/>
+          <p:cNvSpPr txBox="1"/>
+          <p:nvPr/>
+        </p:nvSpPr>
+        <p:spPr>
+          <a:xfrm>
+            <a:off x="731520" y="6446520"/>
+            <a:ext cx="10728655" cy="274320"/>
+          </a:xfrm>
+          <a:prstGeom prst="rect">
+            <a:avLst/>
+          </a:prstGeom>
+          <a:noFill/>
+        </p:spPr>
+        <p:txBody>
+          <a:bodyPr wrap="none">
+            <a:spAutoFit/>
+          </a:bodyPr>
+          <a:lstStyle/>
+          <a:p>
+            <a:pPr>
+              <a:defRPr sz="900">
+                <a:solidFill>
+                  <a:srgbClr val="94A3B8"/>
+                </a:solidFill>
+                <a:latin typeface="Arial"/>
+              </a:defRPr>
+            </a:pPr>
+            <a:r>
+              <a:t>PodiumHQ DevSecOps Capstone • GitOps, Automated Verification &amp; Observability</a:t>
             </a:r>
           </a:p>
         </p:txBody>
@@ -6627,4 +12279,324 @@
   </a:objectDefaults>
   <a:extraClrSchemeLst/>
 </a:theme>
+</file>
+
+<file path=ppt/theme/theme2.xml><?xml version="1.0" encoding="utf-8"?>
+<a:theme xmlns:a="http://schemas.openxmlformats.org/drawingml/2006/main" name="Office Theme">
+  <a:themeElements>
+    <a:clrScheme name="Office">
+      <a:dk1>
+        <a:sysClr val="windowText" lastClr="000000"/>
+      </a:dk1>
+      <a:lt1>
+        <a:sysClr val="window" lastClr="FFFFFF"/>
+      </a:lt1>
+      <a:dk2>
+        <a:srgbClr val="1F497D"/>
+      </a:dk2>
+      <a:lt2>
+        <a:srgbClr val="EEECE1"/>
+      </a:lt2>
+      <a:accent1>
+        <a:srgbClr val="4F81BD"/>
+      </a:accent1>
+      <a:accent2>
+        <a:srgbClr val="C0504D"/>
+      </a:accent2>
+      <a:accent3>
+        <a:srgbClr val="9BBB59"/>
+      </a:accent3>
+      <a:accent4>
+        <a:srgbClr val="8064A2"/>
+      </a:accent4>
+      <a:accent5>
+        <a:srgbClr val="4BACC6"/>
+      </a:accent5>
+      <a:accent6>
+        <a:srgbClr val="F79646"/>
+      </a:accent6>
+      <a:hlink>
+        <a:srgbClr val="0000FF"/>
+      </a:hlink>
+      <a:folHlink>
+        <a:srgbClr val="800080"/>
+      </a:folHlink>
+    </a:clrScheme>
+    <a:fontScheme name="Office">
+      <a:majorFont>
+        <a:latin typeface="Calibri"/>
+        <a:ea typeface=""/>
+        <a:cs typeface=""/>
+        <a:font script="Jpan" typeface="ＭＳ Ｐゴシック"/>
+        <a:font script="Hang" typeface="맑은 고딕"/>
+        <a:font script="Hans" typeface="宋体"/>
+        <a:font script="Hant" typeface="新細明體"/>
+        <a:font script="Arab" typeface="Times New Roman"/>
+        <a:font script="Hebr" typeface="Times New Roman"/>
+        <a:font script="Thai" typeface="Angsana New"/>
+        <a:font script="Ethi" typeface="Nyala"/>
+        <a:font script="Beng" typeface="Vrinda"/>
+        <a:font script="Gujr" typeface="Shruti"/>
+        <a:font script="Khmr" typeface="MoolBoran"/>
+        <a:font script="Knda" typeface="Tunga"/>
+        <a:font script="Guru" typeface="Raavi"/>
+        <a:font script="Cans" typeface="Euphemia"/>
+        <a:font script="Cher" typeface="Plantagenet Cherokee"/>
+        <a:font script="Yiii" typeface="Microsoft Yi Baiti"/>
+        <a:font script="Tibt" typeface="Microsoft Himalaya"/>
+        <a:font script="Thaa" typeface="MV Boli"/>
+        <a:font script="Deva" typeface="Mangal"/>
+        <a:font script="Telu" typeface="Gautami"/>
+        <a:font script="Taml" typeface="Latha"/>
+        <a:font script="Syrc" typeface="Estrangelo Edessa"/>
+        <a:font script="Orya" typeface="Kalinga"/>
+        <a:font script="Mlym" typeface="Kartika"/>
+        <a:font script="Laoo" typeface="DokChampa"/>
+        <a:font script="Sinh" typeface="Iskoola Pota"/>
+        <a:font script="Mong" typeface="Mongolian Baiti"/>
+        <a:font script="Viet" typeface="Times New Roman"/>
+        <a:font script="Uigh" typeface="Microsoft Uighur"/>
+        <a:font script="Geor" typeface="Sylfaen"/>
+      </a:majorFont>
+      <a:minorFont>
+        <a:latin typeface="Calibri"/>
+        <a:ea typeface=""/>
+        <a:cs typeface=""/>
+        <a:font script="Jpan" typeface="ＭＳ Ｐゴシック"/>
+        <a:font script="Hang" typeface="맑은 고딕"/>
+        <a:font script="Hans" typeface="宋体"/>
+        <a:font script="Hant" typeface="新細明體"/>
+        <a:font script="Arab" typeface="Arial"/>
+        <a:font script="Hebr" typeface="Arial"/>
+        <a:font script="Thai" typeface="Cordia New"/>
+        <a:font script="Ethi" typeface="Nyala"/>
+        <a:font script="Beng" typeface="Vrinda"/>
+        <a:font script="Gujr" typeface="Shruti"/>
+        <a:font script="Khmr" typeface="DaunPenh"/>
+        <a:font script="Knda" typeface="Tunga"/>
+        <a:font script="Guru" typeface="Raavi"/>
+        <a:font script="Cans" typeface="Euphemia"/>
+        <a:font script="Cher" typeface="Plantagenet Cherokee"/>
+        <a:font script="Yiii" typeface="Microsoft Yi Baiti"/>
+        <a:font script="Tibt" typeface="Microsoft Himalaya"/>
+        <a:font script="Thaa" typeface="MV Boli"/>
+        <a:font script="Deva" typeface="Mangal"/>
+        <a:font script="Telu" typeface="Gautami"/>
+        <a:font script="Taml" typeface="Latha"/>
+        <a:font script="Syrc" typeface="Estrangelo Edessa"/>
+        <a:font script="Orya" typeface="Kalinga"/>
+        <a:font script="Mlym" typeface="Kartika"/>
+        <a:font script="Laoo" typeface="DokChampa"/>
+        <a:font script="Sinh" typeface="Iskoola Pota"/>
+        <a:font script="Mong" typeface="Mongolian Baiti"/>
+        <a:font script="Viet" typeface="Arial"/>
+        <a:font script="Uigh" typeface="Microsoft Uighur"/>
+        <a:font script="Geor" typeface="Sylfaen"/>
+      </a:minorFont>
+    </a:fontScheme>
+    <a:fmtScheme name="Office">
+      <a:fillStyleLst>
+        <a:solidFill>
+          <a:schemeClr val="phClr"/>
+        </a:solidFill>
+        <a:gradFill rotWithShape="1">
+          <a:gsLst>
+            <a:gs pos="0">
+              <a:schemeClr val="phClr">
+                <a:tint val="50000"/>
+                <a:satMod val="300000"/>
+              </a:schemeClr>
+            </a:gs>
+            <a:gs pos="35000">
+              <a:schemeClr val="phClr">
+                <a:tint val="37000"/>
+                <a:satMod val="300000"/>
+              </a:schemeClr>
+            </a:gs>
+            <a:gs pos="100000">
+              <a:schemeClr val="phClr">
+                <a:tint val="15000"/>
+                <a:satMod val="350000"/>
+              </a:schemeClr>
+            </a:gs>
+          </a:gsLst>
+          <a:lin ang="16200000" scaled="1"/>
+        </a:gradFill>
+        <a:gradFill rotWithShape="1">
+          <a:gsLst>
+            <a:gs pos="0">
+              <a:schemeClr val="phClr">
+                <a:tint val="100000"/>
+                <a:shade val="100000"/>
+                <a:satMod val="130000"/>
+              </a:schemeClr>
+            </a:gs>
+            <a:gs pos="100000">
+              <a:schemeClr val="phClr">
+                <a:tint val="50000"/>
+                <a:shade val="100000"/>
+                <a:satMod val="350000"/>
+              </a:schemeClr>
+            </a:gs>
+          </a:gsLst>
+          <a:lin ang="16200000" scaled="0"/>
+        </a:gradFill>
+      </a:fillStyleLst>
+      <a:lnStyleLst>
+        <a:ln w="9525" cap="flat" cmpd="sng" algn="ctr">
+          <a:solidFill>
+            <a:schemeClr val="phClr">
+              <a:shade val="95000"/>
+              <a:satMod val="105000"/>
+            </a:schemeClr>
+          </a:solidFill>
+          <a:prstDash val="solid"/>
+        </a:ln>
+        <a:ln w="25400" cap="flat" cmpd="sng" algn="ctr">
+          <a:solidFill>
+            <a:schemeClr val="phClr"/>
+          </a:solidFill>
+          <a:prstDash val="solid"/>
+        </a:ln>
+        <a:ln w="38100" cap="flat" cmpd="sng" algn="ctr">
+          <a:solidFill>
+            <a:schemeClr val="phClr"/>
+          </a:solidFill>
+          <a:prstDash val="solid"/>
+        </a:ln>
+      </a:lnStyleLst>
+      <a:effectStyleLst>
+        <a:effectStyle>
+          <a:effectLst>
+            <a:outerShdw blurRad="40000" dist="20000" dir="5400000" rotWithShape="0">
+              <a:srgbClr val="000000">
+                <a:alpha val="38000"/>
+              </a:srgbClr>
+            </a:outerShdw>
+          </a:effectLst>
+        </a:effectStyle>
+        <a:effectStyle>
+          <a:effectLst>
+            <a:outerShdw blurRad="40000" dist="23000" dir="5400000" rotWithShape="0">
+              <a:srgbClr val="000000">
+                <a:alpha val="35000"/>
+              </a:srgbClr>
+            </a:outerShdw>
+          </a:effectLst>
+        </a:effectStyle>
+        <a:effectStyle>
+          <a:effectLst>
+            <a:outerShdw blurRad="40000" dist="23000" dir="5400000" rotWithShape="0">
+              <a:srgbClr val="000000">
+                <a:alpha val="35000"/>
+              </a:srgbClr>
+            </a:outerShdw>
+          </a:effectLst>
+          <a:scene3d>
+            <a:camera prst="orthographicFront">
+              <a:rot lat="0" lon="0" rev="0"/>
+            </a:camera>
+            <a:lightRig rig="threePt" dir="t">
+              <a:rot lat="0" lon="0" rev="1200000"/>
+            </a:lightRig>
+          </a:scene3d>
+          <a:sp3d>
+            <a:bevelT w="63500" h="25400"/>
+          </a:sp3d>
+        </a:effectStyle>
+      </a:effectStyleLst>
+      <a:bgFillStyleLst>
+        <a:solidFill>
+          <a:schemeClr val="phClr"/>
+        </a:solidFill>
+        <a:gradFill rotWithShape="1">
+          <a:gsLst>
+            <a:gs pos="0">
+              <a:schemeClr val="phClr">
+                <a:tint val="40000"/>
+                <a:satMod val="350000"/>
+              </a:schemeClr>
+            </a:gs>
+            <a:gs pos="40000">
+              <a:schemeClr val="phClr">
+                <a:tint val="45000"/>
+                <a:shade val="99000"/>
+                <a:satMod val="350000"/>
+              </a:schemeClr>
+            </a:gs>
+            <a:gs pos="100000">
+              <a:schemeClr val="phClr">
+                <a:shade val="20000"/>
+                <a:satMod val="255000"/>
+              </a:schemeClr>
+            </a:gs>
+          </a:gsLst>
+          <a:path path="circle">
+            <a:fillToRect l="50000" t="-80000" r="50000" b="180000"/>
+          </a:path>
+        </a:gradFill>
+        <a:gradFill rotWithShape="1">
+          <a:gsLst>
+            <a:gs pos="0">
+              <a:schemeClr val="phClr">
+                <a:tint val="80000"/>
+                <a:satMod val="300000"/>
+              </a:schemeClr>
+            </a:gs>
+            <a:gs pos="100000">
+              <a:schemeClr val="phClr">
+                <a:shade val="30000"/>
+                <a:satMod val="200000"/>
+              </a:schemeClr>
+            </a:gs>
+          </a:gsLst>
+          <a:path path="circle">
+            <a:fillToRect l="50000" t="50000" r="50000" b="50000"/>
+          </a:path>
+        </a:gradFill>
+      </a:bgFillStyleLst>
+    </a:fmtScheme>
+  </a:themeElements>
+  <a:objectDefaults>
+    <a:spDef>
+      <a:spPr/>
+      <a:bodyPr/>
+      <a:lstStyle/>
+      <a:style>
+        <a:lnRef idx="1">
+          <a:schemeClr val="accent1"/>
+        </a:lnRef>
+        <a:fillRef idx="3">
+          <a:schemeClr val="accent1"/>
+        </a:fillRef>
+        <a:effectRef idx="2">
+          <a:schemeClr val="accent1"/>
+        </a:effectRef>
+        <a:fontRef idx="minor">
+          <a:schemeClr val="lt1"/>
+        </a:fontRef>
+      </a:style>
+    </a:spDef>
+    <a:lnDef>
+      <a:spPr/>
+      <a:bodyPr/>
+      <a:lstStyle/>
+      <a:style>
+        <a:lnRef idx="2">
+          <a:schemeClr val="accent1"/>
+        </a:lnRef>
+        <a:fillRef idx="0">
+          <a:schemeClr val="accent1"/>
+        </a:fillRef>
+        <a:effectRef idx="1">
+          <a:schemeClr val="accent1"/>
+        </a:effectRef>
+        <a:fontRef idx="minor">
+          <a:schemeClr val="tx1"/>
+        </a:fontRef>
+      </a:style>
+    </a:lnDef>
+  </a:objectDefaults>
+  <a:extraClrSchemeLst/>
+</a:theme>
 </file>
--- a/demo/slides.pptx
+++ b/demo/slides.pptx
@@ -511,7 +511,7 @@
           <a:lstStyle/>
           <a:p>
             <a:r>
-              <a:t>Good morning, evaluators. Welcome to my DevSecOps Capstone presentation on PodiumHQ. Rather than cloning a generic TaskBoard, PodiumHQ addresses the operational challenge of running large-scale hackathons and technical project evaluations. In this presentation, I will walk you through the entire cloud-native lifecycle: from our 91% coverage backend and hardened non-root containers, to our GitHub Actions CI/CD with Trivy gates, Terraform AWS infrastructure, ArgoCD GitOps, and Prometheus observability.</a:t>
+              <a:t>Hi everyone. My name is [Your Name], and today I am presenting my DevSecOps capstone project, PodiumHQ. During college hackathons, I noticed organizers always struggle with messy spreadsheets and calculating weighted scores under tight deadlines. I built PodiumHQ to solve this: it is a web platform where judges submit scores against specific criteria and the leaderboard updates live. More importantly, I used this project to learn and implement a complete DevSecOps pipeline, including automated testing, non-root containers, CI/CD scanning, Terraform, Kubernetes, and monitoring.</a:t>
             </a:r>
           </a:p>
         </p:txBody>
@@ -581,7 +581,7 @@
           <a:lstStyle/>
           <a:p>
             <a:r>
-              <a:t>To conclude on Slide 10: PodiumHQ successfully satisfies the 100-point Capstone Grading Rubric. Through this project, we demonstrated that modern DevSecOps is about defense-in-depth: from unit testing and non-root container isolation, to immutable GitOps synchronization and declarative cloud infrastructure. All evidence logs, runbooks, and presentation materials are committed to the repository. Thank you for your attention, and I am now ready for your questions.</a:t>
+              <a:t>To conclude on Slide 10: PodiumHQ successfully demonstrates a modern DevSecOps project from scratch. Locally, everything is verified green: 31 tests pass with 91% coverage, all containers run healthy as non-root users, and all manifests for Terraform, Helm, ArgoCD, and Grafana are complete and validated. To be transparent about limitations: because cloud EKS and NAT Gateways incur hourly AWS bills, the cloud deployment was kept as validated code rather than a running cluster. This project gave me hands-on experience solving real configuration, security, and deployment challenges. Thank you, and I look forward to your questions!</a:t>
             </a:r>
           </a:p>
         </p:txBody>
@@ -651,7 +651,7 @@
           <a:lstStyle/>
           <a:p>
             <a:r>
-              <a:t>On Slide 2, we break down the application architecture across three distinct tiers. Our frontend is built with React 18 and Vite, packaged in an unprivileged Nginx container running as UID 101. Our backend is powered by FastAPI and Python 3.12, providing high-throughput async REST endpoints. All data is persisted in PostgreSQL 16 using SQLAlchemy 2.0 and Alembic migrations. Crucially, both containers run as unprivileged, non-root users verified inside the runtime.</a:t>
+              <a:t>On Slide 2, here is how the application is built. For the frontend, I chose React 18 with Vite and Tailwind CSS so the scoring page and leaderboard update smoothly without refreshing. For the backend, I used FastAPI with Python 3.12 because it is asynchronous, validates incoming requests with Pydantic schemas, and automatically generates interactive API documentation at /docs. For storage, I used PostgreSQL 16 with SQLAlchemy and Alembic migrations to keep our data consistent. Both backend and frontend containers run as non-root users for basic security hygiene.</a:t>
             </a:r>
           </a:p>
         </p:txBody>
@@ -721,7 +721,7 @@
           <a:lstStyle/>
           <a:p>
             <a:r>
-              <a:t>Slide 3 presents our end-to-end architecture diagram. Every commit travels a strictly validated pipeline: developer commits trigger GitHub Actions, which runs static checks, enforces our 91% pytest coverage, builds multi-stage images, and scans with Trivy. Images are published to GHCR with immutable Git SHA tags. ArgoCD continuously reconciles this repository with our AWS EKS cluster, where traffic passes through an Ingress controller to replicated pods autoscaled by HPA, all while Prometheus scrapes live telemetry.</a:t>
+              <a:t>This diagram on Slide 3 shows the overall architecture. When I push code to GitHub, GitHub Actions runs our automated pipeline: linting, running 31 pytest tests, building the Docker containers, and scanning them with Trivy. If everything passes, the image is tagged with the Git commit hash and pushed to GitHub Container Registry. From there, ArgoCD pulls the update into Kubernetes. An Ingress controller sends user traffic to our frontend, API calls to our backend pods, and Prometheus continuously monitors the whole system.</a:t>
             </a:r>
           </a:p>
         </p:txBody>
@@ -791,7 +791,7 @@
           <a:lstStyle/>
           <a:p>
             <a:r>
-              <a:t>On Slide 4, we examine our CI/CD implementation defined in .github/workflows/ci-cd.yml. The pipeline enforces three sequential quality gates. First, Ruff and Mypy perform automated static analysis. Second, Pytest executes 31 tests and verifies our coverage threshold. Third, Docker Buildx compiles our multi-stage images, followed by Trivy vulnerability scanning. If any high or critical vulnerability is found, the build fails and nothing is pushed to GitHub Container Registry.</a:t>
+              <a:t>Slide 4 covers our CI/CD pipeline, configured in .github/workflows/ci-cd.yml. I divided it into three clear gates. First, Ruff and Mypy check code formatting and type safety. Second, Pytest runs all 31 tests and checks code coverage. We enforce an 80% threshold, and our tests currently hit 91%. If any test fails or coverage drops, the pipeline stops immediately. Third, we build the Docker images and run Trivy to scan for security vulnerabilities. Only clean images get tagged with the Git commit SHA and pushed to the container registry.</a:t>
             </a:r>
           </a:p>
         </p:txBody>
@@ -861,7 +861,7 @@
           <a:lstStyle/>
           <a:p>
             <a:r>
-              <a:t>Slide 5 covers our Infrastructure as Code implemented in the terraform/ directory. We provision a resilient AWS VPC across 3 Availability Zones with private subnets for EKS worker nodes and public subnets for ingress. The cluster runs Kubernetes 1.30 with an autoscaling managed node group. We explicitly deploy the AWS EBS CSI driver and Metrics Server as Terraform add-ons, which are mandatory for our database persistence and pod autoscaling. A comprehensive destroy runbook is provided to ensure zero cloud cost leakage.</a:t>
+              <a:t>On Slide 5, we look at our cloud infrastructure defined in the terraform/ directory. Instead of clicking around the AWS console, I wrote Terraform code to create an AWS VPC across 3 Availability Zones, with private subnets for security and public subnets for ingress. The EKS configuration provisions a Kubernetes 1.30 cluster with 2 to 4 worker nodes. I also added two essential EKS add-ons: the EBS CSI driver for database storage, and the Metrics Server for pod autoscaling. Because AWS EKS costs real money every hour, the code is fully validated, and I included a teardown runbook to destroy resources safely.</a:t>
             </a:r>
           </a:p>
         </p:txBody>
@@ -931,7 +931,7 @@
           <a:lstStyle/>
           <a:p>
             <a:r>
-              <a:t>Slide 6 details our Kubernetes packaging in helm/podiumhq. Our backend and frontend run with at least 2 replicas each, protected by PodDisruptionBudgets and RollingUpdate strategies. All pods enforce strict non-root SecurityContexts and drop all Linux capabilities. To solve the common production pitfall where multiple replicas race during database migrations, we implemented a Helm pre-install and pre-upgrade Job hook that executes Alembic migrations before the application pods boot.</a:t>
+              <a:t>On Slide 6, we look at how the application is packaged for Kubernetes using Helm. Both backend and frontend are configured with 2 replicas each, protected by a PodDisruptionBudget and autoscaled by HPA. In Kubernetes, security is critical, so our pod manifests strictly enforce non-root execution and drop all Linux capabilities. One practical problem I solved was database migration race conditions: if two backend pods start at once, they clash over database schema locks. I resolved this by turning migrations into a Helm pre-install and pre-upgrade Job hook that finishes completely before any application pods boot.</a:t>
             </a:r>
           </a:p>
         </p:txBody>
@@ -1001,7 +1001,7 @@
           <a:lstStyle/>
           <a:p>
             <a:r>
-              <a:t>On Slide 7, we present GitOps continuous delivery powered by ArgoCD. In argocd/application.yaml, ArgoCD monitors our repository and uses values-prod.yaml to deploy the application. With automated sync, self-healing, and pruning enabled, Git is the single source of truth. During evaluation, we demonstrate self-healing by manually scaling the backend via kubectl; ArgoCD immediately detects the configuration drift and reconciles the cluster back to the expected state.</a:t>
+              <a:t>Slide 7 introduces GitOps using ArgoCD. Instead of manually deploying code with kubectl commands from a terminal, GitOps makes our Git repository the single source of truth. ArgoCD runs in the cluster and monitors our Helm chart. When our CI pipeline updates an image tag, ArgoCD automatically synchronizes the cluster. It also has self-healing enabled: if someone manually modifies a pod count or setting in the cluster, ArgoCD detects the drift and immediately restores the cluster back to what is defined in Git.</a:t>
             </a:r>
           </a:p>
         </p:txBody>
@@ -1071,7 +1071,7 @@
           <a:lstStyle/>
           <a:p>
             <a:r>
-              <a:t>Slide 8 covers our observability stack. Under /metrics, we expose standard HTTP metrics alongside three custom domain metrics: scores submitted, team lifecycle status counts, and leaderboard requests. Our pre-provisioned Grafana dashboard in monitoring/grafana-dashboard.json visualizes throughput, p95 latencies, and business activity. We also include PrometheusRule alerts that trigger notifications if the backend goes down or if 5xx errors exceed 1%.</a:t>
+              <a:t>On Slide 8, we look at observability. Under /metrics, our backend exposes standard Prometheus telemetry, including HTTP request rates and p95 latency histograms. To make monitoring genuinely useful for this hackathon platform, I also implemented three custom domain metrics: scores submitted, team status counts, and leaderboard views. We packaged a pre-built Grafana dashboard in the monitoring/ directory to visualize these numbers, along with Prometheus alert rules that warn us if error rates spike or if a service goes down.</a:t>
             </a:r>
           </a:p>
         </p:txBody>
@@ -1141,7 +1141,7 @@
           <a:lstStyle/>
           <a:p>
             <a:r>
-              <a:t>Slide 9 highlights our quality assurance and the real engineering obstacles we resolved. We verified our test suite: 31 tests pass with 91% code coverage, and our containers were verified as non-root UIDs 10001 and 101. We also solved authentic production issues: first, fixing in-container coverage file permissions by explicitly chowning the working directory; second, resolving an IPv6 dual-stack mismatch in Alpine Linux Nginx healthchecks; and third, ensuring test fixtures were appropriately packaged into the container.</a:t>
+              <a:t>Slide 9 highlights our testing and some real debugging problems I ran into and solved. Our test suite has 31 automated tests with 91% code coverage, and our containers were verified as non-root users. During development, I hit two interesting bugs. First, pytest kept crashing inside the container because the /app folder was owned by root, preventing our non-root user from writing the coverage database. I fixed this by chowning the directory in the Dockerfile. Second, Docker marked the frontend container unhealthy because BusyBox wget tried connecting to IPv6 localhost while Nginx only listened on IPv4. Adding an IPv6 listen directive solved the issue.</a:t>
             </a:r>
           </a:p>
         </p:txBody>
@@ -4268,7 +4268,7 @@
               </a:defRPr>
             </a:pPr>
             <a:r>
-              <a:t>MODULE CHECKPOINT • PROJECT OVERVIEW &amp; IDENTITY</a:t>
+              <a:t>STUDENT PRESENTATION • PROJECT INTRODUCTION</a:t>
             </a:r>
           </a:p>
         </p:txBody>
@@ -4340,7 +4340,7 @@
               </a:defRPr>
             </a:pPr>
             <a:r>
-              <a:t>PodiumHQ — DevSecOps Capstone</a:t>
+              <a:t>PodiumHQ — Hackathon Scoring Platform</a:t>
             </a:r>
           </a:p>
         </p:txBody>
@@ -4376,7 +4376,7 @@
               </a:defRPr>
             </a:pPr>
             <a:r>
-              <a:t>Autonomous Hackathon &amp; Event Judging Platform with Hardened GitOps Delivery</a:t>
+              <a:t>DevSecOps Capstone Project | Final Year Technical Presentation</a:t>
             </a:r>
           </a:p>
         </p:txBody>
@@ -4457,7 +4457,7 @@
               </a:defRPr>
             </a:pPr>
             <a:r>
-              <a:t>Core Problem Solved</a:t>
+              <a:t>What is PodiumHQ?</a:t>
             </a:r>
           </a:p>
         </p:txBody>
@@ -4496,7 +4496,7 @@
               </a:defRPr>
             </a:pPr>
             <a:r>
-              <a:t>• Replaces error-prone manual spreadsheets with an automated multi-criteria evaluation platform.</a:t>
+              <a:t>• A full-stack web platform for organizing and judging hackathons.</a:t>
             </a:r>
           </a:p>
           <a:p>
@@ -4512,7 +4512,7 @@
               </a:defRPr>
             </a:pPr>
             <a:r>
-              <a:t>• Provides real-time weighted scoring across rounds with dynamic tie-breaking and rank calculation.</a:t>
+              <a:t>• Allows judges to evaluate teams across multiple rounds and weighted criteria.</a:t>
             </a:r>
           </a:p>
           <a:p>
@@ -4528,7 +4528,7 @@
               </a:defRPr>
             </a:pPr>
             <a:r>
-              <a:t>• Engineered specifically to solve high-concurrency judging deadlines with zero downtime.</a:t>
+              <a:t>• Computes team rankings in real time and displays an automated live leaderboard.</a:t>
             </a:r>
           </a:p>
         </p:txBody>
@@ -4609,7 +4609,7 @@
               </a:defRPr>
             </a:pPr>
             <a:r>
-              <a:t>DevSecOps Mission &amp; Scope</a:t>
+              <a:t>Why I Built This (Problem &amp; Goal)</a:t>
             </a:r>
           </a:p>
         </p:txBody>
@@ -4648,7 +4648,7 @@
               </a:defRPr>
             </a:pPr>
             <a:r>
-              <a:t>• Demonstrates the full software delivery journey from local commit to cloud-native production.</a:t>
+              <a:t>• Solves the mess of manual spreadsheets and delayed scores during hackathon deadlines.</a:t>
             </a:r>
           </a:p>
           <a:p>
@@ -4664,7 +4664,7 @@
               </a:defRPr>
             </a:pPr>
             <a:r>
-              <a:t>• Enforces security gates: non-root containers, Trivy CVE scanning, and Gitleaks detection.</a:t>
+              <a:t>• Original application domain—built from scratch with zero TaskBoard code reuse.</a:t>
             </a:r>
           </a:p>
           <a:p>
@@ -4680,7 +4680,7 @@
               </a:defRPr>
             </a:pPr>
             <a:r>
-              <a:t>• Delivers declarative GitOps via ArgoCD, Helm 3 packaging, and Terraform-provisioned AWS EKS.</a:t>
+              <a:t>• Goal: Take a real web app through the complete DevSecOps pipeline from commit to cloud.</a:t>
             </a:r>
           </a:p>
         </p:txBody>
@@ -4761,7 +4761,7 @@
               </a:defRPr>
             </a:pPr>
             <a:r>
-              <a:t>Project Metadata</a:t>
+              <a:t>Student &amp; Project Info</a:t>
             </a:r>
           </a:p>
         </p:txBody>
@@ -4800,7 +4800,7 @@
               </a:defRPr>
             </a:pPr>
             <a:r>
-              <a:t>• Author: Platform Engineering / DevSecOps Candidate</a:t>
+              <a:t>• Student Name: [Your Name]</a:t>
             </a:r>
           </a:p>
           <a:p>
@@ -4816,7 +4816,7 @@
               </a:defRPr>
             </a:pPr>
             <a:r>
-              <a:t>• Domain: Hackathon &amp; Event Evaluation (Original Domain, Zero TaskBoard Overlap)</a:t>
+              <a:t>• Course / Degree: B.Tech / B.E. Computer Science &amp; Engineering</a:t>
             </a:r>
           </a:p>
           <a:p>
@@ -4832,7 +4832,7 @@
               </a:defRPr>
             </a:pPr>
             <a:r>
-              <a:t>• Rubric Target: 100/100 Points across Modules M1 through M10</a:t>
+              <a:t>• Stack: React 18, FastAPI, PostgreSQL, Docker, GitHub Actions, Terraform, Kubernetes</a:t>
             </a:r>
           </a:p>
         </p:txBody>
@@ -4868,7 +4868,7 @@
               </a:defRPr>
             </a:pPr>
             <a:r>
-              <a:t>PodiumHQ DevSecOps Capstone • GitOps, Automated Verification &amp; Observability</a:t>
+              <a:t>PodiumHQ DevSecOps Capstone Presentation • Verified Codebase &amp; Realistic Engineering</a:t>
             </a:r>
           </a:p>
         </p:txBody>
@@ -5012,7 +5012,7 @@
               </a:defRPr>
             </a:pPr>
             <a:r>
-              <a:t>MODULE CHECKPOINT • CONCLUSION &amp; ROADMAP</a:t>
+              <a:t>STUDENT PRESENTATION • CONCLUSION &amp; LEARNINGS</a:t>
             </a:r>
           </a:p>
         </p:txBody>
@@ -5084,7 +5084,7 @@
               </a:defRPr>
             </a:pPr>
             <a:r>
-              <a:t>Key Learnings &amp; Conclusion</a:t>
+              <a:t>Summary, Limitations &amp; Key Learnings</a:t>
             </a:r>
           </a:p>
         </p:txBody>
@@ -5120,7 +5120,7 @@
               </a:defRPr>
             </a:pPr>
             <a:r>
-              <a:t>100-Point Rubric Fulfillment, Production Takeaways, and Future Roadmap</a:t>
+              <a:t>Honest self-assessment of achievements, cloud limitations, and future improvements</a:t>
             </a:r>
           </a:p>
         </p:txBody>
@@ -5201,7 +5201,7 @@
               </a:defRPr>
             </a:pPr>
             <a:r>
-              <a:t>Rubric Self-Audit (RUBRIC_CHECK.md)</a:t>
+              <a:t>What Works &amp; Was Verified</a:t>
             </a:r>
           </a:p>
         </p:txBody>
@@ -5240,7 +5240,7 @@
               </a:defRPr>
             </a:pPr>
             <a:r>
-              <a:t>• 100% compliance across all 10 modules (M1 Application to M10 Presentation).</a:t>
+              <a:t>• Fully functional hackathon scoring platform running locally on Docker Compose.</a:t>
             </a:r>
           </a:p>
           <a:p>
@@ -5256,7 +5256,7 @@
               </a:defRPr>
             </a:pPr>
             <a:r>
-              <a:t>• Locally runnable components (Docker Compose, Pytest 91%, Non-Root, Probes) are 100% verified green.</a:t>
+              <a:t>• 31 automated tests passing with 90.99% coverage and isolated test fixtures.</a:t>
             </a:r>
           </a:p>
           <a:p>
@@ -5272,7 +5272,23 @@
               </a:defRPr>
             </a:pPr>
             <a:r>
-              <a:t>• Cloud-only components (AWS EKS apply, live ArgoCD) are fully written, validated, and documented.</a:t>
+              <a:t>• Non-root container execution verified live on both backend and frontend.</a:t>
+            </a:r>
+          </a:p>
+          <a:p>
+            <a:pPr>
+              <a:spcAft>
+                <a:spcPts val="800"/>
+              </a:spcAft>
+              <a:defRPr sz="1200">
+                <a:solidFill>
+                  <a:srgbClr val="F8FAFC"/>
+                </a:solidFill>
+                <a:latin typeface="Calibri"/>
+              </a:defRPr>
+            </a:pPr>
+            <a:r>
+              <a:t>• Complete, validated manifest suite: Terraform, Helm chart, ArgoCD, and Prometheus.</a:t>
             </a:r>
           </a:p>
         </p:txBody>
@@ -5347,13 +5363,13 @@
             <a:pPr>
               <a:defRPr sz="1400" b="1">
                 <a:solidFill>
-                  <a:srgbClr val="38BDF8"/>
+                  <a:srgbClr val="F59E0B"/>
                 </a:solidFill>
                 <a:latin typeface="Arial"/>
               </a:defRPr>
             </a:pPr>
             <a:r>
-              <a:t>Key Engineering Lessons</a:t>
+              <a:t>Honest Limitations (Cloud Scope)</a:t>
             </a:r>
           </a:p>
         </p:txBody>
@@ -5392,7 +5408,7 @@
               </a:defRPr>
             </a:pPr>
             <a:r>
-              <a:t>• Pre-upgrade Helm hooks are essential to avoid database schema race conditions across replicated pods.</a:t>
+              <a:t>• AWS EKS &amp; ArgoCD were not deployed to live cloud infrastructure to avoid ongoing student cloud costs.</a:t>
             </a:r>
           </a:p>
           <a:p>
@@ -5408,7 +5424,7 @@
               </a:defRPr>
             </a:pPr>
             <a:r>
-              <a:t>• Dual-stack IPv4/IPv6 awareness is critical when containerizing unprivileged Nginx on modern Alpine Linux.</a:t>
+              <a:t>• All cloud manifests are written, syntactically validated, and ready for deployment.</a:t>
             </a:r>
           </a:p>
           <a:p>
@@ -5424,7 +5440,7 @@
               </a:defRPr>
             </a:pPr>
             <a:r>
-              <a:t>• Immutable image tagging by Git commit SHA ensures reliable GitOps rollback without caching ambiguities.</a:t>
+              <a:t>• Everything runnable locally was verified 100% green with saved evidence files.</a:t>
             </a:r>
           </a:p>
         </p:txBody>
@@ -5499,13 +5515,13 @@
             <a:pPr>
               <a:defRPr sz="1400" b="1">
                 <a:solidFill>
-                  <a:srgbClr val="F59E0B"/>
+                  <a:srgbClr val="38BDF8"/>
                 </a:solidFill>
                 <a:latin typeface="Arial"/>
               </a:defRPr>
             </a:pPr>
             <a:r>
-              <a:t>Future Production Enhancements</a:t>
+              <a:t>Top Engineering Lessons</a:t>
             </a:r>
           </a:p>
         </p:txBody>
@@ -5544,7 +5560,7 @@
               </a:defRPr>
             </a:pPr>
             <a:r>
-              <a:t>• Transition in-cluster PostgreSQL to Amazon Aurora Multi-AZ with automated automated failover.</a:t>
+              <a:t>• DevSecOps is in the details: file permissions, non-root users, and dual-stack networking.</a:t>
             </a:r>
           </a:p>
           <a:p>
@@ -5560,7 +5576,7 @@
               </a:defRPr>
             </a:pPr>
             <a:r>
-              <a:t>• Implement OpenTelemetry distributed tracing with AWS X-Ray for end-to-end request tracing.</a:t>
+              <a:t>• Helm pre-upgrade hooks are crucial to prevent database migration locks across replicas.</a:t>
             </a:r>
           </a:p>
           <a:p>
@@ -5576,7 +5592,7 @@
               </a:defRPr>
             </a:pPr>
             <a:r>
-              <a:t>• Deploy Istio Service Mesh with mTLS and fine-grained authorization policies across microservices.</a:t>
+              <a:t>• Immutable image tags (Git commit SHAs) prevent deployment caching confusion.</a:t>
             </a:r>
           </a:p>
         </p:txBody>
@@ -5612,7 +5628,7 @@
               </a:defRPr>
             </a:pPr>
             <a:r>
-              <a:t>PodiumHQ DevSecOps Capstone • GitOps, Automated Verification &amp; Observability</a:t>
+              <a:t>PodiumHQ DevSecOps Capstone Presentation • Verified Codebase &amp; Realistic Engineering</a:t>
             </a:r>
           </a:p>
         </p:txBody>
@@ -5756,7 +5772,7 @@
               </a:defRPr>
             </a:pPr>
             <a:r>
-              <a:t>MODULE CHECKPOINT • TECH STACK SPECIFICATION</a:t>
+              <a:t>STUDENT PRESENTATION • TECH STACK</a:t>
             </a:r>
           </a:p>
         </p:txBody>
@@ -5828,7 +5844,7 @@
               </a:defRPr>
             </a:pPr>
             <a:r>
-              <a:t>Application &amp; Technology Stack</a:t>
+              <a:t>Application Stack &amp; Why I Chose These Tools</a:t>
             </a:r>
           </a:p>
         </p:txBody>
@@ -5864,7 +5880,7 @@
               </a:defRPr>
             </a:pPr>
             <a:r>
-              <a:t>High-Performance Modern Web Architecture with Relational Integrity</a:t>
+              <a:t>Simple, clean 3-tier architecture built with modern open-source tools</a:t>
             </a:r>
           </a:p>
         </p:txBody>
@@ -5945,7 +5961,7 @@
               </a:defRPr>
             </a:pPr>
             <a:r>
-              <a:t>Frontend Tier (React 18 SPA)</a:t>
+              <a:t>Frontend: React 18 + Vite</a:t>
             </a:r>
           </a:p>
         </p:txBody>
@@ -5984,7 +6000,7 @@
               </a:defRPr>
             </a:pPr>
             <a:r>
-              <a:t>• React 18 + Vite with Tailwind CSS styling in an Obsidian &amp; Solar Gold palette.</a:t>
+              <a:t>• What it does: Single-page application with Tailwind CSS in an Obsidian &amp; Solar Gold theme.</a:t>
             </a:r>
           </a:p>
           <a:p>
@@ -6000,7 +6016,7 @@
               </a:defRPr>
             </a:pPr>
             <a:r>
-              <a:t>• Live leaderboard with instantaneous client-side ranking and category filtering.</a:t>
+              <a:t>• Why I chose it: Needed a fast, reactive UI where judges can submit scores without page refreshes.</a:t>
             </a:r>
           </a:p>
           <a:p>
@@ -6016,23 +6032,7 @@
               </a:defRPr>
             </a:pPr>
             <a:r>
-              <a:t>• Responsive judge scoring form with client-side bounds and schema validation.</a:t>
-            </a:r>
-          </a:p>
-          <a:p>
-            <a:pPr>
-              <a:spcAft>
-                <a:spcPts val="800"/>
-              </a:spcAft>
-              <a:defRPr sz="1200">
-                <a:solidFill>
-                  <a:srgbClr val="F8FAFC"/>
-                </a:solidFill>
-                <a:latin typeface="Calibri"/>
-              </a:defRPr>
-            </a:pPr>
-            <a:r>
-              <a:t>• Runtime: Served via unprivileged Nginx (UID 101) with dynamic proxying to backend.</a:t>
+              <a:t>• Runtime: Served through unprivileged Nginx on port 8080 (running as UID 101).</a:t>
             </a:r>
           </a:p>
         </p:txBody>
@@ -6113,7 +6113,7 @@
               </a:defRPr>
             </a:pPr>
             <a:r>
-              <a:t>Backend Tier (FastAPI Async API)</a:t>
+              <a:t>Backend: FastAPI (Python 3.12)</a:t>
             </a:r>
           </a:p>
         </p:txBody>
@@ -6152,7 +6152,7 @@
               </a:defRPr>
             </a:pPr>
             <a:r>
-              <a:t>• Python 3.12 running asynchronous FastAPI ASGI server with Uvicorn.</a:t>
+              <a:t>• What it does: Handles 15+ REST endpoints for teams, criteria, judges, and score calculations.</a:t>
             </a:r>
           </a:p>
           <a:p>
@@ -6168,23 +6168,7 @@
               </a:defRPr>
             </a:pPr>
             <a:r>
-              <a:t>• 15+ RESTful endpoints under /api/events, /api/teams, /api/judges, /api/scores, and /api/leaderboard.</a:t>
-            </a:r>
-          </a:p>
-          <a:p>
-            <a:pPr>
-              <a:spcAft>
-                <a:spcPts val="800"/>
-              </a:spcAft>
-              <a:defRPr sz="1200">
-                <a:solidFill>
-                  <a:srgbClr val="F8FAFC"/>
-                </a:solidFill>
-                <a:latin typeface="Calibri"/>
-              </a:defRPr>
-            </a:pPr>
-            <a:r>
-              <a:t>• Operational probes: /health (liveness), /ready (database ping), and /metrics (Prometheus).</a:t>
+              <a:t>• Why I chose it: Automatic Swagger docs at /docs, async performance, and built-in health probes.</a:t>
             </a:r>
           </a:p>
           <a:p>
@@ -6281,7 +6265,7 @@
               </a:defRPr>
             </a:pPr>
             <a:r>
-              <a:t>Data &amp; Persistence Tier (PostgreSQL 16)</a:t>
+              <a:t>Database: PostgreSQL 16</a:t>
             </a:r>
           </a:p>
         </p:txBody>
@@ -6320,7 +6304,7 @@
               </a:defRPr>
             </a:pPr>
             <a:r>
-              <a:t>• PostgreSQL 16 relational database with Psycopg 3 connection pooling.</a:t>
+              <a:t>• What it does: Stores events, rounds, criteria, teams, judges, and evaluations across 6 tables.</a:t>
             </a:r>
           </a:p>
           <a:p>
@@ -6336,7 +6320,7 @@
               </a:defRPr>
             </a:pPr>
             <a:r>
-              <a:t>• SQLAlchemy 2.0 ORM with relational foreign keys, unique constraints, and indexes.</a:t>
+              <a:t>• Why I chose it: Strong relational integrity, foreign keys, and safe schema migrations with Alembic.</a:t>
             </a:r>
           </a:p>
           <a:p>
@@ -6352,23 +6336,7 @@
               </a:defRPr>
             </a:pPr>
             <a:r>
-              <a:t>• Alembic schema migrations with automated pre-upgrade execution.</a:t>
-            </a:r>
-          </a:p>
-          <a:p>
-            <a:pPr>
-              <a:spcAft>
-                <a:spcPts val="800"/>
-              </a:spcAft>
-              <a:defRPr sz="1200">
-                <a:solidFill>
-                  <a:srgbClr val="F8FAFC"/>
-                </a:solidFill>
-                <a:latin typeface="Calibri"/>
-              </a:defRPr>
-            </a:pPr>
-            <a:r>
-              <a:t>• Cloud Storage: AWS EBS gp3 volume claim via AWS EBS CSI driver.</a:t>
+              <a:t>• Connection: Managed with SQLAlchemy 2.0 ORM and Psycopg 3 connection pooling.</a:t>
             </a:r>
           </a:p>
         </p:txBody>
@@ -6404,7 +6372,7 @@
               </a:defRPr>
             </a:pPr>
             <a:r>
-              <a:t>PodiumHQ DevSecOps Capstone • GitOps, Automated Verification &amp; Observability</a:t>
+              <a:t>PodiumHQ DevSecOps Capstone Presentation • Verified Codebase &amp; Realistic Engineering</a:t>
             </a:r>
           </a:p>
         </p:txBody>
@@ -6548,7 +6516,7 @@
               </a:defRPr>
             </a:pPr>
             <a:r>
-              <a:t>MODULE CHECKPOINT • SYSTEM ARCHITECTURE DIAGRAM</a:t>
+              <a:t>STUDENT PRESENTATION • SYSTEM ARCHITECTURE</a:t>
             </a:r>
           </a:p>
         </p:txBody>
@@ -6620,7 +6588,7 @@
               </a:defRPr>
             </a:pPr>
             <a:r>
-              <a:t>End-to-End System Architecture</a:t>
+              <a:t>System Architecture: From Code to Deployment</a:t>
             </a:r>
           </a:p>
         </p:txBody>
@@ -6656,7 +6624,7 @@
               </a:defRPr>
             </a:pPr>
             <a:r>
-              <a:t>Complete Flow: Developer -&gt; CI/CD -&gt; GitOps -&gt; AWS Cloud -&gt; Observability</a:t>
+              <a:t>How code moves from local development to automated deployment and monitoring</a:t>
             </a:r>
           </a:p>
         </p:txBody>
@@ -6792,7 +6760,7 @@
               </a:defRPr>
             </a:pPr>
             <a:r>
-              <a:t>Lint -&gt; Pytest 91% -&gt; Trivy</a:t>
+              <a:t>Lint -&gt; Tests -&gt; Scan</a:t>
             </a:r>
           </a:p>
         </p:txBody>
@@ -6996,7 +6964,7 @@
               </a:defRPr>
             </a:pPr>
             <a:r>
-              <a:t>VPC + Ingress + HPA</a:t>
+              <a:t>VPC + Pods + HPA</a:t>
             </a:r>
           </a:p>
         </p:txBody>
@@ -7145,7 +7113,7 @@
               </a:defRPr>
             </a:pPr>
             <a:r>
-              <a:t>Pipeline Flow (DevSecOps Quality Gates)</a:t>
+              <a:t>Delivery Flow (CI/CD to Registry)</a:t>
             </a:r>
           </a:p>
         </p:txBody>
@@ -7184,7 +7152,7 @@
               </a:defRPr>
             </a:pPr>
             <a:r>
-              <a:t>• Pre-commit verification enforces Ruff formatting and Gitleaks secret scanning.</a:t>
+              <a:t>• Developer pushes code to GitHub repository.</a:t>
             </a:r>
           </a:p>
           <a:p>
@@ -7200,7 +7168,7 @@
               </a:defRPr>
             </a:pPr>
             <a:r>
-              <a:t>• GitHub Actions executes automated gates: linting, pytest coverage (&gt;=80%), multi-stage builds.</a:t>
+              <a:t>• GitHub Actions automatically runs linters, 31 pytest tests, and builds container images.</a:t>
             </a:r>
           </a:p>
           <a:p>
@@ -7216,7 +7184,7 @@
               </a:defRPr>
             </a:pPr>
             <a:r>
-              <a:t>• Trivy blocks image publishing if any HIGH or CRITICAL CVEs are detected.</a:t>
+              <a:t>• Trivy scans images for security vulnerabilities before anything is published.</a:t>
             </a:r>
           </a:p>
           <a:p>
@@ -7232,7 +7200,7 @@
               </a:defRPr>
             </a:pPr>
             <a:r>
-              <a:t>• Approved container images are tagged with immutable Git commit SHAs—never :latest.</a:t>
+              <a:t>• Images are tagged with the Git commit SHA (e.g. :f990516) and pushed to GHCR.</a:t>
             </a:r>
           </a:p>
         </p:txBody>
@@ -7313,7 +7281,7 @@
               </a:defRPr>
             </a:pPr>
             <a:r>
-              <a:t>Cloud Runtime (AWS EKS &amp; GitOps Delivery)</a:t>
+              <a:t>Runtime Flow (Cluster &amp; Monitoring)</a:t>
             </a:r>
           </a:p>
         </p:txBody>
@@ -7352,7 +7320,7 @@
               </a:defRPr>
             </a:pPr>
             <a:r>
-              <a:t>• ArgoCD polls the repository, detects image updates, and auto-syncs manifests to the cluster.</a:t>
+              <a:t>• ArgoCD detects new image tags in Git and synchronizes manifests with the EKS cluster.</a:t>
             </a:r>
           </a:p>
           <a:p>
@@ -7368,7 +7336,7 @@
               </a:defRPr>
             </a:pPr>
             <a:r>
-              <a:t>• Traffic flows: AWS ALB / Ingress Controller -&gt; Frontend (:8080) -&gt; Backend (:8000) -&gt; PostgreSQL (:5432).</a:t>
+              <a:t>• Ingress routes incoming traffic: / to frontend pods and /api to backend pods.</a:t>
             </a:r>
           </a:p>
           <a:p>
@@ -7384,7 +7352,7 @@
               </a:defRPr>
             </a:pPr>
             <a:r>
-              <a:t>• Horizontal Pod Autoscaler (HPA) dynamically scales backend pods between 2 and 6 replicas based on CPU load.</a:t>
+              <a:t>• Horizontal Pod Autoscaler (HPA) scales backend pods between 2 and 6 replicas based on CPU.</a:t>
             </a:r>
           </a:p>
           <a:p>
@@ -7400,7 +7368,7 @@
               </a:defRPr>
             </a:pPr>
             <a:r>
-              <a:t>• Prometheus scrapes application metrics every 15s via dedicated ServiceMonitor.</a:t>
+              <a:t>• Prometheus continuously scrapes /metrics to track response times and error rates.</a:t>
             </a:r>
           </a:p>
         </p:txBody>
@@ -7436,7 +7404,7 @@
               </a:defRPr>
             </a:pPr>
             <a:r>
-              <a:t>PodiumHQ DevSecOps Capstone • GitOps, Automated Verification &amp; Observability</a:t>
+              <a:t>PodiumHQ DevSecOps Capstone Presentation • Verified Codebase &amp; Realistic Engineering</a:t>
             </a:r>
           </a:p>
         </p:txBody>
@@ -7580,7 +7548,7 @@
               </a:defRPr>
             </a:pPr>
             <a:r>
-              <a:t>MODULE CHECKPOINT • CONTINUOUS DELIVERY PIPELINE</a:t>
+              <a:t>STUDENT PRESENTATION • CI/CD WORKFLOW</a:t>
             </a:r>
           </a:p>
         </p:txBody>
@@ -7652,7 +7620,7 @@
               </a:defRPr>
             </a:pPr>
             <a:r>
-              <a:t>CI/CD Pipeline: GitHub Actions</a:t>
+              <a:t>CI/CD Pipeline with GitHub Actions</a:t>
             </a:r>
           </a:p>
         </p:txBody>
@@ -7688,7 +7656,7 @@
               </a:defRPr>
             </a:pPr>
             <a:r>
-              <a:t>Automated Quality Gates, Vulnerability Blocking, and Immutable Tagging</a:t>
+              <a:t>Automating code checks, test coverage, and security vulnerability scanning</a:t>
             </a:r>
           </a:p>
         </p:txBody>
@@ -7769,7 +7737,7 @@
               </a:defRPr>
             </a:pPr>
             <a:r>
-              <a:t>Gate 1: Code Quality &amp; Static Analysis</a:t>
+              <a:t>Step 1: Code Quality &amp; Linting</a:t>
             </a:r>
           </a:p>
         </p:txBody>
@@ -7808,7 +7776,7 @@
               </a:defRPr>
             </a:pPr>
             <a:r>
-              <a:t>• Ruff: Ultra-fast linting and code formatting checks across all backend Python modules.</a:t>
+              <a:t>• What it does: Runs Ruff for Python code formatting and Mypy for static type validation.</a:t>
             </a:r>
           </a:p>
           <a:p>
@@ -7824,7 +7792,7 @@
               </a:defRPr>
             </a:pPr>
             <a:r>
-              <a:t>• Mypy: Static type checking ensuring Pydantic and FastAPI schema integrity.</a:t>
+              <a:t>• Why it matters: Catches syntax errors, bad imports, and type mismatches before tests run.</a:t>
             </a:r>
           </a:p>
           <a:p>
@@ -7840,7 +7808,7 @@
               </a:defRPr>
             </a:pPr>
             <a:r>
-              <a:t>• ESLint: Static code analysis ensuring frontend React components follow strict standards.</a:t>
+              <a:t>• Frontend: Runs npm run lint to catch unused variables and component bugs.</a:t>
             </a:r>
           </a:p>
         </p:txBody>
@@ -7921,7 +7889,7 @@
               </a:defRPr>
             </a:pPr>
             <a:r>
-              <a:t>Gate 2: Automated Testing &amp; Coverage Gate</a:t>
+              <a:t>Step 2: Automated Tests &amp; Coverage Gate</a:t>
             </a:r>
           </a:p>
         </p:txBody>
@@ -7960,7 +7928,7 @@
               </a:defRPr>
             </a:pPr>
             <a:r>
-              <a:t>• Pytest: Executes 31 unit and integration tests against in-memory SQLite database.</a:t>
+              <a:t>• What it does: Executes 31 unit and integration tests using Pytest.</a:t>
             </a:r>
           </a:p>
           <a:p>
@@ -7976,7 +7944,7 @@
               </a:defRPr>
             </a:pPr>
             <a:r>
-              <a:t>• Coverage Gate: Pytest-cov enforces a hard 80% coverage threshold (currently achieving 91%).</a:t>
+              <a:t>• Coverage Gate: Pytest-cov enforces a strict 80% minimum coverage threshold.</a:t>
             </a:r>
           </a:p>
           <a:p>
@@ -7992,7 +7960,7 @@
               </a:defRPr>
             </a:pPr>
             <a:r>
-              <a:t>• Pipeline Failure: Any failing test or coverage drop below 80% instantly terminates the workflow.</a:t>
+              <a:t>• Current Result: 90.99% overall code coverage. If coverage falls below 80%, the build fails.</a:t>
             </a:r>
           </a:p>
         </p:txBody>
@@ -8073,7 +8041,7 @@
               </a:defRPr>
             </a:pPr>
             <a:r>
-              <a:t>Gate 3: Hardened Build &amp; Trivy Vulnerability Scan</a:t>
+              <a:t>Step 3: Build &amp; Security Scanning (Trivy)</a:t>
             </a:r>
           </a:p>
         </p:txBody>
@@ -8112,7 +8080,7 @@
               </a:defRPr>
             </a:pPr>
             <a:r>
-              <a:t>• Docker Buildx: Multi-stage builds compiling frontend assets and backend dependencies.</a:t>
+              <a:t>• What it does: Builds multi-stage Docker images and scans them with Trivy.</a:t>
             </a:r>
           </a:p>
           <a:p>
@@ -8128,7 +8096,7 @@
               </a:defRPr>
             </a:pPr>
             <a:r>
-              <a:t>• Trivy Scanner: Scans root filesystem and built images with exit-code: 1 on HIGH/CRITICAL CVEs.</a:t>
+              <a:t>• Security Gate: Fails the pipeline if any HIGH or CRITICAL CVEs are detected.</a:t>
             </a:r>
           </a:p>
           <a:p>
@@ -8144,7 +8112,7 @@
               </a:defRPr>
             </a:pPr>
             <a:r>
-              <a:t>• GHCR Publishing: Immutable tags using github.sha (e.g. ghcr.io/user/podiumhq-backend:f990516).</a:t>
+              <a:t>• Publishing: Successful builds are pushed to GHCR with immutable Git SHA tags, never :latest.</a:t>
             </a:r>
           </a:p>
         </p:txBody>
@@ -8180,7 +8148,7 @@
               </a:defRPr>
             </a:pPr>
             <a:r>
-              <a:t>PodiumHQ DevSecOps Capstone • GitOps, Automated Verification &amp; Observability</a:t>
+              <a:t>PodiumHQ DevSecOps Capstone Presentation • Verified Codebase &amp; Realistic Engineering</a:t>
             </a:r>
           </a:p>
         </p:txBody>
@@ -8324,7 +8292,7 @@
               </a:defRPr>
             </a:pPr>
             <a:r>
-              <a:t>MODULE CHECKPOINT • TERRAFORM IAC SPECIFICATION</a:t>
+              <a:t>STUDENT PRESENTATION • TERRAFORM IAC</a:t>
             </a:r>
           </a:p>
         </p:txBody>
@@ -8432,7 +8400,7 @@
               </a:defRPr>
             </a:pPr>
             <a:r>
-              <a:t>Modular, Reproducible Cloud Infrastructure Provisioning across 3 AZs</a:t>
+              <a:t>Writing code to provision cloud networks and Kubernetes instead of manual setup</a:t>
             </a:r>
           </a:p>
         </p:txBody>
@@ -8513,7 +8481,7 @@
               </a:defRPr>
             </a:pPr>
             <a:r>
-              <a:t>VPC &amp; Network Architecture (vpc.tf)</a:t>
+              <a:t>Network: AWS VPC (vpc.tf)</a:t>
             </a:r>
           </a:p>
         </p:txBody>
@@ -8552,7 +8520,7 @@
               </a:defRPr>
             </a:pPr>
             <a:r>
-              <a:t>• Region: AWS ap-south-1 (Mumbai) across 3 Availability Zones for fault tolerance.</a:t>
+              <a:t>• Spans 3 Availability Zones in AWS ap-south-1 (Mumbai) for reliability.</a:t>
             </a:r>
           </a:p>
           <a:p>
@@ -8568,7 +8536,7 @@
               </a:defRPr>
             </a:pPr>
             <a:r>
-              <a:t>• Subnet Layout: 3 public subnets (for Ingress/ALBs) and 3 private subnets (for EKS worker nodes).</a:t>
+              <a:t>• Creates 3 public subnets (for internet ingress) and 3 private subnets (for worker nodes).</a:t>
             </a:r>
           </a:p>
           <a:p>
@@ -8584,7 +8552,7 @@
               </a:defRPr>
             </a:pPr>
             <a:r>
-              <a:t>• Egress: Dedicated NAT Gateway in public subnet routing private outbound internet traffic.</a:t>
+              <a:t>• Includes a NAT Gateway so private worker nodes can safely pull container images.</a:t>
             </a:r>
           </a:p>
           <a:p>
@@ -8600,7 +8568,7 @@
               </a:defRPr>
             </a:pPr>
             <a:r>
-              <a:t>• Kubernetes Tags: Strict kubernetes.io/role/elb and internal-elb tags for AWS Load Balancer Controller.</a:t>
+              <a:t>• Tagged with kubernetes.io/role/elb so AWS can automatically manage load balancers.</a:t>
             </a:r>
           </a:p>
         </p:txBody>
@@ -8681,7 +8649,7 @@
               </a:defRPr>
             </a:pPr>
             <a:r>
-              <a:t>EKS Cluster &amp; Node Groups (eks.tf)</a:t>
+              <a:t>Compute: EKS Cluster (eks.tf &amp; addons.tf)</a:t>
             </a:r>
           </a:p>
         </p:txBody>
@@ -8720,7 +8688,7 @@
               </a:defRPr>
             </a:pPr>
             <a:r>
-              <a:t>• EKS Control Plane: Managed Kubernetes v1.30 control plane with private &amp; public API endpoints.</a:t>
+              <a:t>• Deploys a managed Kubernetes v1.30 control plane with managed node groups.</a:t>
             </a:r>
           </a:p>
           <a:p>
@@ -8736,7 +8704,7 @@
               </a:defRPr>
             </a:pPr>
             <a:r>
-              <a:t>• Managed Node Group: 2 to 4 t3.medium EC2 instances distributed across private subnets.</a:t>
+              <a:t>• Worker nodes: 2 to 4 t3.medium EC2 instances distributed across private subnets.</a:t>
             </a:r>
           </a:p>
           <a:p>
@@ -8752,7 +8720,7 @@
               </a:defRPr>
             </a:pPr>
             <a:r>
-              <a:t>• IAM Roles: Least-privilege roles for EKS Cluster, CNI, and ContainerRegistryReadOnly.</a:t>
+              <a:t>• Add-on 1: AWS EBS CSI driver—required so PostgreSQL can attach persistent disk volumes.</a:t>
             </a:r>
           </a:p>
           <a:p>
@@ -8768,7 +8736,7 @@
               </a:defRPr>
             </a:pPr>
             <a:r>
-              <a:t>• Add-ons (addons.tf): AWS EBS CSI driver (for gp3 volumes) and Kubernetes Metrics Server (for HPA).</a:t>
+              <a:t>• Add-on 2: Metrics Server—required so the Horizontal Pod Autoscaler can read CPU usage.</a:t>
             </a:r>
           </a:p>
         </p:txBody>
@@ -8849,7 +8817,7 @@
               </a:defRPr>
             </a:pPr>
             <a:r>
-              <a:t>Cost Safety &amp; Teardown Runbook</a:t>
+              <a:t>Honest Cloud Status &amp; Teardown Runbook</a:t>
             </a:r>
           </a:p>
         </p:txBody>
@@ -8888,7 +8856,7 @@
               </a:defRPr>
             </a:pPr>
             <a:r>
-              <a:t>• Reproducibility: Configured via terraform.tfvars.example with parameterized variables.</a:t>
+              <a:t>• Status: Terraform files are written, formatted, and validated with terraform validate.</a:t>
             </a:r>
           </a:p>
           <a:p>
@@ -8904,7 +8872,7 @@
               </a:defRPr>
             </a:pPr>
             <a:r>
-              <a:t>• Automated Teardown: Documented runbook in terraform/README.md for clean resource destruction.</a:t>
+              <a:t>• Cost Note: EKS and NAT Gateways cost ~$0.15/hour, so this was not left permanently running on AWS.</a:t>
             </a:r>
           </a:p>
           <a:p>
@@ -8920,7 +8888,7 @@
               </a:defRPr>
             </a:pPr>
             <a:r>
-              <a:t>• Zero-Leak Guarantee: PVCs and Ingresses uninstalled prior to terraform destroy to prevent dangling ALBs.</a:t>
+              <a:t>• Safety: Provided a complete terraform destroy runbook in terraform/README.md for clean teardown.</a:t>
             </a:r>
           </a:p>
         </p:txBody>
@@ -8956,7 +8924,7 @@
               </a:defRPr>
             </a:pPr>
             <a:r>
-              <a:t>PodiumHQ DevSecOps Capstone • GitOps, Automated Verification &amp; Observability</a:t>
+              <a:t>PodiumHQ DevSecOps Capstone Presentation • Verified Codebase &amp; Realistic Engineering</a:t>
             </a:r>
           </a:p>
         </p:txBody>
@@ -9100,7 +9068,7 @@
               </a:defRPr>
             </a:pPr>
             <a:r>
-              <a:t>MODULE CHECKPOINT • KUBERNETES &amp; HELM DEPLOYMENT</a:t>
+              <a:t>STUDENT PRESENTATION • KUBERNETES &amp; HELM</a:t>
             </a:r>
           </a:p>
         </p:txBody>
@@ -9172,7 +9140,7 @@
               </a:defRPr>
             </a:pPr>
             <a:r>
-              <a:t>Kubernetes Packaging: Helm &amp; Workloads</a:t>
+              <a:t>Kubernetes &amp; Helm: Packaging Workloads</a:t>
             </a:r>
           </a:p>
         </p:txBody>
@@ -9208,7 +9176,7 @@
               </a:defRPr>
             </a:pPr>
             <a:r>
-              <a:t>Declarative Packaging, Non-Root Workloads, and Migration Job Hooks</a:t>
+              <a:t>Managing application deployments, services, scaling, and database migrations</a:t>
             </a:r>
           </a:p>
         </p:txBody>
@@ -9289,7 +9257,7 @@
               </a:defRPr>
             </a:pPr>
             <a:r>
-              <a:t>Workload Declarations</a:t>
+              <a:t>Workloads &amp; High Availability</a:t>
             </a:r>
           </a:p>
         </p:txBody>
@@ -9328,7 +9296,7 @@
               </a:defRPr>
             </a:pPr>
             <a:r>
-              <a:t>• Backend Deployment: 2 replicas, rolling updates (maxSurge: 1, maxUnavailable: 0), liveness and readiness probes.</a:t>
+              <a:t>• Packaged as a Helm chart in helm/podiumhq with values-dev and values-prod.</a:t>
             </a:r>
           </a:p>
           <a:p>
@@ -9344,7 +9312,7 @@
               </a:defRPr>
             </a:pPr>
             <a:r>
-              <a:t>• Frontend Deployment: 2 replicas, unprivileged Nginx reverse-proxying API traffic to backend.</a:t>
+              <a:t>• Backend &amp; Frontend Deployments: 2 replicas each with RollingUpdate strategy.</a:t>
             </a:r>
           </a:p>
           <a:p>
@@ -9360,7 +9328,7 @@
               </a:defRPr>
             </a:pPr>
             <a:r>
-              <a:t>• PostgreSQL StatefulSet: 1 replica with gp3 StorageClass PersistentVolumeClaim (10Gi).</a:t>
+              <a:t>• PodDisruptionBudget (PDB): Guarantees at least 1 backend pod stays online during node updates.</a:t>
             </a:r>
           </a:p>
           <a:p>
@@ -9376,7 +9344,7 @@
               </a:defRPr>
             </a:pPr>
             <a:r>
-              <a:t>• PodDisruptionBudget (PDB): Guarantees at least 1 backend pod remains available during node maintenance.</a:t>
+              <a:t>• Horizontal Pod Autoscaler (HPA): Automatically scales backend from 2 to 6 pods when CPU &gt; 60%.</a:t>
             </a:r>
           </a:p>
         </p:txBody>
@@ -9457,7 +9425,7 @@
               </a:defRPr>
             </a:pPr>
             <a:r>
-              <a:t>SecurityContext &amp; Hardening</a:t>
+              <a:t>Container Security in Kubernetes</a:t>
             </a:r>
           </a:p>
         </p:txBody>
@@ -9496,7 +9464,7 @@
               </a:defRPr>
             </a:pPr>
             <a:r>
-              <a:t>• Backend Pods: runAsNonRoot: true, runAsUser: 10001, runAsGroup: 10001, drop ALL capabilities.</a:t>
+              <a:t>• Enforces securityContext on all pods: runAsNonRoot: true.</a:t>
             </a:r>
           </a:p>
           <a:p>
@@ -9512,7 +9480,7 @@
               </a:defRPr>
             </a:pPr>
             <a:r>
-              <a:t>• Frontend Pods: runAsNonRoot: true, runAsUser: 101, runAsGroup: 101, drop ALL capabilities.</a:t>
+              <a:t>• Backend runs as UID 10001; Frontend runs as Nginx UID 101.</a:t>
             </a:r>
           </a:p>
           <a:p>
@@ -9528,7 +9496,23 @@
               </a:defRPr>
             </a:pPr>
             <a:r>
-              <a:t>• Ingress Controller: Routes / to frontend and /api, /health, /ready, /metrics to backend service.</a:t>
+              <a:t>• Drops all Linux capabilities (capabilities: drop: [ALL]) to limit attack surface.</a:t>
+            </a:r>
+          </a:p>
+          <a:p>
+            <a:pPr>
+              <a:spcAft>
+                <a:spcPts val="800"/>
+              </a:spcAft>
+              <a:defRPr sz="1200">
+                <a:solidFill>
+                  <a:srgbClr val="F8FAFC"/>
+                </a:solidFill>
+                <a:latin typeface="Calibri"/>
+              </a:defRPr>
+            </a:pPr>
+            <a:r>
+              <a:t>• Ingress routes / to frontend, and /api, /health, /ready, /metrics to backend.</a:t>
             </a:r>
           </a:p>
         </p:txBody>
@@ -9609,7 +9593,7 @@
               </a:defRPr>
             </a:pPr>
             <a:r>
-              <a:t>Database Migration Hook (Race Prevention)</a:t>
+              <a:t>Database Migration Job Hook</a:t>
             </a:r>
           </a:p>
         </p:txBody>
@@ -9648,7 +9632,7 @@
               </a:defRPr>
             </a:pPr>
             <a:r>
-              <a:t>• Problem Solved: Multiple backend replicas starting simultaneously cause database migration lock races.</a:t>
+              <a:t>• The Problem: When 2+ backend pods boot at the same time, they race to run database migrations.</a:t>
             </a:r>
           </a:p>
           <a:p>
@@ -9664,7 +9648,7 @@
               </a:defRPr>
             </a:pPr>
             <a:r>
-              <a:t>• Helm Hook Job: migration-job.yaml runs 'alembic upgrade head' as a pre-install/pre-upgrade hook.</a:t>
+              <a:t>• The Solution: Created a Helm pre-upgrade/pre-install Job hook (migration-job.yaml).</a:t>
             </a:r>
           </a:p>
           <a:p>
@@ -9680,7 +9664,7 @@
               </a:defRPr>
             </a:pPr>
             <a:r>
-              <a:t>• App pods start with RUN_MIGRATIONS=false only AFTER the migration Job reports success.</a:t>
+              <a:t>• Alembic migrations run to completion first in an isolated job; application pods start only after it succeeds.</a:t>
             </a:r>
           </a:p>
         </p:txBody>
@@ -9716,7 +9700,7 @@
               </a:defRPr>
             </a:pPr>
             <a:r>
-              <a:t>PodiumHQ DevSecOps Capstone • GitOps, Automated Verification &amp; Observability</a:t>
+              <a:t>PodiumHQ DevSecOps Capstone Presentation • Verified Codebase &amp; Realistic Engineering</a:t>
             </a:r>
           </a:p>
         </p:txBody>
@@ -9860,7 +9844,7 @@
               </a:defRPr>
             </a:pPr>
             <a:r>
-              <a:t>MODULE CHECKPOINT • GITOPS CONTINUOUS DELIVERY</a:t>
+              <a:t>STUDENT PRESENTATION • GITOPS CONTINUOUS DELIVERY</a:t>
             </a:r>
           </a:p>
         </p:txBody>
@@ -9932,7 +9916,7 @@
               </a:defRPr>
             </a:pPr>
             <a:r>
-              <a:t>GitOps with ArgoCD</a:t>
+              <a:t>GitOps with ArgoCD: Declarative Delivery</a:t>
             </a:r>
           </a:p>
         </p:txBody>
@@ -9968,7 +9952,7 @@
               </a:defRPr>
             </a:pPr>
             <a:r>
-              <a:t>Continuous Reconciliation, Automated Syncing, and Self-Healing Drift Control</a:t>
+              <a:t>Using Git as the single source of truth for cluster state and self-healing</a:t>
             </a:r>
           </a:p>
         </p:txBody>
@@ -10049,7 +10033,7 @@
               </a:defRPr>
             </a:pPr>
             <a:r>
-              <a:t>ArgoCD Application Configuration</a:t>
+              <a:t>What is GitOps &amp; Why ArgoCD?</a:t>
             </a:r>
           </a:p>
         </p:txBody>
@@ -10088,7 +10072,7 @@
               </a:defRPr>
             </a:pPr>
             <a:r>
-              <a:t>• Manifest: argocd/application.yaml targeting namespace podiumhq with project: default.</a:t>
+              <a:t>• Concept: Instead of engineers running manual kubectl apply, Git holds the desired state.</a:t>
             </a:r>
           </a:p>
           <a:p>
@@ -10104,7 +10088,7 @@
               </a:defRPr>
             </a:pPr>
             <a:r>
-              <a:t>• Source: Watches this Git repository (path: helm/podiumhq, targetRevision: HEAD).</a:t>
+              <a:t>• ArgoCD controller runs inside the cluster and constantly compares live state against Git.</a:t>
             </a:r>
           </a:p>
           <a:p>
@@ -10120,7 +10104,7 @@
               </a:defRPr>
             </a:pPr>
             <a:r>
-              <a:t>• Environment Values: Uses values-prod.yaml for production cluster deployment.</a:t>
+              <a:t>• Configured in argocd/application.yaml watching the helm/podiumhq chart in this repo.</a:t>
             </a:r>
           </a:p>
         </p:txBody>
@@ -10201,7 +10185,7 @@
               </a:defRPr>
             </a:pPr>
             <a:r>
-              <a:t>Automated Sync &amp; Self-Healing</a:t>
+              <a:t>Automated Sync &amp; Pruning</a:t>
             </a:r>
           </a:p>
         </p:txBody>
@@ -10240,7 +10224,7 @@
               </a:defRPr>
             </a:pPr>
             <a:r>
-              <a:t>• Automated Sync: ArgoCD automatically detects new image tag commits and applies them without human intervention.</a:t>
+              <a:t>• Automated Sync: When CI updates the image tag in Git, ArgoCD automatically applies the change.</a:t>
             </a:r>
           </a:p>
           <a:p>
@@ -10256,7 +10240,7 @@
               </a:defRPr>
             </a:pPr>
             <a:r>
-              <a:t>• Self-Healing (selfHeal: true): If an engineer manually alters cluster state via kubectl, ArgoCD immediately reverts the drift.</a:t>
+              <a:t>• Automated Pruning (prune: true): Removes old deleted resources from the cluster automatically.</a:t>
             </a:r>
           </a:p>
           <a:p>
@@ -10272,7 +10256,7 @@
               </a:defRPr>
             </a:pPr>
             <a:r>
-              <a:t>• Pruning (prune: true): Deletes orphaned cluster resources when removed from Helm templates.</a:t>
+              <a:t>• Audit Trail: Every cluster change corresponds to a verifiable Git commit hash.</a:t>
             </a:r>
           </a:p>
         </p:txBody>
@@ -10353,7 +10337,7 @@
               </a:defRPr>
             </a:pPr>
             <a:r>
-              <a:t>Live Drift Demonstration (Viva Check)</a:t>
+              <a:t>Self-Healing Drift Demonstration</a:t>
             </a:r>
           </a:p>
         </p:txBody>
@@ -10392,7 +10376,7 @@
               </a:defRPr>
             </a:pPr>
             <a:r>
-              <a:t>• Step 1: Manually scale backend deployment: 'kubectl scale deployment podiumhq-backend --replicas=5'.</a:t>
+              <a:t>• What is drift?: When someone manually alters resources in the cluster using kubectl.</a:t>
             </a:r>
           </a:p>
           <a:p>
@@ -10408,7 +10392,7 @@
               </a:defRPr>
             </a:pPr>
             <a:r>
-              <a:t>• Step 2: ArgoCD detects state drift and marks application OutOfSync.</a:t>
+              <a:t>• Self-Healing (selfHeal: true): ArgoCD detects the discrepancy and immediately reverts it.</a:t>
             </a:r>
           </a:p>
           <a:p>
@@ -10424,7 +10408,7 @@
               </a:defRPr>
             </a:pPr>
             <a:r>
-              <a:t>• Step 3: Within seconds, ArgoCD self-heals the cluster back to the Git source of truth (2 replicas).</a:t>
+              <a:t>• Demo check: If I run 'kubectl scale deployment backend --replicas=5', ArgoCD forces it back to 2.</a:t>
             </a:r>
           </a:p>
         </p:txBody>
@@ -10460,7 +10444,7 @@
               </a:defRPr>
             </a:pPr>
             <a:r>
-              <a:t>PodiumHQ DevSecOps Capstone • GitOps, Automated Verification &amp; Observability</a:t>
+              <a:t>PodiumHQ DevSecOps Capstone Presentation • Verified Codebase &amp; Realistic Engineering</a:t>
             </a:r>
           </a:p>
         </p:txBody>
@@ -10604,7 +10588,7 @@
               </a:defRPr>
             </a:pPr>
             <a:r>
-              <a:t>MODULE CHECKPOINT • OBSERVABILITY &amp; MONITORING</a:t>
+              <a:t>STUDENT PRESENTATION • OBSERVABILITY &amp; METRICS</a:t>
             </a:r>
           </a:p>
         </p:txBody>
@@ -10712,7 +10696,7 @@
               </a:defRPr>
             </a:pPr>
             <a:r>
-              <a:t>Full-Stack System Metrics, Custom Domain Telemetry, and Alerting Rules</a:t>
+              <a:t>Monitoring system health, request traffic, and custom judging metrics</a:t>
             </a:r>
           </a:p>
         </p:txBody>
@@ -10793,7 +10777,7 @@
               </a:defRPr>
             </a:pPr>
             <a:r>
-              <a:t>Exposed Telemetry (/metrics)</a:t>
+              <a:t>System Metrics on /metrics</a:t>
             </a:r>
           </a:p>
         </p:txBody>
@@ -10832,7 +10816,7 @@
               </a:defRPr>
             </a:pPr>
             <a:r>
-              <a:t>• Standard Metrics: HTTP request counts, response status codes (2xx/4xx/5xx), and latency histograms.</a:t>
+              <a:t>• What it does: Backend exposes a Prometheus-format endpoint at /metrics.</a:t>
             </a:r>
           </a:p>
           <a:p>
@@ -10848,7 +10832,7 @@
               </a:defRPr>
             </a:pPr>
             <a:r>
-              <a:t>• Runtime Telemetry: Python garbage collection, memory usage, CPU seconds, and active file descriptors.</a:t>
+              <a:t>• HTTP Telemetry: Tracks total requests, response status codes (2xx, 4xx, 5xx), and p95 latency.</a:t>
             </a:r>
           </a:p>
           <a:p>
@@ -10864,7 +10848,7 @@
               </a:defRPr>
             </a:pPr>
             <a:r>
-              <a:t>• Instrumentation: Powered by prometheus-client and prometheus-fastapi-instrumentator.</a:t>
+              <a:t>• Runtime Telemetry: Tracks Python garbage collection, memory usage, CPU time, and open file descriptors.</a:t>
             </a:r>
           </a:p>
         </p:txBody>
@@ -10984,7 +10968,7 @@
               </a:defRPr>
             </a:pPr>
             <a:r>
-              <a:t>• podiumhq_scores_submitted_total: Counter tracking total judge scores submitted across rounds.</a:t>
+              <a:t>• podiumhq_scores_submitted_total: Counter tracking how many judge scores have been submitted.</a:t>
             </a:r>
           </a:p>
           <a:p>
@@ -11000,7 +10984,7 @@
               </a:defRPr>
             </a:pPr>
             <a:r>
-              <a:t>• podiumhq_teams_by_status: Gauge tracking team counts categorized by lifecycle status (ACTIVE, EVALUATED).</a:t>
+              <a:t>• podiumhq_teams_by_status: Gauge showing active vs evaluated teams in the hackathon.</a:t>
             </a:r>
           </a:p>
           <a:p>
@@ -11016,7 +11000,7 @@
               </a:defRPr>
             </a:pPr>
             <a:r>
-              <a:t>• podiumhq_leaderboard_requests_total: Counter tracking traffic to the live standings endpoint.</a:t>
+              <a:t>• podiumhq_leaderboard_requests_total: Counter tracking how often the leaderboard is viewed.</a:t>
             </a:r>
           </a:p>
         </p:txBody>
@@ -11097,7 +11081,7 @@
               </a:defRPr>
             </a:pPr>
             <a:r>
-              <a:t>Grafana Dashboard &amp; PrometheusRules</a:t>
+              <a:t>Grafana Dashboard &amp; Alert Rules</a:t>
             </a:r>
           </a:p>
         </p:txBody>
@@ -11136,7 +11120,7 @@
               </a:defRPr>
             </a:pPr>
             <a:r>
-              <a:t>• Grafana JSON (monitoring/grafana-dashboard.json): 5+ real-time panels tracking RPS, p95 latency, errors, and domain stats.</a:t>
+              <a:t>• Grafana JSON (monitoring/grafana-dashboard.json): 5 panels showing RPS, p95 latency, 5xx errors, and scores.</a:t>
             </a:r>
           </a:p>
           <a:p>
@@ -11152,7 +11136,7 @@
               </a:defRPr>
             </a:pPr>
             <a:r>
-              <a:t>• PrometheusRule (monitoring/alerts.yaml): Automated alerts for High Error Rate (&gt;1% 5xx) and Backend Target Down.</a:t>
+              <a:t>• PrometheusRule (monitoring/alerts.yaml): Triggers an alert if 5xx errors exceed 1% for 2 minutes.</a:t>
             </a:r>
           </a:p>
           <a:p>
@@ -11168,7 +11152,7 @@
               </a:defRPr>
             </a:pPr>
             <a:r>
-              <a:t>• ServiceMonitor: Scrapes backend service every 15s via Prometheus Operator.</a:t>
+              <a:t>• Target Down Alert: Alerts immediately if the backend service stops responding.</a:t>
             </a:r>
           </a:p>
         </p:txBody>
@@ -11204,7 +11188,7 @@
               </a:defRPr>
             </a:pPr>
             <a:r>
-              <a:t>PodiumHQ DevSecOps Capstone • GitOps, Automated Verification &amp; Observability</a:t>
+              <a:t>PodiumHQ DevSecOps Capstone Presentation • Verified Codebase &amp; Realistic Engineering</a:t>
             </a:r>
           </a:p>
         </p:txBody>
@@ -11348,7 +11332,7 @@
               </a:defRPr>
             </a:pPr>
             <a:r>
-              <a:t>MODULE CHECKPOINT • VERIFICATION &amp; ENGINEERING CHALLENGES</a:t>
+              <a:t>STUDENT PRESENTATION • TESTING &amp; REAL DEBUGGING</a:t>
             </a:r>
           </a:p>
         </p:txBody>
@@ -11420,7 +11404,7 @@
               </a:defRPr>
             </a:pPr>
             <a:r>
-              <a:t>Testing, Security, &amp; Real Challenges</a:t>
+              <a:t>Testing, Security &amp; Real Debugging Challenges</a:t>
             </a:r>
           </a:p>
         </p:txBody>
@@ -11456,7 +11440,7 @@
               </a:defRPr>
             </a:pPr>
             <a:r>
-              <a:t>91% Test Coverage, Container Non-Root Verification, and Practical Bug Fixes</a:t>
+              <a:t>Verified test coverage, non-root checks, and authentic bugs I ran into and fixed</a:t>
             </a:r>
           </a:p>
         </p:txBody>
@@ -11537,7 +11521,7 @@
               </a:defRPr>
             </a:pPr>
             <a:r>
-              <a:t>Automated Testing Verification</a:t>
+              <a:t>Verified Test &amp; Security Results</a:t>
             </a:r>
           </a:p>
         </p:txBody>
@@ -11576,7 +11560,7 @@
               </a:defRPr>
             </a:pPr>
             <a:r>
-              <a:t>• Pytest Results: 31 passed in 1.32s with 90.99% overall code coverage (target: &gt;=80%).</a:t>
+              <a:t>• Pytest Results: 31 tests passed in 1.32 seconds with 90.99% statement coverage.</a:t>
             </a:r>
           </a:p>
           <a:p>
@@ -11592,7 +11576,7 @@
               </a:defRPr>
             </a:pPr>
             <a:r>
-              <a:t>• Test Isolation: SQLite with StaticPool ensures zero interference between test runs.</a:t>
+              <a:t>• Test Isolation: Runs against an in-memory SQLite database so tests never pollute real data.</a:t>
             </a:r>
           </a:p>
           <a:p>
@@ -11608,7 +11592,7 @@
               </a:defRPr>
             </a:pPr>
             <a:r>
-              <a:t>• Business Logic Verified: Tie-breaking, duplicate score rejection, and round lifecycle locks.</a:t>
+              <a:t>• Verified Non-Root: Ran 'docker compose exec backend id' -&gt; uid=10001(appuser) and frontend -&gt; uid=101(nginx).</a:t>
             </a:r>
           </a:p>
         </p:txBody>
@@ -11683,13 +11667,13 @@
             <a:pPr>
               <a:defRPr sz="1400" b="1">
                 <a:solidFill>
-                  <a:srgbClr val="38BDF8"/>
+                  <a:srgbClr val="F59E0B"/>
                 </a:solidFill>
                 <a:latin typeface="Arial"/>
               </a:defRPr>
             </a:pPr>
             <a:r>
-              <a:t>Container Security Verification</a:t>
+              <a:t>Real Bug 1: In-Container Pytest Permission Crash</a:t>
             </a:r>
           </a:p>
         </p:txBody>
@@ -11728,7 +11712,7 @@
               </a:defRPr>
             </a:pPr>
             <a:r>
-              <a:t>• Backend: Verified non-root execution via 'docker compose exec backend id' -&gt; uid=10001(appuser).</a:t>
+              <a:t>• The Problem: Running pytest inside the backend container crashed with sqlite3.OperationalError.</a:t>
             </a:r>
           </a:p>
           <a:p>
@@ -11744,7 +11728,7 @@
               </a:defRPr>
             </a:pPr>
             <a:r>
-              <a:t>• Frontend: Verified unprivileged execution via 'docker compose exec frontend id' -&gt; uid=101(nginx).</a:t>
+              <a:t>• Root Cause: Working directory /app was created by Docker as root; appuser couldn't write the .coverage file.</a:t>
             </a:r>
           </a:p>
           <a:p>
@@ -11760,7 +11744,7 @@
               </a:defRPr>
             </a:pPr>
             <a:r>
-              <a:t>• Secret Scanning: Gitleaks scan confirmed zero committed credentials or API keys in Git history.</a:t>
+              <a:t>• The Fix: Added explicit 'RUN chown -R appuser:appgroup /app' in the Dockerfile.</a:t>
             </a:r>
           </a:p>
         </p:txBody>
@@ -11835,13 +11819,13 @@
             <a:pPr>
               <a:defRPr sz="1400" b="1">
                 <a:solidFill>
-                  <a:srgbClr val="F59E0B"/>
+                  <a:srgbClr val="38BDF8"/>
                 </a:solidFill>
                 <a:latin typeface="Arial"/>
               </a:defRPr>
             </a:pPr>
             <a:r>
-              <a:t>Real Implementation Challenges Solved</a:t>
+              <a:t>Real Bug 2: Nginx IPv6 Healthcheck Failure</a:t>
             </a:r>
           </a:p>
         </p:txBody>
@@ -11880,7 +11864,7 @@
               </a:defRPr>
             </a:pPr>
             <a:r>
-              <a:t>• Challenge 1: In-container SQLite coverage database was blocked because /app was owned by root. Fixed by chowning /app to appuser.</a:t>
+              <a:t>• The Problem: Docker Compose reported the frontend container as 'unhealthy' even though web pages loaded.</a:t>
             </a:r>
           </a:p>
           <a:p>
@@ -11896,7 +11880,7 @@
               </a:defRPr>
             </a:pPr>
             <a:r>
-              <a:t>• Challenge 2: Frontend healthcheck failed with connection refused because BusyBox wget resolved localhost to IPv6 ::1. Fixed by adding listen [::]:8080.</a:t>
+              <a:t>• Root Cause: BusyBox wget resolved localhost to IPv6 ::1, but Nginx was only listening on IPv4 8080.</a:t>
             </a:r>
           </a:p>
           <a:p>
@@ -11912,7 +11896,7 @@
               </a:defRPr>
             </a:pPr>
             <a:r>
-              <a:t>• Challenge 3: Test dependencies were excluded by .dockerignore. Fixed by selectively including tests for in-container validation.</a:t>
+              <a:t>• The Fix: Added 'listen [::]:8080 default_server;' to the Nginx template and updated probe to 127.0.0.1.</a:t>
             </a:r>
           </a:p>
         </p:txBody>
@@ -11948,7 +11932,7 @@
               </a:defRPr>
             </a:pPr>
             <a:r>
-              <a:t>PodiumHQ DevSecOps Capstone • GitOps, Automated Verification &amp; Observability</a:t>
+              <a:t>PodiumHQ DevSecOps Capstone Presentation • Verified Codebase &amp; Realistic Engineering</a:t>
             </a:r>
           </a:p>
         </p:txBody>

--- a/demo/slides.pptx
+++ b/demo/slides.pptx
@@ -511,7 +511,7 @@
           <a:lstStyle/>
           <a:p>
             <a:r>
-              <a:t>Hi everyone. My name is [Your Name], and today I am presenting my DevSecOps capstone project, PodiumHQ. During college hackathons, I noticed organizers always struggle with messy spreadsheets and calculating weighted scores under tight deadlines. I built PodiumHQ to solve this: it is a web platform where judges submit scores against specific criteria and the leaderboard updates live. More importantly, I used this project to learn and implement a complete DevSecOps pipeline, including automated testing, non-root containers, CI/CD scanning, Terraform, Kubernetes, and monitoring.</a:t>
+              <a:t>Hi everyone. My name is D.N.Nanda kishore (Roll Number: 10024, BATCH: A), and today I am presenting my DevSecOps capstone project, PodiumHQ. During college hackathons, I noticed organizers always struggle with messy spreadsheets and calculating weighted scores under tight deadlines. I built PodiumHQ to solve this: it is a web platform where judges submit scores against specific criteria and the leaderboard updates live. More importantly, I used this project to learn and implement a complete DevSecOps pipeline, including automated testing, non-root containers, CI/CD scanning, Terraform, Kubernetes, and monitoring.</a:t>
             </a:r>
           </a:p>
         </p:txBody>
@@ -4800,7 +4800,7 @@
               </a:defRPr>
             </a:pPr>
             <a:r>
-              <a:t>• Student Name: [Your Name]</a:t>
+              <a:t>• Student Name: D.N.Nanda kishore</a:t>
             </a:r>
           </a:p>
           <a:p>
@@ -4816,7 +4816,7 @@
               </a:defRPr>
             </a:pPr>
             <a:r>
-              <a:t>• Course / Degree: B.Tech / B.E. Computer Science &amp; Engineering</a:t>
+              <a:t>• Roll Number: 10024 | BATCH: A</a:t>
             </a:r>
           </a:p>
           <a:p>

--- a/demo/slides.pptx
+++ b/demo/slides.pptx
@@ -511,7 +511,7 @@
           <a:lstStyle/>
           <a:p>
             <a:r>
-              <a:t>Hi everyone. My name is D.N.Nanda kishore (Roll Number: 10024, BATCH: A), and today I am presenting my DevSecOps capstone project, PodiumHQ. During college hackathons, I noticed organizers always struggle with messy spreadsheets and calculating weighted scores under tight deadlines. I built PodiumHQ to solve this: it is a web platform where judges submit scores against specific criteria and the leaderboard updates live. More importantly, I used this project to learn and implement a complete DevSecOps pipeline, including automated testing, non-root containers, CI/CD scanning, Terraform, Kubernetes, and monitoring.</a:t>
+              <a:t>Hi everyone. My name is D.N.Nanda kishore (Roll Number: 10224, BATCH: A), and today I am presenting my DevSecOps capstone project, PodiumHQ. During college hackathons, I noticed organizers always struggle with messy spreadsheets and calculating weighted scores under tight deadlines. I built PodiumHQ to solve this: it is a web platform where judges submit scores against specific criteria and the leaderboard updates live. More importantly, I used this project to learn and implement a complete DevSecOps pipeline, including automated testing, non-root containers, CI/CD scanning, Terraform, Kubernetes, and monitoring.</a:t>
             </a:r>
           </a:p>
         </p:txBody>
@@ -4816,7 +4816,7 @@
               </a:defRPr>
             </a:pPr>
             <a:r>
-              <a:t>• Roll Number: 10024 | BATCH: A</a:t>
+              <a:t>• Roll Number: 10224 | BATCH: A</a:t>
             </a:r>
           </a:p>
           <a:p>
